--- a/TSRS_Presentation_Improved.pptx
+++ b/TSRS_Presentation_Improved.pptx
@@ -12,6 +12,7 @@
     <p:sldId id="260" r:id="rId11"/>
     <p:sldId id="261" r:id="rId12"/>
     <p:sldId id="262" r:id="rId13"/>
+    <p:sldId id="263" r:id="rId14"/>
   </p:sldIdLst>
   <p:sldSz cx="12191695" cy="6858000" type="screen4x3"/>
   <p:notesSz cx="6858000" cy="9144000"/>
@@ -4446,7 +4447,7 @@
               </a:defRPr>
             </a:pPr>
             <a:r>
-              <a:t>TSRS = (H × 0.35) + (V × 0.30) + (O × 0.20) + (R⁻¹ × 0.10) + (I⁻¹ × 0.05)</a:t>
+              <a:t>TSRS = (H × 0.25) + (V × 0.30) + (O × 0.15) + (R⁻¹ × 0.18) + (I⁻¹ × 0.12)</a:t>
             </a:r>
           </a:p>
         </p:txBody>
@@ -4606,7 +4607,7 @@
               </a:defRPr>
             </a:pPr>
             <a:r>
-              <a:t>35%</a:t>
+              <a:t>25%</a:t>
             </a:r>
           </a:p>
         </p:txBody>
@@ -5070,7 +5071,7 @@
               </a:defRPr>
             </a:pPr>
             <a:r>
-              <a:t>20%</a:t>
+              <a:t>15%</a:t>
             </a:r>
           </a:p>
         </p:txBody>
@@ -5302,7 +5303,7 @@
               </a:defRPr>
             </a:pPr>
             <a:r>
-              <a:t>10%</a:t>
+              <a:t>18%</a:t>
             </a:r>
           </a:p>
         </p:txBody>
@@ -5534,7 +5535,7 @@
               </a:defRPr>
             </a:pPr>
             <a:r>
-              <a:t>5%</a:t>
+              <a:t>12%</a:t>
             </a:r>
           </a:p>
         </p:txBody>
@@ -6142,21 +6143,57 @@
               </a:defRPr>
             </a:pPr>
             <a:r>
-              <a:t>תרשים המודל: קלט → עיבוד → פלט</a:t>
-            </a:r>
-          </a:p>
-        </p:txBody>
-      </p:sp>
-      <p:sp>
-        <p:nvSpPr>
-          <p:cNvPr id="4" name="Rounded Rectangle 3"/>
+              <a:t>⚖️ כיול משקלים — התאמה לישראל 2026</a:t>
+            </a:r>
+          </a:p>
+        </p:txBody>
+      </p:sp>
+      <p:sp>
+        <p:nvSpPr>
+          <p:cNvPr id="4" name="TextBox 3"/>
+          <p:cNvSpPr txBox="1"/>
+          <p:nvPr/>
+        </p:nvSpPr>
+        <p:spPr>
+          <a:xfrm>
+            <a:off x="457200" y="1051560"/>
+            <a:ext cx="6858000" cy="411480"/>
+          </a:xfrm>
+          <a:prstGeom prst="rect">
+            <a:avLst/>
+          </a:prstGeom>
+          <a:noFill/>
+        </p:spPr>
+        <p:txBody>
+          <a:bodyPr wrap="square">
+            <a:spAutoFit/>
+          </a:bodyPr>
+          <a:lstStyle/>
+          <a:p>
+            <a:pPr algn="r">
+              <a:defRPr sz="1600" b="1">
+                <a:solidFill>
+                  <a:srgbClr val="FFFFFF"/>
+                </a:solidFill>
+                <a:latin typeface="Arial"/>
+              </a:defRPr>
+            </a:pPr>
+            <a:r>
+              <a:t>השוואה: בינלאומי vs. ישראל</a:t>
+            </a:r>
+          </a:p>
+        </p:txBody>
+      </p:sp>
+      <p:sp>
+        <p:nvSpPr>
+          <p:cNvPr id="5" name="Rounded Rectangle 4"/>
           <p:cNvSpPr/>
           <p:nvPr/>
         </p:nvSpPr>
         <p:spPr>
           <a:xfrm>
-            <a:off x="274320" y="1188720"/>
-            <a:ext cx="3474720" cy="5029200"/>
+            <a:off x="457200" y="1508760"/>
+            <a:ext cx="6858000" cy="4023360"/>
           </a:xfrm>
           <a:prstGeom prst="roundRect">
             <a:avLst/>
@@ -6166,7 +6203,7 @@
           </a:solidFill>
           <a:ln w="19050">
             <a:solidFill>
-              <a:srgbClr val="3B82F6"/>
+              <a:srgbClr val="334155"/>
             </a:solidFill>
           </a:ln>
         </p:spPr>
@@ -6194,14 +6231,14 @@
       </p:sp>
       <p:sp>
         <p:nvSpPr>
-          <p:cNvPr id="5" name="TextBox 4"/>
-          <p:cNvSpPr txBox="1"/>
-          <p:nvPr/>
-        </p:nvSpPr>
-        <p:spPr>
-          <a:xfrm>
-            <a:off x="457200" y="1280160"/>
-            <a:ext cx="3108960" cy="457200"/>
+          <p:cNvPr id="6" name="TextBox 5"/>
+          <p:cNvSpPr txBox="1"/>
+          <p:nvPr/>
+        </p:nvSpPr>
+        <p:spPr>
+          <a:xfrm>
+            <a:off x="640080" y="1600200"/>
+            <a:ext cx="1280160" cy="320040"/>
           </a:xfrm>
           <a:prstGeom prst="rect">
             <a:avLst/>
@@ -6215,7 +6252,950 @@
           <a:lstStyle/>
           <a:p>
             <a:pPr algn="ctr">
-              <a:defRPr sz="1800" b="1">
+              <a:defRPr sz="1200" b="1">
+                <a:solidFill>
+                  <a:srgbClr val="14B8A6"/>
+                </a:solidFill>
+                <a:latin typeface="Arial"/>
+              </a:defRPr>
+            </a:pPr>
+            <a:r>
+              <a:t>מדד</a:t>
+            </a:r>
+          </a:p>
+        </p:txBody>
+      </p:sp>
+      <p:sp>
+        <p:nvSpPr>
+          <p:cNvPr id="7" name="TextBox 6"/>
+          <p:cNvSpPr txBox="1"/>
+          <p:nvPr/>
+        </p:nvSpPr>
+        <p:spPr>
+          <a:xfrm>
+            <a:off x="1920240" y="1600200"/>
+            <a:ext cx="1371600" cy="320040"/>
+          </a:xfrm>
+          <a:prstGeom prst="rect">
+            <a:avLst/>
+          </a:prstGeom>
+          <a:noFill/>
+        </p:spPr>
+        <p:txBody>
+          <a:bodyPr wrap="square">
+            <a:spAutoFit/>
+          </a:bodyPr>
+          <a:lstStyle/>
+          <a:p>
+            <a:pPr algn="ctr">
+              <a:defRPr sz="1200" b="1">
+                <a:solidFill>
+                  <a:srgbClr val="94A3B8"/>
+                </a:solidFill>
+                <a:latin typeface="Arial"/>
+              </a:defRPr>
+            </a:pPr>
+            <a:r>
+              <a:t>בינלאומי</a:t>
+            </a:r>
+          </a:p>
+        </p:txBody>
+      </p:sp>
+      <p:sp>
+        <p:nvSpPr>
+          <p:cNvPr id="8" name="TextBox 7"/>
+          <p:cNvSpPr txBox="1"/>
+          <p:nvPr/>
+        </p:nvSpPr>
+        <p:spPr>
+          <a:xfrm>
+            <a:off x="3291840" y="1600200"/>
+            <a:ext cx="1280160" cy="320040"/>
+          </a:xfrm>
+          <a:prstGeom prst="rect">
+            <a:avLst/>
+          </a:prstGeom>
+          <a:noFill/>
+        </p:spPr>
+        <p:txBody>
+          <a:bodyPr wrap="square">
+            <a:spAutoFit/>
+          </a:bodyPr>
+          <a:lstStyle/>
+          <a:p>
+            <a:pPr algn="ctr">
+              <a:defRPr sz="1200" b="1">
+                <a:solidFill>
+                  <a:srgbClr val="14B8A6"/>
+                </a:solidFill>
+                <a:latin typeface="Arial"/>
+              </a:defRPr>
+            </a:pPr>
+            <a:r>
+              <a:t>ישראל</a:t>
+            </a:r>
+          </a:p>
+        </p:txBody>
+      </p:sp>
+      <p:sp>
+        <p:nvSpPr>
+          <p:cNvPr id="9" name="TextBox 8"/>
+          <p:cNvSpPr txBox="1"/>
+          <p:nvPr/>
+        </p:nvSpPr>
+        <p:spPr>
+          <a:xfrm>
+            <a:off x="4572000" y="1600200"/>
+            <a:ext cx="1280160" cy="320040"/>
+          </a:xfrm>
+          <a:prstGeom prst="rect">
+            <a:avLst/>
+          </a:prstGeom>
+          <a:noFill/>
+        </p:spPr>
+        <p:txBody>
+          <a:bodyPr wrap="square">
+            <a:spAutoFit/>
+          </a:bodyPr>
+          <a:lstStyle/>
+          <a:p>
+            <a:pPr algn="ctr">
+              <a:defRPr sz="1200" b="1">
+                <a:solidFill>
+                  <a:srgbClr val="FFFFFF"/>
+                </a:solidFill>
+                <a:latin typeface="Arial"/>
+              </a:defRPr>
+            </a:pPr>
+            <a:r>
+              <a:t>שינוי</a:t>
+            </a:r>
+          </a:p>
+        </p:txBody>
+      </p:sp>
+      <p:sp>
+        <p:nvSpPr>
+          <p:cNvPr id="10" name="TextBox 9"/>
+          <p:cNvSpPr txBox="1"/>
+          <p:nvPr/>
+        </p:nvSpPr>
+        <p:spPr>
+          <a:xfrm>
+            <a:off x="5852160" y="1600200"/>
+            <a:ext cx="1371600" cy="320040"/>
+          </a:xfrm>
+          <a:prstGeom prst="rect">
+            <a:avLst/>
+          </a:prstGeom>
+          <a:noFill/>
+        </p:spPr>
+        <p:txBody>
+          <a:bodyPr wrap="square">
+            <a:spAutoFit/>
+          </a:bodyPr>
+          <a:lstStyle/>
+          <a:p>
+            <a:pPr algn="ctr">
+              <a:defRPr sz="1200" b="1">
+                <a:solidFill>
+                  <a:srgbClr val="FFFFFF"/>
+                </a:solidFill>
+                <a:latin typeface="Arial"/>
+              </a:defRPr>
+            </a:pPr>
+            <a:r>
+              <a:t>נימוק</a:t>
+            </a:r>
+          </a:p>
+        </p:txBody>
+      </p:sp>
+      <p:sp>
+        <p:nvSpPr>
+          <p:cNvPr id="11" name="Rectangle 10"/>
+          <p:cNvSpPr/>
+          <p:nvPr/>
+        </p:nvSpPr>
+        <p:spPr>
+          <a:xfrm>
+            <a:off x="640080" y="1947672"/>
+            <a:ext cx="6492240" cy="18288"/>
+          </a:xfrm>
+          <a:prstGeom prst="rect">
+            <a:avLst/>
+          </a:prstGeom>
+          <a:solidFill>
+            <a:srgbClr val="14B8A6"/>
+          </a:solidFill>
+          <a:ln>
+            <a:noFill/>
+          </a:ln>
+        </p:spPr>
+        <p:style>
+          <a:lnRef idx="1">
+            <a:schemeClr val="accent1"/>
+          </a:lnRef>
+          <a:fillRef idx="3">
+            <a:schemeClr val="accent1"/>
+          </a:fillRef>
+          <a:effectRef idx="2">
+            <a:schemeClr val="accent1"/>
+          </a:effectRef>
+          <a:fontRef idx="minor">
+            <a:schemeClr val="lt1"/>
+          </a:fontRef>
+        </p:style>
+        <p:txBody>
+          <a:bodyPr rtlCol="0" anchor="ctr"/>
+          <a:lstStyle/>
+          <a:p>
+            <a:pPr algn="ctr"/>
+          </a:p>
+        </p:txBody>
+      </p:sp>
+      <p:sp>
+        <p:nvSpPr>
+          <p:cNvPr id="12" name="TextBox 11"/>
+          <p:cNvSpPr txBox="1"/>
+          <p:nvPr/>
+        </p:nvSpPr>
+        <p:spPr>
+          <a:xfrm>
+            <a:off x="640080" y="2057400"/>
+            <a:ext cx="1280160" cy="320040"/>
+          </a:xfrm>
+          <a:prstGeom prst="rect">
+            <a:avLst/>
+          </a:prstGeom>
+          <a:noFill/>
+        </p:spPr>
+        <p:txBody>
+          <a:bodyPr wrap="square">
+            <a:spAutoFit/>
+          </a:bodyPr>
+          <a:lstStyle/>
+          <a:p>
+            <a:pPr algn="ctr">
+              <a:defRPr sz="1200" b="1">
+                <a:solidFill>
+                  <a:srgbClr val="EF4444"/>
+                </a:solidFill>
+                <a:latin typeface="Arial"/>
+              </a:defRPr>
+            </a:pPr>
+            <a:r>
+              <a:t>H חשיפה</a:t>
+            </a:r>
+          </a:p>
+        </p:txBody>
+      </p:sp>
+      <p:sp>
+        <p:nvSpPr>
+          <p:cNvPr id="13" name="TextBox 12"/>
+          <p:cNvSpPr txBox="1"/>
+          <p:nvPr/>
+        </p:nvSpPr>
+        <p:spPr>
+          <a:xfrm>
+            <a:off x="1920240" y="2057400"/>
+            <a:ext cx="1371600" cy="320040"/>
+          </a:xfrm>
+          <a:prstGeom prst="rect">
+            <a:avLst/>
+          </a:prstGeom>
+          <a:noFill/>
+        </p:spPr>
+        <p:txBody>
+          <a:bodyPr wrap="square">
+            <a:spAutoFit/>
+          </a:bodyPr>
+          <a:lstStyle/>
+          <a:p>
+            <a:pPr algn="ctr">
+              <a:defRPr sz="1200" b="0">
+                <a:solidFill>
+                  <a:srgbClr val="94A3B8"/>
+                </a:solidFill>
+                <a:latin typeface="Arial"/>
+              </a:defRPr>
+            </a:pPr>
+            <a:r>
+              <a:t>35%</a:t>
+            </a:r>
+          </a:p>
+        </p:txBody>
+      </p:sp>
+      <p:sp>
+        <p:nvSpPr>
+          <p:cNvPr id="14" name="TextBox 13"/>
+          <p:cNvSpPr txBox="1"/>
+          <p:nvPr/>
+        </p:nvSpPr>
+        <p:spPr>
+          <a:xfrm>
+            <a:off x="3291840" y="2057400"/>
+            <a:ext cx="1280160" cy="320040"/>
+          </a:xfrm>
+          <a:prstGeom prst="rect">
+            <a:avLst/>
+          </a:prstGeom>
+          <a:noFill/>
+        </p:spPr>
+        <p:txBody>
+          <a:bodyPr wrap="square">
+            <a:spAutoFit/>
+          </a:bodyPr>
+          <a:lstStyle/>
+          <a:p>
+            <a:pPr algn="ctr">
+              <a:defRPr sz="1400" b="1">
+                <a:solidFill>
+                  <a:srgbClr val="14B8A6"/>
+                </a:solidFill>
+                <a:latin typeface="Arial"/>
+              </a:defRPr>
+            </a:pPr>
+            <a:r>
+              <a:t>25%</a:t>
+            </a:r>
+          </a:p>
+        </p:txBody>
+      </p:sp>
+      <p:sp>
+        <p:nvSpPr>
+          <p:cNvPr id="15" name="TextBox 14"/>
+          <p:cNvSpPr txBox="1"/>
+          <p:nvPr/>
+        </p:nvSpPr>
+        <p:spPr>
+          <a:xfrm>
+            <a:off x="4572000" y="2057400"/>
+            <a:ext cx="1280160" cy="320040"/>
+          </a:xfrm>
+          <a:prstGeom prst="rect">
+            <a:avLst/>
+          </a:prstGeom>
+          <a:noFill/>
+        </p:spPr>
+        <p:txBody>
+          <a:bodyPr wrap="square">
+            <a:spAutoFit/>
+          </a:bodyPr>
+          <a:lstStyle/>
+          <a:p>
+            <a:pPr algn="ctr">
+              <a:defRPr sz="1200" b="1">
+                <a:solidFill>
+                  <a:srgbClr val="EF4444"/>
+                </a:solidFill>
+                <a:latin typeface="Arial"/>
+              </a:defRPr>
+            </a:pPr>
+            <a:r>
+              <a:t>↓ 10</a:t>
+            </a:r>
+          </a:p>
+        </p:txBody>
+      </p:sp>
+      <p:sp>
+        <p:nvSpPr>
+          <p:cNvPr id="16" name="TextBox 15"/>
+          <p:cNvSpPr txBox="1"/>
+          <p:nvPr/>
+        </p:nvSpPr>
+        <p:spPr>
+          <a:xfrm>
+            <a:off x="5852160" y="2057400"/>
+            <a:ext cx="1371600" cy="320040"/>
+          </a:xfrm>
+          <a:prstGeom prst="rect">
+            <a:avLst/>
+          </a:prstGeom>
+          <a:noFill/>
+        </p:spPr>
+        <p:txBody>
+          <a:bodyPr wrap="square">
+            <a:spAutoFit/>
+          </a:bodyPr>
+          <a:lstStyle/>
+          <a:p>
+            <a:pPr algn="ctr">
+              <a:defRPr sz="1100" b="0">
+                <a:solidFill>
+                  <a:srgbClr val="F1F5F9"/>
+                </a:solidFill>
+                <a:latin typeface="Arial"/>
+              </a:defRPr>
+            </a:pPr>
+            <a:r>
+              <a:t>חוף צר</a:t>
+            </a:r>
+          </a:p>
+        </p:txBody>
+      </p:sp>
+      <p:sp>
+        <p:nvSpPr>
+          <p:cNvPr id="17" name="TextBox 16"/>
+          <p:cNvSpPr txBox="1"/>
+          <p:nvPr/>
+        </p:nvSpPr>
+        <p:spPr>
+          <a:xfrm>
+            <a:off x="640080" y="2651760"/>
+            <a:ext cx="1280160" cy="320040"/>
+          </a:xfrm>
+          <a:prstGeom prst="rect">
+            <a:avLst/>
+          </a:prstGeom>
+          <a:noFill/>
+        </p:spPr>
+        <p:txBody>
+          <a:bodyPr wrap="square">
+            <a:spAutoFit/>
+          </a:bodyPr>
+          <a:lstStyle/>
+          <a:p>
+            <a:pPr algn="ctr">
+              <a:defRPr sz="1200" b="1">
+                <a:solidFill>
+                  <a:srgbClr val="8B5CF6"/>
+                </a:solidFill>
+                <a:latin typeface="Arial"/>
+              </a:defRPr>
+            </a:pPr>
+            <a:r>
+              <a:t>V פגיעות</a:t>
+            </a:r>
+          </a:p>
+        </p:txBody>
+      </p:sp>
+      <p:sp>
+        <p:nvSpPr>
+          <p:cNvPr id="18" name="TextBox 17"/>
+          <p:cNvSpPr txBox="1"/>
+          <p:nvPr/>
+        </p:nvSpPr>
+        <p:spPr>
+          <a:xfrm>
+            <a:off x="1920240" y="2651760"/>
+            <a:ext cx="1371600" cy="320040"/>
+          </a:xfrm>
+          <a:prstGeom prst="rect">
+            <a:avLst/>
+          </a:prstGeom>
+          <a:noFill/>
+        </p:spPr>
+        <p:txBody>
+          <a:bodyPr wrap="square">
+            <a:spAutoFit/>
+          </a:bodyPr>
+          <a:lstStyle/>
+          <a:p>
+            <a:pPr algn="ctr">
+              <a:defRPr sz="1200" b="0">
+                <a:solidFill>
+                  <a:srgbClr val="94A3B8"/>
+                </a:solidFill>
+                <a:latin typeface="Arial"/>
+              </a:defRPr>
+            </a:pPr>
+            <a:r>
+              <a:t>30%</a:t>
+            </a:r>
+          </a:p>
+        </p:txBody>
+      </p:sp>
+      <p:sp>
+        <p:nvSpPr>
+          <p:cNvPr id="19" name="TextBox 18"/>
+          <p:cNvSpPr txBox="1"/>
+          <p:nvPr/>
+        </p:nvSpPr>
+        <p:spPr>
+          <a:xfrm>
+            <a:off x="3291840" y="2651760"/>
+            <a:ext cx="1280160" cy="320040"/>
+          </a:xfrm>
+          <a:prstGeom prst="rect">
+            <a:avLst/>
+          </a:prstGeom>
+          <a:noFill/>
+        </p:spPr>
+        <p:txBody>
+          <a:bodyPr wrap="square">
+            <a:spAutoFit/>
+          </a:bodyPr>
+          <a:lstStyle/>
+          <a:p>
+            <a:pPr algn="ctr">
+              <a:defRPr sz="1400" b="1">
+                <a:solidFill>
+                  <a:srgbClr val="14B8A6"/>
+                </a:solidFill>
+                <a:latin typeface="Arial"/>
+              </a:defRPr>
+            </a:pPr>
+            <a:r>
+              <a:t>30%</a:t>
+            </a:r>
+          </a:p>
+        </p:txBody>
+      </p:sp>
+      <p:sp>
+        <p:nvSpPr>
+          <p:cNvPr id="20" name="TextBox 19"/>
+          <p:cNvSpPr txBox="1"/>
+          <p:nvPr/>
+        </p:nvSpPr>
+        <p:spPr>
+          <a:xfrm>
+            <a:off x="4572000" y="2651760"/>
+            <a:ext cx="1280160" cy="320040"/>
+          </a:xfrm>
+          <a:prstGeom prst="rect">
+            <a:avLst/>
+          </a:prstGeom>
+          <a:noFill/>
+        </p:spPr>
+        <p:txBody>
+          <a:bodyPr wrap="square">
+            <a:spAutoFit/>
+          </a:bodyPr>
+          <a:lstStyle/>
+          <a:p>
+            <a:pPr algn="ctr">
+              <a:defRPr sz="1200" b="1">
+                <a:solidFill>
+                  <a:srgbClr val="FFFFFF"/>
+                </a:solidFill>
+                <a:latin typeface="Arial"/>
+              </a:defRPr>
+            </a:pPr>
+            <a:r>
+              <a:t>= 0</a:t>
+            </a:r>
+          </a:p>
+        </p:txBody>
+      </p:sp>
+      <p:sp>
+        <p:nvSpPr>
+          <p:cNvPr id="21" name="TextBox 20"/>
+          <p:cNvSpPr txBox="1"/>
+          <p:nvPr/>
+        </p:nvSpPr>
+        <p:spPr>
+          <a:xfrm>
+            <a:off x="5852160" y="2651760"/>
+            <a:ext cx="1371600" cy="320040"/>
+          </a:xfrm>
+          <a:prstGeom prst="rect">
+            <a:avLst/>
+          </a:prstGeom>
+          <a:noFill/>
+        </p:spPr>
+        <p:txBody>
+          <a:bodyPr wrap="square">
+            <a:spAutoFit/>
+          </a:bodyPr>
+          <a:lstStyle/>
+          <a:p>
+            <a:pPr algn="ctr">
+              <a:defRPr sz="1100" b="0">
+                <a:solidFill>
+                  <a:srgbClr val="F1F5F9"/>
+                </a:solidFill>
+                <a:latin typeface="Arial"/>
+              </a:defRPr>
+            </a:pPr>
+            <a:r>
+              <a:t>מבדיל</a:t>
+            </a:r>
+          </a:p>
+        </p:txBody>
+      </p:sp>
+      <p:sp>
+        <p:nvSpPr>
+          <p:cNvPr id="22" name="TextBox 21"/>
+          <p:cNvSpPr txBox="1"/>
+          <p:nvPr/>
+        </p:nvSpPr>
+        <p:spPr>
+          <a:xfrm>
+            <a:off x="640080" y="3246120"/>
+            <a:ext cx="1280160" cy="320040"/>
+          </a:xfrm>
+          <a:prstGeom prst="rect">
+            <a:avLst/>
+          </a:prstGeom>
+          <a:noFill/>
+        </p:spPr>
+        <p:txBody>
+          <a:bodyPr wrap="square">
+            <a:spAutoFit/>
+          </a:bodyPr>
+          <a:lstStyle/>
+          <a:p>
+            <a:pPr algn="ctr">
+              <a:defRPr sz="1200" b="1">
+                <a:solidFill>
+                  <a:srgbClr val="F97316"/>
+                </a:solidFill>
+                <a:latin typeface="Arial"/>
+              </a:defRPr>
+            </a:pPr>
+            <a:r>
+              <a:t>O מבצעי</a:t>
+            </a:r>
+          </a:p>
+        </p:txBody>
+      </p:sp>
+      <p:sp>
+        <p:nvSpPr>
+          <p:cNvPr id="23" name="TextBox 22"/>
+          <p:cNvSpPr txBox="1"/>
+          <p:nvPr/>
+        </p:nvSpPr>
+        <p:spPr>
+          <a:xfrm>
+            <a:off x="1920240" y="3246120"/>
+            <a:ext cx="1371600" cy="320040"/>
+          </a:xfrm>
+          <a:prstGeom prst="rect">
+            <a:avLst/>
+          </a:prstGeom>
+          <a:noFill/>
+        </p:spPr>
+        <p:txBody>
+          <a:bodyPr wrap="square">
+            <a:spAutoFit/>
+          </a:bodyPr>
+          <a:lstStyle/>
+          <a:p>
+            <a:pPr algn="ctr">
+              <a:defRPr sz="1200" b="0">
+                <a:solidFill>
+                  <a:srgbClr val="94A3B8"/>
+                </a:solidFill>
+                <a:latin typeface="Arial"/>
+              </a:defRPr>
+            </a:pPr>
+            <a:r>
+              <a:t>20%</a:t>
+            </a:r>
+          </a:p>
+        </p:txBody>
+      </p:sp>
+      <p:sp>
+        <p:nvSpPr>
+          <p:cNvPr id="24" name="TextBox 23"/>
+          <p:cNvSpPr txBox="1"/>
+          <p:nvPr/>
+        </p:nvSpPr>
+        <p:spPr>
+          <a:xfrm>
+            <a:off x="3291840" y="3246120"/>
+            <a:ext cx="1280160" cy="320040"/>
+          </a:xfrm>
+          <a:prstGeom prst="rect">
+            <a:avLst/>
+          </a:prstGeom>
+          <a:noFill/>
+        </p:spPr>
+        <p:txBody>
+          <a:bodyPr wrap="square">
+            <a:spAutoFit/>
+          </a:bodyPr>
+          <a:lstStyle/>
+          <a:p>
+            <a:pPr algn="ctr">
+              <a:defRPr sz="1400" b="1">
+                <a:solidFill>
+                  <a:srgbClr val="14B8A6"/>
+                </a:solidFill>
+                <a:latin typeface="Arial"/>
+              </a:defRPr>
+            </a:pPr>
+            <a:r>
+              <a:t>15%</a:t>
+            </a:r>
+          </a:p>
+        </p:txBody>
+      </p:sp>
+      <p:sp>
+        <p:nvSpPr>
+          <p:cNvPr id="25" name="TextBox 24"/>
+          <p:cNvSpPr txBox="1"/>
+          <p:nvPr/>
+        </p:nvSpPr>
+        <p:spPr>
+          <a:xfrm>
+            <a:off x="4572000" y="3246120"/>
+            <a:ext cx="1280160" cy="320040"/>
+          </a:xfrm>
+          <a:prstGeom prst="rect">
+            <a:avLst/>
+          </a:prstGeom>
+          <a:noFill/>
+        </p:spPr>
+        <p:txBody>
+          <a:bodyPr wrap="square">
+            <a:spAutoFit/>
+          </a:bodyPr>
+          <a:lstStyle/>
+          <a:p>
+            <a:pPr algn="ctr">
+              <a:defRPr sz="1200" b="1">
+                <a:solidFill>
+                  <a:srgbClr val="EF4444"/>
+                </a:solidFill>
+                <a:latin typeface="Arial"/>
+              </a:defRPr>
+            </a:pPr>
+            <a:r>
+              <a:t>↓ 5</a:t>
+            </a:r>
+          </a:p>
+        </p:txBody>
+      </p:sp>
+      <p:sp>
+        <p:nvSpPr>
+          <p:cNvPr id="26" name="TextBox 25"/>
+          <p:cNvSpPr txBox="1"/>
+          <p:nvPr/>
+        </p:nvSpPr>
+        <p:spPr>
+          <a:xfrm>
+            <a:off x="5852160" y="3246120"/>
+            <a:ext cx="1371600" cy="320040"/>
+          </a:xfrm>
+          <a:prstGeom prst="rect">
+            <a:avLst/>
+          </a:prstGeom>
+          <a:noFill/>
+        </p:spPr>
+        <p:txBody>
+          <a:bodyPr wrap="square">
+            <a:spAutoFit/>
+          </a:bodyPr>
+          <a:lstStyle/>
+          <a:p>
+            <a:pPr algn="ctr">
+              <a:defRPr sz="1100" b="0">
+                <a:solidFill>
+                  <a:srgbClr val="F1F5F9"/>
+                </a:solidFill>
+                <a:latin typeface="Arial"/>
+              </a:defRPr>
+            </a:pPr>
+            <a:r>
+              <a:t>עבר ל-I</a:t>
+            </a:r>
+          </a:p>
+        </p:txBody>
+      </p:sp>
+      <p:sp>
+        <p:nvSpPr>
+          <p:cNvPr id="27" name="TextBox 26"/>
+          <p:cNvSpPr txBox="1"/>
+          <p:nvPr/>
+        </p:nvSpPr>
+        <p:spPr>
+          <a:xfrm>
+            <a:off x="640080" y="3840480"/>
+            <a:ext cx="1280160" cy="320040"/>
+          </a:xfrm>
+          <a:prstGeom prst="rect">
+            <a:avLst/>
+          </a:prstGeom>
+          <a:noFill/>
+        </p:spPr>
+        <p:txBody>
+          <a:bodyPr wrap="square">
+            <a:spAutoFit/>
+          </a:bodyPr>
+          <a:lstStyle/>
+          <a:p>
+            <a:pPr algn="ctr">
+              <a:defRPr sz="1200" b="1">
+                <a:solidFill>
+                  <a:srgbClr val="22C55E"/>
+                </a:solidFill>
+                <a:latin typeface="Arial"/>
+              </a:defRPr>
+            </a:pPr>
+            <a:r>
+              <a:t>R⁻¹ משאבים</a:t>
+            </a:r>
+          </a:p>
+        </p:txBody>
+      </p:sp>
+      <p:sp>
+        <p:nvSpPr>
+          <p:cNvPr id="28" name="TextBox 27"/>
+          <p:cNvSpPr txBox="1"/>
+          <p:nvPr/>
+        </p:nvSpPr>
+        <p:spPr>
+          <a:xfrm>
+            <a:off x="1920240" y="3840480"/>
+            <a:ext cx="1371600" cy="320040"/>
+          </a:xfrm>
+          <a:prstGeom prst="rect">
+            <a:avLst/>
+          </a:prstGeom>
+          <a:noFill/>
+        </p:spPr>
+        <p:txBody>
+          <a:bodyPr wrap="square">
+            <a:spAutoFit/>
+          </a:bodyPr>
+          <a:lstStyle/>
+          <a:p>
+            <a:pPr algn="ctr">
+              <a:defRPr sz="1200" b="0">
+                <a:solidFill>
+                  <a:srgbClr val="94A3B8"/>
+                </a:solidFill>
+                <a:latin typeface="Arial"/>
+              </a:defRPr>
+            </a:pPr>
+            <a:r>
+              <a:t>10%</a:t>
+            </a:r>
+          </a:p>
+        </p:txBody>
+      </p:sp>
+      <p:sp>
+        <p:nvSpPr>
+          <p:cNvPr id="29" name="TextBox 28"/>
+          <p:cNvSpPr txBox="1"/>
+          <p:nvPr/>
+        </p:nvSpPr>
+        <p:spPr>
+          <a:xfrm>
+            <a:off x="3291840" y="3840480"/>
+            <a:ext cx="1280160" cy="320040"/>
+          </a:xfrm>
+          <a:prstGeom prst="rect">
+            <a:avLst/>
+          </a:prstGeom>
+          <a:noFill/>
+        </p:spPr>
+        <p:txBody>
+          <a:bodyPr wrap="square">
+            <a:spAutoFit/>
+          </a:bodyPr>
+          <a:lstStyle/>
+          <a:p>
+            <a:pPr algn="ctr">
+              <a:defRPr sz="1400" b="1">
+                <a:solidFill>
+                  <a:srgbClr val="14B8A6"/>
+                </a:solidFill>
+                <a:latin typeface="Arial"/>
+              </a:defRPr>
+            </a:pPr>
+            <a:r>
+              <a:t>18%</a:t>
+            </a:r>
+          </a:p>
+        </p:txBody>
+      </p:sp>
+      <p:sp>
+        <p:nvSpPr>
+          <p:cNvPr id="30" name="TextBox 29"/>
+          <p:cNvSpPr txBox="1"/>
+          <p:nvPr/>
+        </p:nvSpPr>
+        <p:spPr>
+          <a:xfrm>
+            <a:off x="4572000" y="3840480"/>
+            <a:ext cx="1280160" cy="320040"/>
+          </a:xfrm>
+          <a:prstGeom prst="rect">
+            <a:avLst/>
+          </a:prstGeom>
+          <a:noFill/>
+        </p:spPr>
+        <p:txBody>
+          <a:bodyPr wrap="square">
+            <a:spAutoFit/>
+          </a:bodyPr>
+          <a:lstStyle/>
+          <a:p>
+            <a:pPr algn="ctr">
+              <a:defRPr sz="1200" b="1">
+                <a:solidFill>
+                  <a:srgbClr val="22C55E"/>
+                </a:solidFill>
+                <a:latin typeface="Arial"/>
+              </a:defRPr>
+            </a:pPr>
+            <a:r>
+              <a:t>↑ 8</a:t>
+            </a:r>
+          </a:p>
+        </p:txBody>
+      </p:sp>
+      <p:sp>
+        <p:nvSpPr>
+          <p:cNvPr id="31" name="TextBox 30"/>
+          <p:cNvSpPr txBox="1"/>
+          <p:nvPr/>
+        </p:nvSpPr>
+        <p:spPr>
+          <a:xfrm>
+            <a:off x="5852160" y="3840480"/>
+            <a:ext cx="1371600" cy="320040"/>
+          </a:xfrm>
+          <a:prstGeom prst="rect">
+            <a:avLst/>
+          </a:prstGeom>
+          <a:noFill/>
+        </p:spPr>
+        <p:txBody>
+          <a:bodyPr wrap="square">
+            <a:spAutoFit/>
+          </a:bodyPr>
+          <a:lstStyle/>
+          <a:p>
+            <a:pPr algn="ctr">
+              <a:defRPr sz="1100" b="0">
+                <a:solidFill>
+                  <a:srgbClr val="F1F5F9"/>
+                </a:solidFill>
+                <a:latin typeface="Arial"/>
+              </a:defRPr>
+            </a:pPr>
+            <a:r>
+              <a:t>פערים</a:t>
+            </a:r>
+          </a:p>
+        </p:txBody>
+      </p:sp>
+      <p:sp>
+        <p:nvSpPr>
+          <p:cNvPr id="32" name="TextBox 31"/>
+          <p:cNvSpPr txBox="1"/>
+          <p:nvPr/>
+        </p:nvSpPr>
+        <p:spPr>
+          <a:xfrm>
+            <a:off x="640080" y="4434840"/>
+            <a:ext cx="1280160" cy="320040"/>
+          </a:xfrm>
+          <a:prstGeom prst="rect">
+            <a:avLst/>
+          </a:prstGeom>
+          <a:noFill/>
+        </p:spPr>
+        <p:txBody>
+          <a:bodyPr wrap="square">
+            <a:spAutoFit/>
+          </a:bodyPr>
+          <a:lstStyle/>
+          <a:p>
+            <a:pPr algn="ctr">
+              <a:defRPr sz="1200" b="1">
                 <a:solidFill>
                   <a:srgbClr val="3B82F6"/>
                 </a:solidFill>
@@ -6223,34 +7203,142 @@
               </a:defRPr>
             </a:pPr>
             <a:r>
-              <a:t>📥  נתוני קלט</a:t>
-            </a:r>
-          </a:p>
-        </p:txBody>
-      </p:sp>
-      <p:sp>
-        <p:nvSpPr>
-          <p:cNvPr id="6" name="TextBox 5"/>
-          <p:cNvSpPr txBox="1"/>
-          <p:nvPr/>
-        </p:nvSpPr>
-        <p:spPr>
-          <a:xfrm>
-            <a:off x="457200" y="1920240"/>
-            <a:ext cx="3108960" cy="320040"/>
-          </a:xfrm>
-          <a:prstGeom prst="rect">
-            <a:avLst/>
-          </a:prstGeom>
-          <a:noFill/>
-        </p:spPr>
-        <p:txBody>
-          <a:bodyPr wrap="square">
-            <a:spAutoFit/>
-          </a:bodyPr>
-          <a:lstStyle/>
-          <a:p>
-            <a:pPr algn="r">
+              <a:t>I⁻¹ תשתית</a:t>
+            </a:r>
+          </a:p>
+        </p:txBody>
+      </p:sp>
+      <p:sp>
+        <p:nvSpPr>
+          <p:cNvPr id="33" name="TextBox 32"/>
+          <p:cNvSpPr txBox="1"/>
+          <p:nvPr/>
+        </p:nvSpPr>
+        <p:spPr>
+          <a:xfrm>
+            <a:off x="1920240" y="4434840"/>
+            <a:ext cx="1371600" cy="320040"/>
+          </a:xfrm>
+          <a:prstGeom prst="rect">
+            <a:avLst/>
+          </a:prstGeom>
+          <a:noFill/>
+        </p:spPr>
+        <p:txBody>
+          <a:bodyPr wrap="square">
+            <a:spAutoFit/>
+          </a:bodyPr>
+          <a:lstStyle/>
+          <a:p>
+            <a:pPr algn="ctr">
+              <a:defRPr sz="1200" b="0">
+                <a:solidFill>
+                  <a:srgbClr val="94A3B8"/>
+                </a:solidFill>
+                <a:latin typeface="Arial"/>
+              </a:defRPr>
+            </a:pPr>
+            <a:r>
+              <a:t>5%</a:t>
+            </a:r>
+          </a:p>
+        </p:txBody>
+      </p:sp>
+      <p:sp>
+        <p:nvSpPr>
+          <p:cNvPr id="34" name="TextBox 33"/>
+          <p:cNvSpPr txBox="1"/>
+          <p:nvPr/>
+        </p:nvSpPr>
+        <p:spPr>
+          <a:xfrm>
+            <a:off x="3291840" y="4434840"/>
+            <a:ext cx="1280160" cy="320040"/>
+          </a:xfrm>
+          <a:prstGeom prst="rect">
+            <a:avLst/>
+          </a:prstGeom>
+          <a:noFill/>
+        </p:spPr>
+        <p:txBody>
+          <a:bodyPr wrap="square">
+            <a:spAutoFit/>
+          </a:bodyPr>
+          <a:lstStyle/>
+          <a:p>
+            <a:pPr algn="ctr">
+              <a:defRPr sz="1400" b="1">
+                <a:solidFill>
+                  <a:srgbClr val="14B8A6"/>
+                </a:solidFill>
+                <a:latin typeface="Arial"/>
+              </a:defRPr>
+            </a:pPr>
+            <a:r>
+              <a:t>12%</a:t>
+            </a:r>
+          </a:p>
+        </p:txBody>
+      </p:sp>
+      <p:sp>
+        <p:nvSpPr>
+          <p:cNvPr id="35" name="TextBox 34"/>
+          <p:cNvSpPr txBox="1"/>
+          <p:nvPr/>
+        </p:nvSpPr>
+        <p:spPr>
+          <a:xfrm>
+            <a:off x="4572000" y="4434840"/>
+            <a:ext cx="1280160" cy="320040"/>
+          </a:xfrm>
+          <a:prstGeom prst="rect">
+            <a:avLst/>
+          </a:prstGeom>
+          <a:noFill/>
+        </p:spPr>
+        <p:txBody>
+          <a:bodyPr wrap="square">
+            <a:spAutoFit/>
+          </a:bodyPr>
+          <a:lstStyle/>
+          <a:p>
+            <a:pPr algn="ctr">
+              <a:defRPr sz="1200" b="1">
+                <a:solidFill>
+                  <a:srgbClr val="22C55E"/>
+                </a:solidFill>
+                <a:latin typeface="Arial"/>
+              </a:defRPr>
+            </a:pPr>
+            <a:r>
+              <a:t>↑ 7</a:t>
+            </a:r>
+          </a:p>
+        </p:txBody>
+      </p:sp>
+      <p:sp>
+        <p:nvSpPr>
+          <p:cNvPr id="36" name="TextBox 35"/>
+          <p:cNvSpPr txBox="1"/>
+          <p:nvPr/>
+        </p:nvSpPr>
+        <p:spPr>
+          <a:xfrm>
+            <a:off x="5852160" y="4434840"/>
+            <a:ext cx="1371600" cy="320040"/>
+          </a:xfrm>
+          <a:prstGeom prst="rect">
+            <a:avLst/>
+          </a:prstGeom>
+          <a:noFill/>
+        </p:spPr>
+        <p:txBody>
+          <a:bodyPr wrap="square">
+            <a:spAutoFit/>
+          </a:bodyPr>
+          <a:lstStyle/>
+          <a:p>
+            <a:pPr algn="ctr">
               <a:defRPr sz="1100" b="0">
                 <a:solidFill>
                   <a:srgbClr val="F1F5F9"/>
@@ -6259,273 +7347,21 @@
               </a:defRPr>
             </a:pPr>
             <a:r>
-              <a:t>▸  DEM 5m — מפ"י (מודל גובה דיגיטלי)</a:t>
-            </a:r>
-          </a:p>
-        </p:txBody>
-      </p:sp>
-      <p:sp>
-        <p:nvSpPr>
-          <p:cNvPr id="7" name="TextBox 6"/>
-          <p:cNvSpPr txBox="1"/>
-          <p:nvPr/>
-        </p:nvSpPr>
-        <p:spPr>
-          <a:xfrm>
-            <a:off x="457200" y="2304288"/>
-            <a:ext cx="3108960" cy="320040"/>
-          </a:xfrm>
-          <a:prstGeom prst="rect">
-            <a:avLst/>
-          </a:prstGeom>
-          <a:noFill/>
-        </p:spPr>
-        <p:txBody>
-          <a:bodyPr wrap="square">
-            <a:spAutoFit/>
-          </a:bodyPr>
-          <a:lstStyle/>
-          <a:p>
-            <a:pPr algn="r">
-              <a:defRPr sz="1100" b="0">
-                <a:solidFill>
-                  <a:srgbClr val="F1F5F9"/>
-                </a:solidFill>
-                <a:latin typeface="Arial"/>
-              </a:defRPr>
-            </a:pPr>
-            <a:r>
-              <a:t>▸  גבולות מוניציפליים — OSM</a:t>
-            </a:r>
-          </a:p>
-        </p:txBody>
-      </p:sp>
-      <p:sp>
-        <p:nvSpPr>
-          <p:cNvPr id="8" name="TextBox 7"/>
-          <p:cNvSpPr txBox="1"/>
-          <p:nvPr/>
-        </p:nvSpPr>
-        <p:spPr>
-          <a:xfrm>
-            <a:off x="457200" y="2688336"/>
-            <a:ext cx="3108960" cy="320040"/>
-          </a:xfrm>
-          <a:prstGeom prst="rect">
-            <a:avLst/>
-          </a:prstGeom>
-          <a:noFill/>
-        </p:spPr>
-        <p:txBody>
-          <a:bodyPr wrap="square">
-            <a:spAutoFit/>
-          </a:bodyPr>
-          <a:lstStyle/>
-          <a:p>
-            <a:pPr algn="r">
-              <a:defRPr sz="1100" b="0">
-                <a:solidFill>
-                  <a:srgbClr val="F1F5F9"/>
-                </a:solidFill>
-                <a:latin typeface="Arial"/>
-              </a:defRPr>
-            </a:pPr>
-            <a:r>
-              <a:t>▸  אוכלוסייה וגילאים — למ"ס</a:t>
-            </a:r>
-          </a:p>
-        </p:txBody>
-      </p:sp>
-      <p:sp>
-        <p:nvSpPr>
-          <p:cNvPr id="9" name="TextBox 8"/>
-          <p:cNvSpPr txBox="1"/>
-          <p:nvPr/>
-        </p:nvSpPr>
-        <p:spPr>
-          <a:xfrm>
-            <a:off x="457200" y="3072384"/>
-            <a:ext cx="3108960" cy="320040"/>
-          </a:xfrm>
-          <a:prstGeom prst="rect">
-            <a:avLst/>
-          </a:prstGeom>
-          <a:noFill/>
-        </p:spPr>
-        <p:txBody>
-          <a:bodyPr wrap="square">
-            <a:spAutoFit/>
-          </a:bodyPr>
-          <a:lstStyle/>
-          <a:p>
-            <a:pPr algn="r">
-              <a:defRPr sz="1100" b="0">
-                <a:solidFill>
-                  <a:srgbClr val="F1F5F9"/>
-                </a:solidFill>
-                <a:latin typeface="Arial"/>
-              </a:defRPr>
-            </a:pPr>
-            <a:r>
-              <a:t>▸  אשכול סוציו-אקונומי — למ"ס</a:t>
-            </a:r>
-          </a:p>
-        </p:txBody>
-      </p:sp>
-      <p:sp>
-        <p:nvSpPr>
-          <p:cNvPr id="10" name="TextBox 9"/>
-          <p:cNvSpPr txBox="1"/>
-          <p:nvPr/>
-        </p:nvSpPr>
-        <p:spPr>
-          <a:xfrm>
-            <a:off x="457200" y="3456432"/>
-            <a:ext cx="3108960" cy="320040"/>
-          </a:xfrm>
-          <a:prstGeom prst="rect">
-            <a:avLst/>
-          </a:prstGeom>
-          <a:noFill/>
-        </p:spPr>
-        <p:txBody>
-          <a:bodyPr wrap="square">
-            <a:spAutoFit/>
-          </a:bodyPr>
-          <a:lstStyle/>
-          <a:p>
-            <a:pPr algn="r">
-              <a:defRPr sz="1100" b="0">
-                <a:solidFill>
-                  <a:srgbClr val="F1F5F9"/>
-                </a:solidFill>
-                <a:latin typeface="Arial"/>
-              </a:defRPr>
-            </a:pPr>
-            <a:r>
-              <a:t>▸  רשת כבישים — OSM</a:t>
-            </a:r>
-          </a:p>
-        </p:txBody>
-      </p:sp>
-      <p:sp>
-        <p:nvSpPr>
-          <p:cNvPr id="11" name="TextBox 10"/>
-          <p:cNvSpPr txBox="1"/>
-          <p:nvPr/>
-        </p:nvSpPr>
-        <p:spPr>
-          <a:xfrm>
-            <a:off x="457200" y="3840480"/>
-            <a:ext cx="3108960" cy="320040"/>
-          </a:xfrm>
-          <a:prstGeom prst="rect">
-            <a:avLst/>
-          </a:prstGeom>
-          <a:noFill/>
-        </p:spPr>
-        <p:txBody>
-          <a:bodyPr wrap="square">
-            <a:spAutoFit/>
-          </a:bodyPr>
-          <a:lstStyle/>
-          <a:p>
-            <a:pPr algn="r">
-              <a:defRPr sz="1100" b="0">
-                <a:solidFill>
-                  <a:srgbClr val="F1F5F9"/>
-                </a:solidFill>
-                <a:latin typeface="Arial"/>
-              </a:defRPr>
-            </a:pPr>
-            <a:r>
-              <a:t>▸  תחנות משטרה — OSM</a:t>
-            </a:r>
-          </a:p>
-        </p:txBody>
-      </p:sp>
-      <p:sp>
-        <p:nvSpPr>
-          <p:cNvPr id="12" name="TextBox 11"/>
-          <p:cNvSpPr txBox="1"/>
-          <p:nvPr/>
-        </p:nvSpPr>
-        <p:spPr>
-          <a:xfrm>
-            <a:off x="457200" y="4224528"/>
-            <a:ext cx="3108960" cy="320040"/>
-          </a:xfrm>
-          <a:prstGeom prst="rect">
-            <a:avLst/>
-          </a:prstGeom>
-          <a:noFill/>
-        </p:spPr>
-        <p:txBody>
-          <a:bodyPr wrap="square">
-            <a:spAutoFit/>
-          </a:bodyPr>
-          <a:lstStyle/>
-          <a:p>
-            <a:pPr algn="r">
-              <a:defRPr sz="1100" b="0">
-                <a:solidFill>
-                  <a:srgbClr val="F1F5F9"/>
-                </a:solidFill>
-                <a:latin typeface="Arial"/>
-              </a:defRPr>
-            </a:pPr>
-            <a:r>
-              <a:t>▸  מודל הצפה — GSI (גובה גל)</a:t>
-            </a:r>
-          </a:p>
-        </p:txBody>
-      </p:sp>
-      <p:sp>
-        <p:nvSpPr>
-          <p:cNvPr id="13" name="TextBox 12"/>
-          <p:cNvSpPr txBox="1"/>
-          <p:nvPr/>
-        </p:nvSpPr>
-        <p:spPr>
-          <a:xfrm>
-            <a:off x="3840480" y="3200400"/>
-            <a:ext cx="457200" cy="457200"/>
-          </a:xfrm>
-          <a:prstGeom prst="rect">
-            <a:avLst/>
-          </a:prstGeom>
-          <a:noFill/>
-        </p:spPr>
-        <p:txBody>
-          <a:bodyPr wrap="square">
-            <a:spAutoFit/>
-          </a:bodyPr>
-          <a:lstStyle/>
-          <a:p>
-            <a:pPr algn="ctr">
-              <a:defRPr sz="3000" b="0">
-                <a:solidFill>
-                  <a:srgbClr val="14B8A6"/>
-                </a:solidFill>
-                <a:latin typeface="Arial"/>
-              </a:defRPr>
-            </a:pPr>
-            <a:r>
-              <a:t>➡</a:t>
-            </a:r>
-          </a:p>
-        </p:txBody>
-      </p:sp>
-      <p:sp>
-        <p:nvSpPr>
-          <p:cNvPr id="14" name="Rounded Rectangle 13"/>
+              <a:t>פריפריה</a:t>
+            </a:r>
+          </a:p>
+        </p:txBody>
+      </p:sp>
+      <p:sp>
+        <p:nvSpPr>
+          <p:cNvPr id="37" name="Rounded Rectangle 36"/>
           <p:cNvSpPr/>
           <p:nvPr/>
         </p:nvSpPr>
         <p:spPr>
           <a:xfrm>
-            <a:off x="4389120" y="1188720"/>
-            <a:ext cx="3383280" cy="5029200"/>
+            <a:off x="7589520" y="1051560"/>
+            <a:ext cx="4297680" cy="4480560"/>
           </a:xfrm>
           <a:prstGeom prst="roundRect">
             <a:avLst/>
@@ -6563,27 +7399,27 @@
       </p:sp>
       <p:sp>
         <p:nvSpPr>
-          <p:cNvPr id="15" name="TextBox 14"/>
-          <p:cNvSpPr txBox="1"/>
-          <p:nvPr/>
-        </p:nvSpPr>
-        <p:spPr>
-          <a:xfrm>
-            <a:off x="4572000" y="1280160"/>
-            <a:ext cx="3017520" cy="457200"/>
-          </a:xfrm>
-          <a:prstGeom prst="rect">
-            <a:avLst/>
-          </a:prstGeom>
-          <a:noFill/>
-        </p:spPr>
-        <p:txBody>
-          <a:bodyPr wrap="square">
-            <a:spAutoFit/>
-          </a:bodyPr>
-          <a:lstStyle/>
-          <a:p>
-            <a:pPr algn="ctr">
+          <p:cNvPr id="38" name="TextBox 37"/>
+          <p:cNvSpPr txBox="1"/>
+          <p:nvPr/>
+        </p:nvSpPr>
+        <p:spPr>
+          <a:xfrm>
+            <a:off x="7772400" y="1143000"/>
+            <a:ext cx="3931920" cy="411480"/>
+          </a:xfrm>
+          <a:prstGeom prst="rect">
+            <a:avLst/>
+          </a:prstGeom>
+          <a:noFill/>
+        </p:spPr>
+        <p:txBody>
+          <a:bodyPr wrap="square">
+            <a:spAutoFit/>
+          </a:bodyPr>
+          <a:lstStyle/>
+          <a:p>
+            <a:pPr algn="r">
               <a:defRPr sz="1800" b="1">
                 <a:solidFill>
                   <a:srgbClr val="14B8A6"/>
@@ -6592,21 +7428,21 @@
               </a:defRPr>
             </a:pPr>
             <a:r>
-              <a:t>⚙️  שלבי עיבוד</a:t>
-            </a:r>
-          </a:p>
-        </p:txBody>
-      </p:sp>
-      <p:sp>
-        <p:nvSpPr>
-          <p:cNvPr id="16" name="TextBox 15"/>
-          <p:cNvSpPr txBox="1"/>
-          <p:nvPr/>
-        </p:nvSpPr>
-        <p:spPr>
-          <a:xfrm>
-            <a:off x="4572000" y="1920240"/>
-            <a:ext cx="3017520" cy="320040"/>
+              <a:t>💡 למה ישראל שונה?</a:t>
+            </a:r>
+          </a:p>
+        </p:txBody>
+      </p:sp>
+      <p:sp>
+        <p:nvSpPr>
+          <p:cNvPr id="39" name="TextBox 38"/>
+          <p:cNvSpPr txBox="1"/>
+          <p:nvPr/>
+        </p:nvSpPr>
+        <p:spPr>
+          <a:xfrm>
+            <a:off x="7772400" y="1737360"/>
+            <a:ext cx="457200" cy="320040"/>
           </a:xfrm>
           <a:prstGeom prst="rect">
             <a:avLst/>
@@ -6620,29 +7456,29 @@
           <a:lstStyle/>
           <a:p>
             <a:pPr algn="r">
-              <a:defRPr sz="1100" b="0">
-                <a:solidFill>
-                  <a:srgbClr val="F1F5F9"/>
-                </a:solidFill>
-                <a:latin typeface="Arial"/>
-              </a:defRPr>
-            </a:pPr>
-            <a:r>
-              <a:t>1.  חישוב אזורי הצפה לפי גובה גל</a:t>
-            </a:r>
-          </a:p>
-        </p:txBody>
-      </p:sp>
-      <p:sp>
-        <p:nvSpPr>
-          <p:cNvPr id="17" name="TextBox 16"/>
-          <p:cNvSpPr txBox="1"/>
-          <p:nvPr/>
-        </p:nvSpPr>
-        <p:spPr>
-          <a:xfrm>
-            <a:off x="4572000" y="2304288"/>
-            <a:ext cx="3017520" cy="320040"/>
+              <a:defRPr sz="1400" b="0">
+                <a:solidFill>
+                  <a:srgbClr val="FFFFFF"/>
+                </a:solidFill>
+                <a:latin typeface="Arial"/>
+              </a:defRPr>
+            </a:pPr>
+            <a:r>
+              <a:t>🏖️</a:t>
+            </a:r>
+          </a:p>
+        </p:txBody>
+      </p:sp>
+      <p:sp>
+        <p:nvSpPr>
+          <p:cNvPr id="40" name="TextBox 39"/>
+          <p:cNvSpPr txBox="1"/>
+          <p:nvPr/>
+        </p:nvSpPr>
+        <p:spPr>
+          <a:xfrm>
+            <a:off x="8229600" y="1737360"/>
+            <a:ext cx="3474720" cy="320040"/>
           </a:xfrm>
           <a:prstGeom prst="rect">
             <a:avLst/>
@@ -6656,29 +7492,29 @@
           <a:lstStyle/>
           <a:p>
             <a:pPr algn="r">
-              <a:defRPr sz="1100" b="0">
-                <a:solidFill>
-                  <a:srgbClr val="F1F5F9"/>
-                </a:solidFill>
-                <a:latin typeface="Arial"/>
-              </a:defRPr>
-            </a:pPr>
-            <a:r>
-              <a:t>2.  חיתוך מרחבי עם גבולות ערים</a:t>
-            </a:r>
-          </a:p>
-        </p:txBody>
-      </p:sp>
-      <p:sp>
-        <p:nvSpPr>
-          <p:cNvPr id="18" name="TextBox 17"/>
-          <p:cNvSpPr txBox="1"/>
-          <p:nvPr/>
-        </p:nvSpPr>
-        <p:spPr>
-          <a:xfrm>
-            <a:off x="4572000" y="2688336"/>
-            <a:ext cx="3017520" cy="320040"/>
+              <a:defRPr sz="1300" b="1">
+                <a:solidFill>
+                  <a:srgbClr val="FFFFFF"/>
+                </a:solidFill>
+                <a:latin typeface="Arial"/>
+              </a:defRPr>
+            </a:pPr>
+            <a:r>
+              <a:t>רצועת חוף צרה</a:t>
+            </a:r>
+          </a:p>
+        </p:txBody>
+      </p:sp>
+      <p:sp>
+        <p:nvSpPr>
+          <p:cNvPr id="41" name="TextBox 40"/>
+          <p:cNvSpPr txBox="1"/>
+          <p:nvPr/>
+        </p:nvSpPr>
+        <p:spPr>
+          <a:xfrm>
+            <a:off x="7772400" y="2057400"/>
+            <a:ext cx="3931920" cy="548640"/>
           </a:xfrm>
           <a:prstGeom prst="rect">
             <a:avLst/>
@@ -6692,29 +7528,29 @@
           <a:lstStyle/>
           <a:p>
             <a:pPr algn="r">
-              <a:defRPr sz="1100" b="0">
-                <a:solidFill>
-                  <a:srgbClr val="F1F5F9"/>
-                </a:solidFill>
-                <a:latin typeface="Arial"/>
-              </a:defRPr>
-            </a:pPr>
-            <a:r>
-              <a:t>3.  חישוב H — אחוז שטח מוצף</a:t>
-            </a:r>
-          </a:p>
-        </p:txBody>
-      </p:sp>
-      <p:sp>
-        <p:nvSpPr>
-          <p:cNvPr id="19" name="TextBox 18"/>
-          <p:cNvSpPr txBox="1"/>
-          <p:nvPr/>
-        </p:nvSpPr>
-        <p:spPr>
-          <a:xfrm>
-            <a:off x="4572000" y="3072384"/>
-            <a:ext cx="3017520" cy="320040"/>
+              <a:defRPr sz="1000" b="0">
+                <a:solidFill>
+                  <a:srgbClr val="94A3B8"/>
+                </a:solidFill>
+                <a:latin typeface="Arial"/>
+              </a:defRPr>
+            </a:pPr>
+            <a:r>
+              <a:t>רק 190 ק"מ ים תיכון — כל הערים החופיות באותה רמת חשיפה בקירוב</a:t>
+            </a:r>
+          </a:p>
+        </p:txBody>
+      </p:sp>
+      <p:sp>
+        <p:nvSpPr>
+          <p:cNvPr id="42" name="TextBox 41"/>
+          <p:cNvSpPr txBox="1"/>
+          <p:nvPr/>
+        </p:nvSpPr>
+        <p:spPr>
+          <a:xfrm>
+            <a:off x="7772400" y="2697480"/>
+            <a:ext cx="457200" cy="320040"/>
           </a:xfrm>
           <a:prstGeom prst="rect">
             <a:avLst/>
@@ -6728,29 +7564,29 @@
           <a:lstStyle/>
           <a:p>
             <a:pPr algn="r">
-              <a:defRPr sz="1100" b="0">
-                <a:solidFill>
-                  <a:srgbClr val="F1F5F9"/>
-                </a:solidFill>
-                <a:latin typeface="Arial"/>
-              </a:defRPr>
-            </a:pPr>
-            <a:r>
-              <a:t>4.  חישוב V — פגיעות דמוגרפית מלמ"ס</a:t>
-            </a:r>
-          </a:p>
-        </p:txBody>
-      </p:sp>
-      <p:sp>
-        <p:nvSpPr>
-          <p:cNvPr id="20" name="TextBox 19"/>
-          <p:cNvSpPr txBox="1"/>
-          <p:nvPr/>
-        </p:nvSpPr>
-        <p:spPr>
-          <a:xfrm>
-            <a:off x="4572000" y="3456432"/>
-            <a:ext cx="3017520" cy="320040"/>
+              <a:defRPr sz="1400" b="0">
+                <a:solidFill>
+                  <a:srgbClr val="FFFFFF"/>
+                </a:solidFill>
+                <a:latin typeface="Arial"/>
+              </a:defRPr>
+            </a:pPr>
+            <a:r>
+              <a:t>👥</a:t>
+            </a:r>
+          </a:p>
+        </p:txBody>
+      </p:sp>
+      <p:sp>
+        <p:nvSpPr>
+          <p:cNvPr id="43" name="TextBox 42"/>
+          <p:cNvSpPr txBox="1"/>
+          <p:nvPr/>
+        </p:nvSpPr>
+        <p:spPr>
+          <a:xfrm>
+            <a:off x="8229600" y="2697480"/>
+            <a:ext cx="3474720" cy="320040"/>
           </a:xfrm>
           <a:prstGeom prst="rect">
             <a:avLst/>
@@ -6764,29 +7600,29 @@
           <a:lstStyle/>
           <a:p>
             <a:pPr algn="r">
-              <a:defRPr sz="1100" b="0">
-                <a:solidFill>
-                  <a:srgbClr val="F1F5F9"/>
-                </a:solidFill>
-                <a:latin typeface="Arial"/>
-              </a:defRPr>
-            </a:pPr>
-            <a:r>
-              <a:t>5.  חישוב O — סימולציית ABM לפינוי</a:t>
-            </a:r>
-          </a:p>
-        </p:txBody>
-      </p:sp>
-      <p:sp>
-        <p:nvSpPr>
-          <p:cNvPr id="21" name="TextBox 20"/>
-          <p:cNvSpPr txBox="1"/>
-          <p:nvPr/>
-        </p:nvSpPr>
-        <p:spPr>
-          <a:xfrm>
-            <a:off x="4572000" y="3840480"/>
-            <a:ext cx="3017520" cy="320040"/>
+              <a:defRPr sz="1300" b="1">
+                <a:solidFill>
+                  <a:srgbClr val="FFFFFF"/>
+                </a:solidFill>
+                <a:latin typeface="Arial"/>
+              </a:defRPr>
+            </a:pPr>
+            <a:r>
+              <a:t>פערים דמוגרפיים</a:t>
+            </a:r>
+          </a:p>
+        </p:txBody>
+      </p:sp>
+      <p:sp>
+        <p:nvSpPr>
+          <p:cNvPr id="44" name="TextBox 43"/>
+          <p:cNvSpPr txBox="1"/>
+          <p:nvPr/>
+        </p:nvSpPr>
+        <p:spPr>
+          <a:xfrm>
+            <a:off x="7772400" y="3017520"/>
+            <a:ext cx="3931920" cy="548640"/>
           </a:xfrm>
           <a:prstGeom prst="rect">
             <a:avLst/>
@@ -6800,29 +7636,29 @@
           <a:lstStyle/>
           <a:p>
             <a:pPr algn="r">
-              <a:defRPr sz="1100" b="0">
-                <a:solidFill>
-                  <a:srgbClr val="F1F5F9"/>
-                </a:solidFill>
-                <a:latin typeface="Arial"/>
-              </a:defRPr>
-            </a:pPr>
-            <a:r>
-              <a:t>6.  חישוב R⁻¹ — הערכת משאבי תגובה</a:t>
-            </a:r>
-          </a:p>
-        </p:txBody>
-      </p:sp>
-      <p:sp>
-        <p:nvSpPr>
-          <p:cNvPr id="22" name="TextBox 21"/>
-          <p:cNvSpPr txBox="1"/>
-          <p:nvPr/>
-        </p:nvSpPr>
-        <p:spPr>
-          <a:xfrm>
-            <a:off x="4572000" y="4224528"/>
-            <a:ext cx="3017520" cy="320040"/>
+              <a:defRPr sz="1000" b="0">
+                <a:solidFill>
+                  <a:srgbClr val="94A3B8"/>
+                </a:solidFill>
+                <a:latin typeface="Arial"/>
+              </a:defRPr>
+            </a:pPr>
+            <a:r>
+              <a:t>אשכול 1-2 (פריפריה) מול 8-10 (מרכז) — פגיעות שונה דרמטית</a:t>
+            </a:r>
+          </a:p>
+        </p:txBody>
+      </p:sp>
+      <p:sp>
+        <p:nvSpPr>
+          <p:cNvPr id="45" name="TextBox 44"/>
+          <p:cNvSpPr txBox="1"/>
+          <p:nvPr/>
+        </p:nvSpPr>
+        <p:spPr>
+          <a:xfrm>
+            <a:off x="7772400" y="3657600"/>
+            <a:ext cx="457200" cy="320040"/>
           </a:xfrm>
           <a:prstGeom prst="rect">
             <a:avLst/>
@@ -6836,29 +7672,29 @@
           <a:lstStyle/>
           <a:p>
             <a:pPr algn="r">
-              <a:defRPr sz="1100" b="0">
-                <a:solidFill>
-                  <a:srgbClr val="F1F5F9"/>
-                </a:solidFill>
-                <a:latin typeface="Arial"/>
-              </a:defRPr>
-            </a:pPr>
-            <a:r>
-              <a:t>7.  חישוב I⁻¹ — זיהוי מקלטים ותשתיות</a:t>
-            </a:r>
-          </a:p>
-        </p:txBody>
-      </p:sp>
-      <p:sp>
-        <p:nvSpPr>
-          <p:cNvPr id="23" name="TextBox 22"/>
-          <p:cNvSpPr txBox="1"/>
-          <p:nvPr/>
-        </p:nvSpPr>
-        <p:spPr>
-          <a:xfrm>
-            <a:off x="4572000" y="4608576"/>
-            <a:ext cx="3017520" cy="320040"/>
+              <a:defRPr sz="1400" b="0">
+                <a:solidFill>
+                  <a:srgbClr val="FFFFFF"/>
+                </a:solidFill>
+                <a:latin typeface="Arial"/>
+              </a:defRPr>
+            </a:pPr>
+            <a:r>
+              <a:t>🚓</a:t>
+            </a:r>
+          </a:p>
+        </p:txBody>
+      </p:sp>
+      <p:sp>
+        <p:nvSpPr>
+          <p:cNvPr id="46" name="TextBox 45"/>
+          <p:cNvSpPr txBox="1"/>
+          <p:nvPr/>
+        </p:nvSpPr>
+        <p:spPr>
+          <a:xfrm>
+            <a:off x="8229600" y="3657600"/>
+            <a:ext cx="3474720" cy="320040"/>
           </a:xfrm>
           <a:prstGeom prst="rect">
             <a:avLst/>
@@ -6872,75 +7708,183 @@
           <a:lstStyle/>
           <a:p>
             <a:pPr algn="r">
-              <a:defRPr sz="1100" b="0">
-                <a:solidFill>
-                  <a:srgbClr val="F1F5F9"/>
-                </a:solidFill>
-                <a:latin typeface="Arial"/>
-              </a:defRPr>
-            </a:pPr>
-            <a:r>
-              <a:t>8.  נרמול Min-Max + שקלול TSRS</a:t>
-            </a:r>
-          </a:p>
-        </p:txBody>
-      </p:sp>
-      <p:sp>
-        <p:nvSpPr>
-          <p:cNvPr id="24" name="TextBox 23"/>
-          <p:cNvSpPr txBox="1"/>
-          <p:nvPr/>
-        </p:nvSpPr>
-        <p:spPr>
-          <a:xfrm>
-            <a:off x="7863840" y="3200400"/>
-            <a:ext cx="457200" cy="457200"/>
-          </a:xfrm>
-          <a:prstGeom prst="rect">
-            <a:avLst/>
-          </a:prstGeom>
-          <a:noFill/>
-        </p:spPr>
-        <p:txBody>
-          <a:bodyPr wrap="square">
-            <a:spAutoFit/>
-          </a:bodyPr>
-          <a:lstStyle/>
-          <a:p>
-            <a:pPr algn="ctr">
-              <a:defRPr sz="3000" b="0">
-                <a:solidFill>
-                  <a:srgbClr val="14B8A6"/>
-                </a:solidFill>
-                <a:latin typeface="Arial"/>
-              </a:defRPr>
-            </a:pPr>
-            <a:r>
-              <a:t>➡</a:t>
-            </a:r>
-          </a:p>
-        </p:txBody>
-      </p:sp>
-      <p:sp>
-        <p:nvSpPr>
-          <p:cNvPr id="25" name="Rounded Rectangle 24"/>
+              <a:defRPr sz="1300" b="1">
+                <a:solidFill>
+                  <a:srgbClr val="FFFFFF"/>
+                </a:solidFill>
+                <a:latin typeface="Arial"/>
+              </a:defRPr>
+            </a:pPr>
+            <a:r>
+              <a:t>פערי משאבים</a:t>
+            </a:r>
+          </a:p>
+        </p:txBody>
+      </p:sp>
+      <p:sp>
+        <p:nvSpPr>
+          <p:cNvPr id="47" name="TextBox 46"/>
+          <p:cNvSpPr txBox="1"/>
+          <p:nvPr/>
+        </p:nvSpPr>
+        <p:spPr>
+          <a:xfrm>
+            <a:off x="7772400" y="3977639"/>
+            <a:ext cx="3931920" cy="548640"/>
+          </a:xfrm>
+          <a:prstGeom prst="rect">
+            <a:avLst/>
+          </a:prstGeom>
+          <a:noFill/>
+        </p:spPr>
+        <p:txBody>
+          <a:bodyPr wrap="square">
+            <a:spAutoFit/>
+          </a:bodyPr>
+          <a:lstStyle/>
+          <a:p>
+            <a:pPr algn="r">
+              <a:defRPr sz="1000" b="0">
+                <a:solidFill>
+                  <a:srgbClr val="94A3B8"/>
+                </a:solidFill>
+                <a:latin typeface="Arial"/>
+              </a:defRPr>
+            </a:pPr>
+            <a:r>
+              <a:t>תחנה במרכז ת״א מול תחנה בפריפריה: פי 3-5 הבדל בכוח אדם</a:t>
+            </a:r>
+          </a:p>
+        </p:txBody>
+      </p:sp>
+      <p:sp>
+        <p:nvSpPr>
+          <p:cNvPr id="48" name="TextBox 47"/>
+          <p:cNvSpPr txBox="1"/>
+          <p:nvPr/>
+        </p:nvSpPr>
+        <p:spPr>
+          <a:xfrm>
+            <a:off x="7772400" y="4617720"/>
+            <a:ext cx="457200" cy="320040"/>
+          </a:xfrm>
+          <a:prstGeom prst="rect">
+            <a:avLst/>
+          </a:prstGeom>
+          <a:noFill/>
+        </p:spPr>
+        <p:txBody>
+          <a:bodyPr wrap="square">
+            <a:spAutoFit/>
+          </a:bodyPr>
+          <a:lstStyle/>
+          <a:p>
+            <a:pPr algn="r">
+              <a:defRPr sz="1400" b="0">
+                <a:solidFill>
+                  <a:srgbClr val="FFFFFF"/>
+                </a:solidFill>
+                <a:latin typeface="Arial"/>
+              </a:defRPr>
+            </a:pPr>
+            <a:r>
+              <a:t>🏢</a:t>
+            </a:r>
+          </a:p>
+        </p:txBody>
+      </p:sp>
+      <p:sp>
+        <p:nvSpPr>
+          <p:cNvPr id="49" name="TextBox 48"/>
+          <p:cNvSpPr txBox="1"/>
+          <p:nvPr/>
+        </p:nvSpPr>
+        <p:spPr>
+          <a:xfrm>
+            <a:off x="8229600" y="4617720"/>
+            <a:ext cx="3474720" cy="320040"/>
+          </a:xfrm>
+          <a:prstGeom prst="rect">
+            <a:avLst/>
+          </a:prstGeom>
+          <a:noFill/>
+        </p:spPr>
+        <p:txBody>
+          <a:bodyPr wrap="square">
+            <a:spAutoFit/>
+          </a:bodyPr>
+          <a:lstStyle/>
+          <a:p>
+            <a:pPr algn="r">
+              <a:defRPr sz="1300" b="1">
+                <a:solidFill>
+                  <a:srgbClr val="FFFFFF"/>
+                </a:solidFill>
+                <a:latin typeface="Arial"/>
+              </a:defRPr>
+            </a:pPr>
+            <a:r>
+              <a:t>תשתיות מוגבלות</a:t>
+            </a:r>
+          </a:p>
+        </p:txBody>
+      </p:sp>
+      <p:sp>
+        <p:nvSpPr>
+          <p:cNvPr id="50" name="TextBox 49"/>
+          <p:cNvSpPr txBox="1"/>
+          <p:nvPr/>
+        </p:nvSpPr>
+        <p:spPr>
+          <a:xfrm>
+            <a:off x="7772400" y="4937759"/>
+            <a:ext cx="3931920" cy="548640"/>
+          </a:xfrm>
+          <a:prstGeom prst="rect">
+            <a:avLst/>
+          </a:prstGeom>
+          <a:noFill/>
+        </p:spPr>
+        <p:txBody>
+          <a:bodyPr wrap="square">
+            <a:spAutoFit/>
+          </a:bodyPr>
+          <a:lstStyle/>
+          <a:p>
+            <a:pPr algn="r">
+              <a:defRPr sz="1000" b="0">
+                <a:solidFill>
+                  <a:srgbClr val="94A3B8"/>
+                </a:solidFill>
+                <a:latin typeface="Arial"/>
+              </a:defRPr>
+            </a:pPr>
+            <a:r>
+              <a:t>מקלטים אנכיים רק בערים גדולות — בפריפריה אין כלל</a:t>
+            </a:r>
+          </a:p>
+        </p:txBody>
+      </p:sp>
+      <p:sp>
+        <p:nvSpPr>
+          <p:cNvPr id="51" name="Rounded Rectangle 50"/>
           <p:cNvSpPr/>
           <p:nvPr/>
         </p:nvSpPr>
         <p:spPr>
           <a:xfrm>
-            <a:off x="8412480" y="1188720"/>
-            <a:ext cx="3474720" cy="5029200"/>
+            <a:off x="457200" y="5715000"/>
+            <a:ext cx="11247120" cy="822960"/>
           </a:xfrm>
           <a:prstGeom prst="roundRect">
             <a:avLst/>
           </a:prstGeom>
           <a:solidFill>
-            <a:srgbClr val="1E293B"/>
+            <a:srgbClr val="152035"/>
           </a:solidFill>
           <a:ln w="19050">
             <a:solidFill>
-              <a:srgbClr val="22C55E"/>
+              <a:srgbClr val="14B8A6"/>
             </a:solidFill>
           </a:ln>
         </p:spPr>
@@ -6968,50 +7912,14 @@
       </p:sp>
       <p:sp>
         <p:nvSpPr>
-          <p:cNvPr id="26" name="TextBox 25"/>
-          <p:cNvSpPr txBox="1"/>
-          <p:nvPr/>
-        </p:nvSpPr>
-        <p:spPr>
-          <a:xfrm>
-            <a:off x="8595360" y="1280160"/>
-            <a:ext cx="3108960" cy="457200"/>
-          </a:xfrm>
-          <a:prstGeom prst="rect">
-            <a:avLst/>
-          </a:prstGeom>
-          <a:noFill/>
-        </p:spPr>
-        <p:txBody>
-          <a:bodyPr wrap="square">
-            <a:spAutoFit/>
-          </a:bodyPr>
-          <a:lstStyle/>
-          <a:p>
-            <a:pPr algn="ctr">
-              <a:defRPr sz="1800" b="1">
-                <a:solidFill>
-                  <a:srgbClr val="22C55E"/>
-                </a:solidFill>
-                <a:latin typeface="Arial"/>
-              </a:defRPr>
-            </a:pPr>
-            <a:r>
-              <a:t>📤  תוצרי פלט</a:t>
-            </a:r>
-          </a:p>
-        </p:txBody>
-      </p:sp>
-      <p:sp>
-        <p:nvSpPr>
-          <p:cNvPr id="27" name="TextBox 26"/>
-          <p:cNvSpPr txBox="1"/>
-          <p:nvPr/>
-        </p:nvSpPr>
-        <p:spPr>
-          <a:xfrm>
-            <a:off x="8595360" y="1920240"/>
-            <a:ext cx="3108960" cy="274320"/>
+          <p:cNvPr id="52" name="TextBox 51"/>
+          <p:cNvSpPr txBox="1"/>
+          <p:nvPr/>
+        </p:nvSpPr>
+        <p:spPr>
+          <a:xfrm>
+            <a:off x="640080" y="5760720"/>
+            <a:ext cx="10881360" cy="320040"/>
           </a:xfrm>
           <a:prstGeom prst="rect">
             <a:avLst/>
@@ -7027,27 +7935,27 @@
             <a:pPr algn="r">
               <a:defRPr sz="1300" b="1">
                 <a:solidFill>
-                  <a:srgbClr val="FFFFFF"/>
-                </a:solidFill>
-                <a:latin typeface="Arial"/>
-              </a:defRPr>
-            </a:pPr>
-            <a:r>
-              <a:t>תוצרים גאוגרפיים:</a:t>
-            </a:r>
-          </a:p>
-        </p:txBody>
-      </p:sp>
-      <p:sp>
-        <p:nvSpPr>
-          <p:cNvPr id="28" name="TextBox 27"/>
-          <p:cNvSpPr txBox="1"/>
-          <p:nvPr/>
-        </p:nvSpPr>
-        <p:spPr>
-          <a:xfrm>
-            <a:off x="8595360" y="2286000"/>
-            <a:ext cx="3108960" cy="274320"/>
+                  <a:srgbClr val="14B8A6"/>
+                </a:solidFill>
+                <a:latin typeface="Arial"/>
+              </a:defRPr>
+            </a:pPr>
+            <a:r>
+              <a:t>🎛️  סליידרים אינטראקטיביים</a:t>
+            </a:r>
+          </a:p>
+        </p:txBody>
+      </p:sp>
+      <p:sp>
+        <p:nvSpPr>
+          <p:cNvPr id="53" name="TextBox 52"/>
+          <p:cNvSpPr txBox="1"/>
+          <p:nvPr/>
+        </p:nvSpPr>
+        <p:spPr>
+          <a:xfrm>
+            <a:off x="640080" y="6080760"/>
+            <a:ext cx="10881360" cy="457200"/>
           </a:xfrm>
           <a:prstGeom prst="rect">
             <a:avLst/>
@@ -7069,331 +7977,7 @@
               </a:defRPr>
             </a:pPr>
             <a:r>
-              <a:t>🗺️  מפת חום הצפות דינמית</a:t>
-            </a:r>
-          </a:p>
-        </p:txBody>
-      </p:sp>
-      <p:sp>
-        <p:nvSpPr>
-          <p:cNvPr id="29" name="TextBox 28"/>
-          <p:cNvSpPr txBox="1"/>
-          <p:nvPr/>
-        </p:nvSpPr>
-        <p:spPr>
-          <a:xfrm>
-            <a:off x="8595360" y="2606040"/>
-            <a:ext cx="3108960" cy="274320"/>
-          </a:xfrm>
-          <a:prstGeom prst="rect">
-            <a:avLst/>
-          </a:prstGeom>
-          <a:noFill/>
-        </p:spPr>
-        <p:txBody>
-          <a:bodyPr wrap="square">
-            <a:spAutoFit/>
-          </a:bodyPr>
-          <a:lstStyle/>
-          <a:p>
-            <a:pPr algn="r">
-              <a:defRPr sz="1100" b="0">
-                <a:solidFill>
-                  <a:srgbClr val="F1F5F9"/>
-                </a:solidFill>
-                <a:latin typeface="Arial"/>
-              </a:defRPr>
-            </a:pPr>
-            <a:r>
-              <a:t>🗺️  פוליגוני ערים צבועים לפי TSRS</a:t>
-            </a:r>
-          </a:p>
-        </p:txBody>
-      </p:sp>
-      <p:sp>
-        <p:nvSpPr>
-          <p:cNvPr id="30" name="TextBox 29"/>
-          <p:cNvSpPr txBox="1"/>
-          <p:nvPr/>
-        </p:nvSpPr>
-        <p:spPr>
-          <a:xfrm>
-            <a:off x="8595360" y="2926080"/>
-            <a:ext cx="3108960" cy="274320"/>
-          </a:xfrm>
-          <a:prstGeom prst="rect">
-            <a:avLst/>
-          </a:prstGeom>
-          <a:noFill/>
-        </p:spPr>
-        <p:txBody>
-          <a:bodyPr wrap="square">
-            <a:spAutoFit/>
-          </a:bodyPr>
-          <a:lstStyle/>
-          <a:p>
-            <a:pPr algn="r">
-              <a:defRPr sz="1100" b="0">
-                <a:solidFill>
-                  <a:srgbClr val="F1F5F9"/>
-                </a:solidFill>
-                <a:latin typeface="Arial"/>
-              </a:defRPr>
-            </a:pPr>
-            <a:r>
-              <a:t>🗺️  נקודות תחנות משטרה</a:t>
-            </a:r>
-          </a:p>
-        </p:txBody>
-      </p:sp>
-      <p:sp>
-        <p:nvSpPr>
-          <p:cNvPr id="31" name="TextBox 30"/>
-          <p:cNvSpPr txBox="1"/>
-          <p:nvPr/>
-        </p:nvSpPr>
-        <p:spPr>
-          <a:xfrm>
-            <a:off x="8595360" y="3246120"/>
-            <a:ext cx="3108960" cy="274320"/>
-          </a:xfrm>
-          <a:prstGeom prst="rect">
-            <a:avLst/>
-          </a:prstGeom>
-          <a:noFill/>
-        </p:spPr>
-        <p:txBody>
-          <a:bodyPr wrap="square">
-            <a:spAutoFit/>
-          </a:bodyPr>
-          <a:lstStyle/>
-          <a:p>
-            <a:pPr algn="r">
-              <a:defRPr sz="1100" b="0">
-                <a:solidFill>
-                  <a:srgbClr val="F1F5F9"/>
-                </a:solidFill>
-                <a:latin typeface="Arial"/>
-              </a:defRPr>
-            </a:pPr>
-            <a:r>
-              <a:t>🗺️  שכבות OSM (כבישים, מבנים)</a:t>
-            </a:r>
-          </a:p>
-        </p:txBody>
-      </p:sp>
-      <p:sp>
-        <p:nvSpPr>
-          <p:cNvPr id="32" name="TextBox 31"/>
-          <p:cNvSpPr txBox="1"/>
-          <p:nvPr/>
-        </p:nvSpPr>
-        <p:spPr>
-          <a:xfrm>
-            <a:off x="8595360" y="3749039"/>
-            <a:ext cx="3108960" cy="274320"/>
-          </a:xfrm>
-          <a:prstGeom prst="rect">
-            <a:avLst/>
-          </a:prstGeom>
-          <a:noFill/>
-        </p:spPr>
-        <p:txBody>
-          <a:bodyPr wrap="square">
-            <a:spAutoFit/>
-          </a:bodyPr>
-          <a:lstStyle/>
-          <a:p>
-            <a:pPr algn="r">
-              <a:defRPr sz="1300" b="1">
-                <a:solidFill>
-                  <a:srgbClr val="FFFFFF"/>
-                </a:solidFill>
-                <a:latin typeface="Arial"/>
-              </a:defRPr>
-            </a:pPr>
-            <a:r>
-              <a:t>תוצרים טבלאיים:</a:t>
-            </a:r>
-          </a:p>
-        </p:txBody>
-      </p:sp>
-      <p:sp>
-        <p:nvSpPr>
-          <p:cNvPr id="33" name="TextBox 32"/>
-          <p:cNvSpPr txBox="1"/>
-          <p:nvPr/>
-        </p:nvSpPr>
-        <p:spPr>
-          <a:xfrm>
-            <a:off x="8595360" y="4114800"/>
-            <a:ext cx="3108960" cy="274320"/>
-          </a:xfrm>
-          <a:prstGeom prst="rect">
-            <a:avLst/>
-          </a:prstGeom>
-          <a:noFill/>
-        </p:spPr>
-        <p:txBody>
-          <a:bodyPr wrap="square">
-            <a:spAutoFit/>
-          </a:bodyPr>
-          <a:lstStyle/>
-          <a:p>
-            <a:pPr algn="r">
-              <a:defRPr sz="1100" b="0">
-                <a:solidFill>
-                  <a:srgbClr val="F1F5F9"/>
-                </a:solidFill>
-                <a:latin typeface="Arial"/>
-              </a:defRPr>
-            </a:pPr>
-            <a:r>
-              <a:t>📊  ציון TSRS (0-100) לכל עיר</a:t>
-            </a:r>
-          </a:p>
-        </p:txBody>
-      </p:sp>
-      <p:sp>
-        <p:nvSpPr>
-          <p:cNvPr id="34" name="TextBox 33"/>
-          <p:cNvSpPr txBox="1"/>
-          <p:nvPr/>
-        </p:nvSpPr>
-        <p:spPr>
-          <a:xfrm>
-            <a:off x="8595360" y="4434840"/>
-            <a:ext cx="3108960" cy="274320"/>
-          </a:xfrm>
-          <a:prstGeom prst="rect">
-            <a:avLst/>
-          </a:prstGeom>
-          <a:noFill/>
-        </p:spPr>
-        <p:txBody>
-          <a:bodyPr wrap="square">
-            <a:spAutoFit/>
-          </a:bodyPr>
-          <a:lstStyle/>
-          <a:p>
-            <a:pPr algn="r">
-              <a:defRPr sz="1100" b="0">
-                <a:solidFill>
-                  <a:srgbClr val="F1F5F9"/>
-                </a:solidFill>
-                <a:latin typeface="Arial"/>
-              </a:defRPr>
-            </a:pPr>
-            <a:r>
-              <a:t>📊  פירוט 5 מדדים (H,V,O,R,I)</a:t>
-            </a:r>
-          </a:p>
-        </p:txBody>
-      </p:sp>
-      <p:sp>
-        <p:nvSpPr>
-          <p:cNvPr id="35" name="TextBox 34"/>
-          <p:cNvSpPr txBox="1"/>
-          <p:nvPr/>
-        </p:nvSpPr>
-        <p:spPr>
-          <a:xfrm>
-            <a:off x="8595360" y="4754879"/>
-            <a:ext cx="3108960" cy="274320"/>
-          </a:xfrm>
-          <a:prstGeom prst="rect">
-            <a:avLst/>
-          </a:prstGeom>
-          <a:noFill/>
-        </p:spPr>
-        <p:txBody>
-          <a:bodyPr wrap="square">
-            <a:spAutoFit/>
-          </a:bodyPr>
-          <a:lstStyle/>
-          <a:p>
-            <a:pPr algn="r">
-              <a:defRPr sz="1100" b="0">
-                <a:solidFill>
-                  <a:srgbClr val="F1F5F9"/>
-                </a:solidFill>
-                <a:latin typeface="Arial"/>
-              </a:defRPr>
-            </a:pPr>
-            <a:r>
-              <a:t>📊  הנחיות מבצעיות בעברית</a:t>
-            </a:r>
-          </a:p>
-        </p:txBody>
-      </p:sp>
-      <p:sp>
-        <p:nvSpPr>
-          <p:cNvPr id="36" name="TextBox 35"/>
-          <p:cNvSpPr txBox="1"/>
-          <p:nvPr/>
-        </p:nvSpPr>
-        <p:spPr>
-          <a:xfrm>
-            <a:off x="8595360" y="5074919"/>
-            <a:ext cx="3108960" cy="274320"/>
-          </a:xfrm>
-          <a:prstGeom prst="rect">
-            <a:avLst/>
-          </a:prstGeom>
-          <a:noFill/>
-        </p:spPr>
-        <p:txBody>
-          <a:bodyPr wrap="square">
-            <a:spAutoFit/>
-          </a:bodyPr>
-          <a:lstStyle/>
-          <a:p>
-            <a:pPr algn="r">
-              <a:defRPr sz="1100" b="0">
-                <a:solidFill>
-                  <a:srgbClr val="F1F5F9"/>
-                </a:solidFill>
-                <a:latin typeface="Arial"/>
-              </a:defRPr>
-            </a:pPr>
-            <a:r>
-              <a:t>📊  פילוח דמוגרפי (גילאים, ח"כ)</a:t>
-            </a:r>
-          </a:p>
-        </p:txBody>
-      </p:sp>
-      <p:sp>
-        <p:nvSpPr>
-          <p:cNvPr id="37" name="TextBox 36"/>
-          <p:cNvSpPr txBox="1"/>
-          <p:nvPr/>
-        </p:nvSpPr>
-        <p:spPr>
-          <a:xfrm>
-            <a:off x="8595360" y="5394959"/>
-            <a:ext cx="3108960" cy="274320"/>
-          </a:xfrm>
-          <a:prstGeom prst="rect">
-            <a:avLst/>
-          </a:prstGeom>
-          <a:noFill/>
-        </p:spPr>
-        <p:txBody>
-          <a:bodyPr wrap="square">
-            <a:spAutoFit/>
-          </a:bodyPr>
-          <a:lstStyle/>
-          <a:p>
-            <a:pPr algn="r">
-              <a:defRPr sz="1100" b="0">
-                <a:solidFill>
-                  <a:srgbClr val="F1F5F9"/>
-                </a:solidFill>
-                <a:latin typeface="Arial"/>
-              </a:defRPr>
-            </a:pPr>
-            <a:r>
-              <a:t>📊  ייצוא PDF לתחנה</a:t>
+              <a:t>המשתמש יכול לכוונן את המשקלים בזמן אמת ולראות את ההשפעה על המפה. שני פריסטים: 🇮🇱 ישראל (ברירת מחדל) | 🌍 בינלאומי. הציונים מתעדכנים מיידית עם שינוי המשקלים.</a:t>
             </a:r>
           </a:p>
         </p:txBody>
@@ -7498,7 +8082,7 @@
               </a:defRPr>
             </a:pPr>
             <a:r>
-              <a:t>היישום: GIS אינטראקטיבי לתיעדוף בזמן אמת</a:t>
+              <a:t>תרשים המודל: קלט → עיבוד → פלט</a:t>
             </a:r>
           </a:p>
         </p:txBody>
@@ -7511,8 +8095,8 @@
         </p:nvSpPr>
         <p:spPr>
           <a:xfrm>
-            <a:off x="457200" y="1188720"/>
-            <a:ext cx="3474720" cy="2286000"/>
+            <a:off x="274320" y="1188720"/>
+            <a:ext cx="3474720" cy="5029200"/>
           </a:xfrm>
           <a:prstGeom prst="roundRect">
             <a:avLst/>
@@ -7522,7 +8106,7 @@
           </a:solidFill>
           <a:ln w="19050">
             <a:solidFill>
-              <a:srgbClr val="334155"/>
+              <a:srgbClr val="3B82F6"/>
             </a:solidFill>
           </a:ln>
         </p:spPr>
@@ -7556,8 +8140,8 @@
         </p:nvSpPr>
         <p:spPr>
           <a:xfrm>
-            <a:off x="640080" y="1371600"/>
-            <a:ext cx="548640" cy="548640"/>
+            <a:off x="457200" y="1280160"/>
+            <a:ext cx="3108960" cy="457200"/>
           </a:xfrm>
           <a:prstGeom prst="rect">
             <a:avLst/>
@@ -7571,15 +8155,15 @@
           <a:lstStyle/>
           <a:p>
             <a:pPr algn="ctr">
-              <a:defRPr sz="2800" b="0">
-                <a:solidFill>
-                  <a:srgbClr val="FFFFFF"/>
-                </a:solidFill>
-                <a:latin typeface="Arial"/>
-              </a:defRPr>
-            </a:pPr>
-            <a:r>
-              <a:t>🗺️</a:t>
+              <a:defRPr sz="1800" b="1">
+                <a:solidFill>
+                  <a:srgbClr val="3B82F6"/>
+                </a:solidFill>
+                <a:latin typeface="Arial"/>
+              </a:defRPr>
+            </a:pPr>
+            <a:r>
+              <a:t>📥  נתוני קלט</a:t>
             </a:r>
           </a:p>
         </p:txBody>
@@ -7592,8 +8176,8 @@
         </p:nvSpPr>
         <p:spPr>
           <a:xfrm>
-            <a:off x="1188720" y="1371600"/>
-            <a:ext cx="2468880" cy="365760"/>
+            <a:off x="457200" y="1920240"/>
+            <a:ext cx="3108960" cy="320040"/>
           </a:xfrm>
           <a:prstGeom prst="rect">
             <a:avLst/>
@@ -7607,15 +8191,15 @@
           <a:lstStyle/>
           <a:p>
             <a:pPr algn="r">
-              <a:defRPr sz="1600" b="1">
-                <a:solidFill>
-                  <a:srgbClr val="FFFFFF"/>
-                </a:solidFill>
-                <a:latin typeface="Arial"/>
-              </a:defRPr>
-            </a:pPr>
-            <a:r>
-              <a:t>מפת GIS</a:t>
+              <a:defRPr sz="1100" b="0">
+                <a:solidFill>
+                  <a:srgbClr val="F1F5F9"/>
+                </a:solidFill>
+                <a:latin typeface="Arial"/>
+              </a:defRPr>
+            </a:pPr>
+            <a:r>
+              <a:t>▸  DEM 5m — מפ"י (מודל גובה דיגיטלי)</a:t>
             </a:r>
           </a:p>
         </p:txBody>
@@ -7628,8 +8212,8 @@
         </p:nvSpPr>
         <p:spPr>
           <a:xfrm>
-            <a:off x="731520" y="1920240"/>
-            <a:ext cx="2926080" cy="1280160"/>
+            <a:off x="457200" y="2304288"/>
+            <a:ext cx="3108960" cy="320040"/>
           </a:xfrm>
           <a:prstGeom prst="rect">
             <a:avLst/>
@@ -7643,33 +8227,245 @@
           <a:lstStyle/>
           <a:p>
             <a:pPr algn="r">
-              <a:defRPr sz="1200" b="0">
-                <a:solidFill>
-                  <a:srgbClr val="94A3B8"/>
-                </a:solidFill>
-                <a:latin typeface="Arial"/>
-              </a:defRPr>
-            </a:pPr>
-            <a:r>
-              <a:t>מפת Leaflet עם שכבות OSM, ESRI</a:t>
-            </a:r>
-            <a:br/>
-            <a:r>
-              <a:t>Hillshade, ומפת חום הצפות דינמית</a:t>
-            </a:r>
-          </a:p>
-        </p:txBody>
-      </p:sp>
-      <p:sp>
-        <p:nvSpPr>
-          <p:cNvPr id="8" name="Rounded Rectangle 7"/>
+              <a:defRPr sz="1100" b="0">
+                <a:solidFill>
+                  <a:srgbClr val="F1F5F9"/>
+                </a:solidFill>
+                <a:latin typeface="Arial"/>
+              </a:defRPr>
+            </a:pPr>
+            <a:r>
+              <a:t>▸  גבולות מוניציפליים — OSM</a:t>
+            </a:r>
+          </a:p>
+        </p:txBody>
+      </p:sp>
+      <p:sp>
+        <p:nvSpPr>
+          <p:cNvPr id="8" name="TextBox 7"/>
+          <p:cNvSpPr txBox="1"/>
+          <p:nvPr/>
+        </p:nvSpPr>
+        <p:spPr>
+          <a:xfrm>
+            <a:off x="457200" y="2688336"/>
+            <a:ext cx="3108960" cy="320040"/>
+          </a:xfrm>
+          <a:prstGeom prst="rect">
+            <a:avLst/>
+          </a:prstGeom>
+          <a:noFill/>
+        </p:spPr>
+        <p:txBody>
+          <a:bodyPr wrap="square">
+            <a:spAutoFit/>
+          </a:bodyPr>
+          <a:lstStyle/>
+          <a:p>
+            <a:pPr algn="r">
+              <a:defRPr sz="1100" b="0">
+                <a:solidFill>
+                  <a:srgbClr val="F1F5F9"/>
+                </a:solidFill>
+                <a:latin typeface="Arial"/>
+              </a:defRPr>
+            </a:pPr>
+            <a:r>
+              <a:t>▸  אוכלוסייה וגילאים — למ"ס</a:t>
+            </a:r>
+          </a:p>
+        </p:txBody>
+      </p:sp>
+      <p:sp>
+        <p:nvSpPr>
+          <p:cNvPr id="9" name="TextBox 8"/>
+          <p:cNvSpPr txBox="1"/>
+          <p:nvPr/>
+        </p:nvSpPr>
+        <p:spPr>
+          <a:xfrm>
+            <a:off x="457200" y="3072384"/>
+            <a:ext cx="3108960" cy="320040"/>
+          </a:xfrm>
+          <a:prstGeom prst="rect">
+            <a:avLst/>
+          </a:prstGeom>
+          <a:noFill/>
+        </p:spPr>
+        <p:txBody>
+          <a:bodyPr wrap="square">
+            <a:spAutoFit/>
+          </a:bodyPr>
+          <a:lstStyle/>
+          <a:p>
+            <a:pPr algn="r">
+              <a:defRPr sz="1100" b="0">
+                <a:solidFill>
+                  <a:srgbClr val="F1F5F9"/>
+                </a:solidFill>
+                <a:latin typeface="Arial"/>
+              </a:defRPr>
+            </a:pPr>
+            <a:r>
+              <a:t>▸  אשכול סוציו-אקונומי — למ"ס</a:t>
+            </a:r>
+          </a:p>
+        </p:txBody>
+      </p:sp>
+      <p:sp>
+        <p:nvSpPr>
+          <p:cNvPr id="10" name="TextBox 9"/>
+          <p:cNvSpPr txBox="1"/>
+          <p:nvPr/>
+        </p:nvSpPr>
+        <p:spPr>
+          <a:xfrm>
+            <a:off x="457200" y="3456432"/>
+            <a:ext cx="3108960" cy="320040"/>
+          </a:xfrm>
+          <a:prstGeom prst="rect">
+            <a:avLst/>
+          </a:prstGeom>
+          <a:noFill/>
+        </p:spPr>
+        <p:txBody>
+          <a:bodyPr wrap="square">
+            <a:spAutoFit/>
+          </a:bodyPr>
+          <a:lstStyle/>
+          <a:p>
+            <a:pPr algn="r">
+              <a:defRPr sz="1100" b="0">
+                <a:solidFill>
+                  <a:srgbClr val="F1F5F9"/>
+                </a:solidFill>
+                <a:latin typeface="Arial"/>
+              </a:defRPr>
+            </a:pPr>
+            <a:r>
+              <a:t>▸  רשת כבישים — OSM</a:t>
+            </a:r>
+          </a:p>
+        </p:txBody>
+      </p:sp>
+      <p:sp>
+        <p:nvSpPr>
+          <p:cNvPr id="11" name="TextBox 10"/>
+          <p:cNvSpPr txBox="1"/>
+          <p:nvPr/>
+        </p:nvSpPr>
+        <p:spPr>
+          <a:xfrm>
+            <a:off x="457200" y="3840480"/>
+            <a:ext cx="3108960" cy="320040"/>
+          </a:xfrm>
+          <a:prstGeom prst="rect">
+            <a:avLst/>
+          </a:prstGeom>
+          <a:noFill/>
+        </p:spPr>
+        <p:txBody>
+          <a:bodyPr wrap="square">
+            <a:spAutoFit/>
+          </a:bodyPr>
+          <a:lstStyle/>
+          <a:p>
+            <a:pPr algn="r">
+              <a:defRPr sz="1100" b="0">
+                <a:solidFill>
+                  <a:srgbClr val="F1F5F9"/>
+                </a:solidFill>
+                <a:latin typeface="Arial"/>
+              </a:defRPr>
+            </a:pPr>
+            <a:r>
+              <a:t>▸  תחנות משטרה — OSM</a:t>
+            </a:r>
+          </a:p>
+        </p:txBody>
+      </p:sp>
+      <p:sp>
+        <p:nvSpPr>
+          <p:cNvPr id="12" name="TextBox 11"/>
+          <p:cNvSpPr txBox="1"/>
+          <p:nvPr/>
+        </p:nvSpPr>
+        <p:spPr>
+          <a:xfrm>
+            <a:off x="457200" y="4224528"/>
+            <a:ext cx="3108960" cy="320040"/>
+          </a:xfrm>
+          <a:prstGeom prst="rect">
+            <a:avLst/>
+          </a:prstGeom>
+          <a:noFill/>
+        </p:spPr>
+        <p:txBody>
+          <a:bodyPr wrap="square">
+            <a:spAutoFit/>
+          </a:bodyPr>
+          <a:lstStyle/>
+          <a:p>
+            <a:pPr algn="r">
+              <a:defRPr sz="1100" b="0">
+                <a:solidFill>
+                  <a:srgbClr val="F1F5F9"/>
+                </a:solidFill>
+                <a:latin typeface="Arial"/>
+              </a:defRPr>
+            </a:pPr>
+            <a:r>
+              <a:t>▸  מודל הצפה — GSI (גובה גל)</a:t>
+            </a:r>
+          </a:p>
+        </p:txBody>
+      </p:sp>
+      <p:sp>
+        <p:nvSpPr>
+          <p:cNvPr id="13" name="TextBox 12"/>
+          <p:cNvSpPr txBox="1"/>
+          <p:nvPr/>
+        </p:nvSpPr>
+        <p:spPr>
+          <a:xfrm>
+            <a:off x="3840480" y="3200400"/>
+            <a:ext cx="457200" cy="457200"/>
+          </a:xfrm>
+          <a:prstGeom prst="rect">
+            <a:avLst/>
+          </a:prstGeom>
+          <a:noFill/>
+        </p:spPr>
+        <p:txBody>
+          <a:bodyPr wrap="square">
+            <a:spAutoFit/>
+          </a:bodyPr>
+          <a:lstStyle/>
+          <a:p>
+            <a:pPr algn="ctr">
+              <a:defRPr sz="3000" b="0">
+                <a:solidFill>
+                  <a:srgbClr val="14B8A6"/>
+                </a:solidFill>
+                <a:latin typeface="Arial"/>
+              </a:defRPr>
+            </a:pPr>
+            <a:r>
+              <a:t>➡</a:t>
+            </a:r>
+          </a:p>
+        </p:txBody>
+      </p:sp>
+      <p:sp>
+        <p:nvSpPr>
+          <p:cNvPr id="14" name="Rounded Rectangle 13"/>
           <p:cNvSpPr/>
           <p:nvPr/>
         </p:nvSpPr>
         <p:spPr>
           <a:xfrm>
-            <a:off x="4206240" y="1188720"/>
-            <a:ext cx="3474720" cy="2286000"/>
+            <a:off x="4389120" y="1188720"/>
+            <a:ext cx="3383280" cy="5029200"/>
           </a:xfrm>
           <a:prstGeom prst="roundRect">
             <a:avLst/>
@@ -7679,7 +8475,7 @@
           </a:solidFill>
           <a:ln w="19050">
             <a:solidFill>
-              <a:srgbClr val="334155"/>
+              <a:srgbClr val="14B8A6"/>
             </a:solidFill>
           </a:ln>
         </p:spPr>
@@ -7707,14 +8503,14 @@
       </p:sp>
       <p:sp>
         <p:nvSpPr>
-          <p:cNvPr id="9" name="TextBox 8"/>
-          <p:cNvSpPr txBox="1"/>
-          <p:nvPr/>
-        </p:nvSpPr>
-        <p:spPr>
-          <a:xfrm>
-            <a:off x="4389120" y="1371600"/>
-            <a:ext cx="548640" cy="548640"/>
+          <p:cNvPr id="15" name="TextBox 14"/>
+          <p:cNvSpPr txBox="1"/>
+          <p:nvPr/>
+        </p:nvSpPr>
+        <p:spPr>
+          <a:xfrm>
+            <a:off x="4572000" y="1280160"/>
+            <a:ext cx="3017520" cy="457200"/>
           </a:xfrm>
           <a:prstGeom prst="rect">
             <a:avLst/>
@@ -7728,29 +8524,29 @@
           <a:lstStyle/>
           <a:p>
             <a:pPr algn="ctr">
-              <a:defRPr sz="2800" b="0">
-                <a:solidFill>
-                  <a:srgbClr val="FFFFFF"/>
-                </a:solidFill>
-                <a:latin typeface="Arial"/>
-              </a:defRPr>
-            </a:pPr>
-            <a:r>
-              <a:t>🏙️</a:t>
-            </a:r>
-          </a:p>
-        </p:txBody>
-      </p:sp>
-      <p:sp>
-        <p:nvSpPr>
-          <p:cNvPr id="10" name="TextBox 9"/>
-          <p:cNvSpPr txBox="1"/>
-          <p:nvPr/>
-        </p:nvSpPr>
-        <p:spPr>
-          <a:xfrm>
-            <a:off x="4937759" y="1371600"/>
-            <a:ext cx="2468880" cy="365760"/>
+              <a:defRPr sz="1800" b="1">
+                <a:solidFill>
+                  <a:srgbClr val="14B8A6"/>
+                </a:solidFill>
+                <a:latin typeface="Arial"/>
+              </a:defRPr>
+            </a:pPr>
+            <a:r>
+              <a:t>⚙️  שלבי עיבוד</a:t>
+            </a:r>
+          </a:p>
+        </p:txBody>
+      </p:sp>
+      <p:sp>
+        <p:nvSpPr>
+          <p:cNvPr id="16" name="TextBox 15"/>
+          <p:cNvSpPr txBox="1"/>
+          <p:nvPr/>
+        </p:nvSpPr>
+        <p:spPr>
+          <a:xfrm>
+            <a:off x="4572000" y="1920240"/>
+            <a:ext cx="3017520" cy="320040"/>
           </a:xfrm>
           <a:prstGeom prst="rect">
             <a:avLst/>
@@ -7764,29 +8560,29 @@
           <a:lstStyle/>
           <a:p>
             <a:pPr algn="r">
-              <a:defRPr sz="1600" b="1">
-                <a:solidFill>
-                  <a:srgbClr val="FFFFFF"/>
-                </a:solidFill>
-                <a:latin typeface="Arial"/>
-              </a:defRPr>
-            </a:pPr>
-            <a:r>
-              <a:t>גבולות ערים</a:t>
-            </a:r>
-          </a:p>
-        </p:txBody>
-      </p:sp>
-      <p:sp>
-        <p:nvSpPr>
-          <p:cNvPr id="11" name="TextBox 10"/>
-          <p:cNvSpPr txBox="1"/>
-          <p:nvPr/>
-        </p:nvSpPr>
-        <p:spPr>
-          <a:xfrm>
-            <a:off x="4480559" y="1920240"/>
-            <a:ext cx="2926080" cy="1280160"/>
+              <a:defRPr sz="1100" b="0">
+                <a:solidFill>
+                  <a:srgbClr val="F1F5F9"/>
+                </a:solidFill>
+                <a:latin typeface="Arial"/>
+              </a:defRPr>
+            </a:pPr>
+            <a:r>
+              <a:t>1.  חישוב אזורי הצפה לפי גובה גל</a:t>
+            </a:r>
+          </a:p>
+        </p:txBody>
+      </p:sp>
+      <p:sp>
+        <p:nvSpPr>
+          <p:cNvPr id="17" name="TextBox 16"/>
+          <p:cNvSpPr txBox="1"/>
+          <p:nvPr/>
+        </p:nvSpPr>
+        <p:spPr>
+          <a:xfrm>
+            <a:off x="4572000" y="2304288"/>
+            <a:ext cx="3017520" cy="320040"/>
           </a:xfrm>
           <a:prstGeom prst="rect">
             <a:avLst/>
@@ -7800,33 +8596,281 @@
           <a:lstStyle/>
           <a:p>
             <a:pPr algn="r">
-              <a:defRPr sz="1200" b="0">
-                <a:solidFill>
-                  <a:srgbClr val="94A3B8"/>
-                </a:solidFill>
-                <a:latin typeface="Arial"/>
-              </a:defRPr>
-            </a:pPr>
-            <a:r>
-              <a:t>554 גבולות מוניציפליים אמיתיים מ-OSM</a:t>
-            </a:r>
-            <a:br/>
-            <a:r>
-              <a:t>צבועים לפי ציון TSRS</a:t>
-            </a:r>
-          </a:p>
-        </p:txBody>
-      </p:sp>
-      <p:sp>
-        <p:nvSpPr>
-          <p:cNvPr id="12" name="Rounded Rectangle 11"/>
+              <a:defRPr sz="1100" b="0">
+                <a:solidFill>
+                  <a:srgbClr val="F1F5F9"/>
+                </a:solidFill>
+                <a:latin typeface="Arial"/>
+              </a:defRPr>
+            </a:pPr>
+            <a:r>
+              <a:t>2.  חיתוך מרחבי עם גבולות ערים</a:t>
+            </a:r>
+          </a:p>
+        </p:txBody>
+      </p:sp>
+      <p:sp>
+        <p:nvSpPr>
+          <p:cNvPr id="18" name="TextBox 17"/>
+          <p:cNvSpPr txBox="1"/>
+          <p:nvPr/>
+        </p:nvSpPr>
+        <p:spPr>
+          <a:xfrm>
+            <a:off x="4572000" y="2688336"/>
+            <a:ext cx="3017520" cy="320040"/>
+          </a:xfrm>
+          <a:prstGeom prst="rect">
+            <a:avLst/>
+          </a:prstGeom>
+          <a:noFill/>
+        </p:spPr>
+        <p:txBody>
+          <a:bodyPr wrap="square">
+            <a:spAutoFit/>
+          </a:bodyPr>
+          <a:lstStyle/>
+          <a:p>
+            <a:pPr algn="r">
+              <a:defRPr sz="1100" b="0">
+                <a:solidFill>
+                  <a:srgbClr val="F1F5F9"/>
+                </a:solidFill>
+                <a:latin typeface="Arial"/>
+              </a:defRPr>
+            </a:pPr>
+            <a:r>
+              <a:t>3.  חישוב H — אחוז שטח מוצף</a:t>
+            </a:r>
+          </a:p>
+        </p:txBody>
+      </p:sp>
+      <p:sp>
+        <p:nvSpPr>
+          <p:cNvPr id="19" name="TextBox 18"/>
+          <p:cNvSpPr txBox="1"/>
+          <p:nvPr/>
+        </p:nvSpPr>
+        <p:spPr>
+          <a:xfrm>
+            <a:off x="4572000" y="3072384"/>
+            <a:ext cx="3017520" cy="320040"/>
+          </a:xfrm>
+          <a:prstGeom prst="rect">
+            <a:avLst/>
+          </a:prstGeom>
+          <a:noFill/>
+        </p:spPr>
+        <p:txBody>
+          <a:bodyPr wrap="square">
+            <a:spAutoFit/>
+          </a:bodyPr>
+          <a:lstStyle/>
+          <a:p>
+            <a:pPr algn="r">
+              <a:defRPr sz="1100" b="0">
+                <a:solidFill>
+                  <a:srgbClr val="F1F5F9"/>
+                </a:solidFill>
+                <a:latin typeface="Arial"/>
+              </a:defRPr>
+            </a:pPr>
+            <a:r>
+              <a:t>4.  חישוב V — פגיעות דמוגרפית מלמ"ס</a:t>
+            </a:r>
+          </a:p>
+        </p:txBody>
+      </p:sp>
+      <p:sp>
+        <p:nvSpPr>
+          <p:cNvPr id="20" name="TextBox 19"/>
+          <p:cNvSpPr txBox="1"/>
+          <p:nvPr/>
+        </p:nvSpPr>
+        <p:spPr>
+          <a:xfrm>
+            <a:off x="4572000" y="3456432"/>
+            <a:ext cx="3017520" cy="320040"/>
+          </a:xfrm>
+          <a:prstGeom prst="rect">
+            <a:avLst/>
+          </a:prstGeom>
+          <a:noFill/>
+        </p:spPr>
+        <p:txBody>
+          <a:bodyPr wrap="square">
+            <a:spAutoFit/>
+          </a:bodyPr>
+          <a:lstStyle/>
+          <a:p>
+            <a:pPr algn="r">
+              <a:defRPr sz="1100" b="0">
+                <a:solidFill>
+                  <a:srgbClr val="F1F5F9"/>
+                </a:solidFill>
+                <a:latin typeface="Arial"/>
+              </a:defRPr>
+            </a:pPr>
+            <a:r>
+              <a:t>5.  חישוב O — סימולציית ABM לפינוי</a:t>
+            </a:r>
+          </a:p>
+        </p:txBody>
+      </p:sp>
+      <p:sp>
+        <p:nvSpPr>
+          <p:cNvPr id="21" name="TextBox 20"/>
+          <p:cNvSpPr txBox="1"/>
+          <p:nvPr/>
+        </p:nvSpPr>
+        <p:spPr>
+          <a:xfrm>
+            <a:off x="4572000" y="3840480"/>
+            <a:ext cx="3017520" cy="320040"/>
+          </a:xfrm>
+          <a:prstGeom prst="rect">
+            <a:avLst/>
+          </a:prstGeom>
+          <a:noFill/>
+        </p:spPr>
+        <p:txBody>
+          <a:bodyPr wrap="square">
+            <a:spAutoFit/>
+          </a:bodyPr>
+          <a:lstStyle/>
+          <a:p>
+            <a:pPr algn="r">
+              <a:defRPr sz="1100" b="0">
+                <a:solidFill>
+                  <a:srgbClr val="F1F5F9"/>
+                </a:solidFill>
+                <a:latin typeface="Arial"/>
+              </a:defRPr>
+            </a:pPr>
+            <a:r>
+              <a:t>6.  חישוב R⁻¹ — הערכת משאבי תגובה</a:t>
+            </a:r>
+          </a:p>
+        </p:txBody>
+      </p:sp>
+      <p:sp>
+        <p:nvSpPr>
+          <p:cNvPr id="22" name="TextBox 21"/>
+          <p:cNvSpPr txBox="1"/>
+          <p:nvPr/>
+        </p:nvSpPr>
+        <p:spPr>
+          <a:xfrm>
+            <a:off x="4572000" y="4224528"/>
+            <a:ext cx="3017520" cy="320040"/>
+          </a:xfrm>
+          <a:prstGeom prst="rect">
+            <a:avLst/>
+          </a:prstGeom>
+          <a:noFill/>
+        </p:spPr>
+        <p:txBody>
+          <a:bodyPr wrap="square">
+            <a:spAutoFit/>
+          </a:bodyPr>
+          <a:lstStyle/>
+          <a:p>
+            <a:pPr algn="r">
+              <a:defRPr sz="1100" b="0">
+                <a:solidFill>
+                  <a:srgbClr val="F1F5F9"/>
+                </a:solidFill>
+                <a:latin typeface="Arial"/>
+              </a:defRPr>
+            </a:pPr>
+            <a:r>
+              <a:t>7.  חישוב I⁻¹ — זיהוי מקלטים ותשתיות</a:t>
+            </a:r>
+          </a:p>
+        </p:txBody>
+      </p:sp>
+      <p:sp>
+        <p:nvSpPr>
+          <p:cNvPr id="23" name="TextBox 22"/>
+          <p:cNvSpPr txBox="1"/>
+          <p:nvPr/>
+        </p:nvSpPr>
+        <p:spPr>
+          <a:xfrm>
+            <a:off x="4572000" y="4608576"/>
+            <a:ext cx="3017520" cy="320040"/>
+          </a:xfrm>
+          <a:prstGeom prst="rect">
+            <a:avLst/>
+          </a:prstGeom>
+          <a:noFill/>
+        </p:spPr>
+        <p:txBody>
+          <a:bodyPr wrap="square">
+            <a:spAutoFit/>
+          </a:bodyPr>
+          <a:lstStyle/>
+          <a:p>
+            <a:pPr algn="r">
+              <a:defRPr sz="1100" b="0">
+                <a:solidFill>
+                  <a:srgbClr val="F1F5F9"/>
+                </a:solidFill>
+                <a:latin typeface="Arial"/>
+              </a:defRPr>
+            </a:pPr>
+            <a:r>
+              <a:t>8.  נרמול Min-Max + שקלול TSRS</a:t>
+            </a:r>
+          </a:p>
+        </p:txBody>
+      </p:sp>
+      <p:sp>
+        <p:nvSpPr>
+          <p:cNvPr id="24" name="TextBox 23"/>
+          <p:cNvSpPr txBox="1"/>
+          <p:nvPr/>
+        </p:nvSpPr>
+        <p:spPr>
+          <a:xfrm>
+            <a:off x="7863840" y="3200400"/>
+            <a:ext cx="457200" cy="457200"/>
+          </a:xfrm>
+          <a:prstGeom prst="rect">
+            <a:avLst/>
+          </a:prstGeom>
+          <a:noFill/>
+        </p:spPr>
+        <p:txBody>
+          <a:bodyPr wrap="square">
+            <a:spAutoFit/>
+          </a:bodyPr>
+          <a:lstStyle/>
+          <a:p>
+            <a:pPr algn="ctr">
+              <a:defRPr sz="3000" b="0">
+                <a:solidFill>
+                  <a:srgbClr val="14B8A6"/>
+                </a:solidFill>
+                <a:latin typeface="Arial"/>
+              </a:defRPr>
+            </a:pPr>
+            <a:r>
+              <a:t>➡</a:t>
+            </a:r>
+          </a:p>
+        </p:txBody>
+      </p:sp>
+      <p:sp>
+        <p:nvSpPr>
+          <p:cNvPr id="25" name="Rounded Rectangle 24"/>
           <p:cNvSpPr/>
           <p:nvPr/>
         </p:nvSpPr>
         <p:spPr>
           <a:xfrm>
-            <a:off x="7955279" y="1188720"/>
-            <a:ext cx="3474720" cy="2286000"/>
+            <a:off x="8412480" y="1188720"/>
+            <a:ext cx="3474720" cy="5029200"/>
           </a:xfrm>
           <a:prstGeom prst="roundRect">
             <a:avLst/>
@@ -7836,7 +8880,7 @@
           </a:solidFill>
           <a:ln w="19050">
             <a:solidFill>
-              <a:srgbClr val="334155"/>
+              <a:srgbClr val="22C55E"/>
             </a:solidFill>
           </a:ln>
         </p:spPr>
@@ -7864,14 +8908,14 @@
       </p:sp>
       <p:sp>
         <p:nvSpPr>
-          <p:cNvPr id="13" name="TextBox 12"/>
-          <p:cNvSpPr txBox="1"/>
-          <p:nvPr/>
-        </p:nvSpPr>
-        <p:spPr>
-          <a:xfrm>
-            <a:off x="8138159" y="1371600"/>
-            <a:ext cx="548640" cy="548640"/>
+          <p:cNvPr id="26" name="TextBox 25"/>
+          <p:cNvSpPr txBox="1"/>
+          <p:nvPr/>
+        </p:nvSpPr>
+        <p:spPr>
+          <a:xfrm>
+            <a:off x="8595360" y="1280160"/>
+            <a:ext cx="3108960" cy="457200"/>
           </a:xfrm>
           <a:prstGeom prst="rect">
             <a:avLst/>
@@ -7885,7 +8929,43 @@
           <a:lstStyle/>
           <a:p>
             <a:pPr algn="ctr">
-              <a:defRPr sz="2800" b="0">
+              <a:defRPr sz="1800" b="1">
+                <a:solidFill>
+                  <a:srgbClr val="22C55E"/>
+                </a:solidFill>
+                <a:latin typeface="Arial"/>
+              </a:defRPr>
+            </a:pPr>
+            <a:r>
+              <a:t>📤  תוצרי פלט</a:t>
+            </a:r>
+          </a:p>
+        </p:txBody>
+      </p:sp>
+      <p:sp>
+        <p:nvSpPr>
+          <p:cNvPr id="27" name="TextBox 26"/>
+          <p:cNvSpPr txBox="1"/>
+          <p:nvPr/>
+        </p:nvSpPr>
+        <p:spPr>
+          <a:xfrm>
+            <a:off x="8595360" y="1920240"/>
+            <a:ext cx="3108960" cy="274320"/>
+          </a:xfrm>
+          <a:prstGeom prst="rect">
+            <a:avLst/>
+          </a:prstGeom>
+          <a:noFill/>
+        </p:spPr>
+        <p:txBody>
+          <a:bodyPr wrap="square">
+            <a:spAutoFit/>
+          </a:bodyPr>
+          <a:lstStyle/>
+          <a:p>
+            <a:pPr algn="r">
+              <a:defRPr sz="1300" b="1">
                 <a:solidFill>
                   <a:srgbClr val="FFFFFF"/>
                 </a:solidFill>
@@ -7893,21 +8973,21 @@
               </a:defRPr>
             </a:pPr>
             <a:r>
-              <a:t>🌊</a:t>
-            </a:r>
-          </a:p>
-        </p:txBody>
-      </p:sp>
-      <p:sp>
-        <p:nvSpPr>
-          <p:cNvPr id="14" name="TextBox 13"/>
-          <p:cNvSpPr txBox="1"/>
-          <p:nvPr/>
-        </p:nvSpPr>
-        <p:spPr>
-          <a:xfrm>
-            <a:off x="8686800" y="1371600"/>
-            <a:ext cx="2468880" cy="365760"/>
+              <a:t>תוצרים גאוגרפיים:</a:t>
+            </a:r>
+          </a:p>
+        </p:txBody>
+      </p:sp>
+      <p:sp>
+        <p:nvSpPr>
+          <p:cNvPr id="28" name="TextBox 27"/>
+          <p:cNvSpPr txBox="1"/>
+          <p:nvPr/>
+        </p:nvSpPr>
+        <p:spPr>
+          <a:xfrm>
+            <a:off x="8595360" y="2286000"/>
+            <a:ext cx="3108960" cy="274320"/>
           </a:xfrm>
           <a:prstGeom prst="rect">
             <a:avLst/>
@@ -7921,7 +9001,151 @@
           <a:lstStyle/>
           <a:p>
             <a:pPr algn="r">
-              <a:defRPr sz="1600" b="1">
+              <a:defRPr sz="1100" b="0">
+                <a:solidFill>
+                  <a:srgbClr val="F1F5F9"/>
+                </a:solidFill>
+                <a:latin typeface="Arial"/>
+              </a:defRPr>
+            </a:pPr>
+            <a:r>
+              <a:t>🗺️  מפת חום הצפות דינמית</a:t>
+            </a:r>
+          </a:p>
+        </p:txBody>
+      </p:sp>
+      <p:sp>
+        <p:nvSpPr>
+          <p:cNvPr id="29" name="TextBox 28"/>
+          <p:cNvSpPr txBox="1"/>
+          <p:nvPr/>
+        </p:nvSpPr>
+        <p:spPr>
+          <a:xfrm>
+            <a:off x="8595360" y="2606040"/>
+            <a:ext cx="3108960" cy="274320"/>
+          </a:xfrm>
+          <a:prstGeom prst="rect">
+            <a:avLst/>
+          </a:prstGeom>
+          <a:noFill/>
+        </p:spPr>
+        <p:txBody>
+          <a:bodyPr wrap="square">
+            <a:spAutoFit/>
+          </a:bodyPr>
+          <a:lstStyle/>
+          <a:p>
+            <a:pPr algn="r">
+              <a:defRPr sz="1100" b="0">
+                <a:solidFill>
+                  <a:srgbClr val="F1F5F9"/>
+                </a:solidFill>
+                <a:latin typeface="Arial"/>
+              </a:defRPr>
+            </a:pPr>
+            <a:r>
+              <a:t>🗺️  פוליגוני ערים צבועים לפי TSRS</a:t>
+            </a:r>
+          </a:p>
+        </p:txBody>
+      </p:sp>
+      <p:sp>
+        <p:nvSpPr>
+          <p:cNvPr id="30" name="TextBox 29"/>
+          <p:cNvSpPr txBox="1"/>
+          <p:nvPr/>
+        </p:nvSpPr>
+        <p:spPr>
+          <a:xfrm>
+            <a:off x="8595360" y="2926080"/>
+            <a:ext cx="3108960" cy="274320"/>
+          </a:xfrm>
+          <a:prstGeom prst="rect">
+            <a:avLst/>
+          </a:prstGeom>
+          <a:noFill/>
+        </p:spPr>
+        <p:txBody>
+          <a:bodyPr wrap="square">
+            <a:spAutoFit/>
+          </a:bodyPr>
+          <a:lstStyle/>
+          <a:p>
+            <a:pPr algn="r">
+              <a:defRPr sz="1100" b="0">
+                <a:solidFill>
+                  <a:srgbClr val="F1F5F9"/>
+                </a:solidFill>
+                <a:latin typeface="Arial"/>
+              </a:defRPr>
+            </a:pPr>
+            <a:r>
+              <a:t>🗺️  נקודות תחנות משטרה</a:t>
+            </a:r>
+          </a:p>
+        </p:txBody>
+      </p:sp>
+      <p:sp>
+        <p:nvSpPr>
+          <p:cNvPr id="31" name="TextBox 30"/>
+          <p:cNvSpPr txBox="1"/>
+          <p:nvPr/>
+        </p:nvSpPr>
+        <p:spPr>
+          <a:xfrm>
+            <a:off x="8595360" y="3246120"/>
+            <a:ext cx="3108960" cy="274320"/>
+          </a:xfrm>
+          <a:prstGeom prst="rect">
+            <a:avLst/>
+          </a:prstGeom>
+          <a:noFill/>
+        </p:spPr>
+        <p:txBody>
+          <a:bodyPr wrap="square">
+            <a:spAutoFit/>
+          </a:bodyPr>
+          <a:lstStyle/>
+          <a:p>
+            <a:pPr algn="r">
+              <a:defRPr sz="1100" b="0">
+                <a:solidFill>
+                  <a:srgbClr val="F1F5F9"/>
+                </a:solidFill>
+                <a:latin typeface="Arial"/>
+              </a:defRPr>
+            </a:pPr>
+            <a:r>
+              <a:t>🗺️  שכבות OSM (כבישים, מבנים)</a:t>
+            </a:r>
+          </a:p>
+        </p:txBody>
+      </p:sp>
+      <p:sp>
+        <p:nvSpPr>
+          <p:cNvPr id="32" name="TextBox 31"/>
+          <p:cNvSpPr txBox="1"/>
+          <p:nvPr/>
+        </p:nvSpPr>
+        <p:spPr>
+          <a:xfrm>
+            <a:off x="8595360" y="3749039"/>
+            <a:ext cx="3108960" cy="274320"/>
+          </a:xfrm>
+          <a:prstGeom prst="rect">
+            <a:avLst/>
+          </a:prstGeom>
+          <a:noFill/>
+        </p:spPr>
+        <p:txBody>
+          <a:bodyPr wrap="square">
+            <a:spAutoFit/>
+          </a:bodyPr>
+          <a:lstStyle/>
+          <a:p>
+            <a:pPr algn="r">
+              <a:defRPr sz="1300" b="1">
                 <a:solidFill>
                   <a:srgbClr val="FFFFFF"/>
                 </a:solidFill>
@@ -7929,21 +9153,21 @@
               </a:defRPr>
             </a:pPr>
             <a:r>
-              <a:t>סליידר גובה גל</a:t>
-            </a:r>
-          </a:p>
-        </p:txBody>
-      </p:sp>
-      <p:sp>
-        <p:nvSpPr>
-          <p:cNvPr id="15" name="TextBox 14"/>
-          <p:cNvSpPr txBox="1"/>
-          <p:nvPr/>
-        </p:nvSpPr>
-        <p:spPr>
-          <a:xfrm>
-            <a:off x="8229600" y="1920240"/>
-            <a:ext cx="2926080" cy="1280160"/>
+              <a:t>תוצרים טבלאיים:</a:t>
+            </a:r>
+          </a:p>
+        </p:txBody>
+      </p:sp>
+      <p:sp>
+        <p:nvSpPr>
+          <p:cNvPr id="33" name="TextBox 32"/>
+          <p:cNvSpPr txBox="1"/>
+          <p:nvPr/>
+        </p:nvSpPr>
+        <p:spPr>
+          <a:xfrm>
+            <a:off x="8595360" y="4114800"/>
+            <a:ext cx="3108960" cy="274320"/>
           </a:xfrm>
           <a:prstGeom prst="rect">
             <a:avLst/>
@@ -7957,114 +9181,29 @@
           <a:lstStyle/>
           <a:p>
             <a:pPr algn="r">
-              <a:defRPr sz="1200" b="0">
-                <a:solidFill>
-                  <a:srgbClr val="94A3B8"/>
-                </a:solidFill>
-                <a:latin typeface="Arial"/>
-              </a:defRPr>
-            </a:pPr>
-            <a:r>
-              <a:t>בחירת גובה גל 0.5-10 מ' עם</a:t>
-            </a:r>
-            <a:br/>
-            <a:r>
-              <a:t>עדכון מיידי של מפת החום</a:t>
-            </a:r>
-          </a:p>
-        </p:txBody>
-      </p:sp>
-      <p:sp>
-        <p:nvSpPr>
-          <p:cNvPr id="16" name="Rounded Rectangle 15"/>
-          <p:cNvSpPr/>
-          <p:nvPr/>
-        </p:nvSpPr>
-        <p:spPr>
-          <a:xfrm>
-            <a:off x="457200" y="3840480"/>
-            <a:ext cx="3474720" cy="2286000"/>
-          </a:xfrm>
-          <a:prstGeom prst="roundRect">
-            <a:avLst/>
-          </a:prstGeom>
-          <a:solidFill>
-            <a:srgbClr val="1E293B"/>
-          </a:solidFill>
-          <a:ln w="19050">
-            <a:solidFill>
-              <a:srgbClr val="334155"/>
-            </a:solidFill>
-          </a:ln>
-        </p:spPr>
-        <p:style>
-          <a:lnRef idx="1">
-            <a:schemeClr val="accent1"/>
-          </a:lnRef>
-          <a:fillRef idx="3">
-            <a:schemeClr val="accent1"/>
-          </a:fillRef>
-          <a:effectRef idx="2">
-            <a:schemeClr val="accent1"/>
-          </a:effectRef>
-          <a:fontRef idx="minor">
-            <a:schemeClr val="lt1"/>
-          </a:fontRef>
-        </p:style>
-        <p:txBody>
-          <a:bodyPr rtlCol="0" anchor="ctr"/>
-          <a:lstStyle/>
-          <a:p>
-            <a:pPr algn="ctr"/>
-          </a:p>
-        </p:txBody>
-      </p:sp>
-      <p:sp>
-        <p:nvSpPr>
-          <p:cNvPr id="17" name="TextBox 16"/>
-          <p:cNvSpPr txBox="1"/>
-          <p:nvPr/>
-        </p:nvSpPr>
-        <p:spPr>
-          <a:xfrm>
-            <a:off x="640080" y="4023360"/>
-            <a:ext cx="548640" cy="548640"/>
-          </a:xfrm>
-          <a:prstGeom prst="rect">
-            <a:avLst/>
-          </a:prstGeom>
-          <a:noFill/>
-        </p:spPr>
-        <p:txBody>
-          <a:bodyPr wrap="square">
-            <a:spAutoFit/>
-          </a:bodyPr>
-          <a:lstStyle/>
-          <a:p>
-            <a:pPr algn="ctr">
-              <a:defRPr sz="2800" b="0">
-                <a:solidFill>
-                  <a:srgbClr val="FFFFFF"/>
-                </a:solidFill>
-                <a:latin typeface="Arial"/>
-              </a:defRPr>
-            </a:pPr>
-            <a:r>
-              <a:t>📊</a:t>
-            </a:r>
-          </a:p>
-        </p:txBody>
-      </p:sp>
-      <p:sp>
-        <p:nvSpPr>
-          <p:cNvPr id="18" name="TextBox 17"/>
-          <p:cNvSpPr txBox="1"/>
-          <p:nvPr/>
-        </p:nvSpPr>
-        <p:spPr>
-          <a:xfrm>
-            <a:off x="1188720" y="4023360"/>
-            <a:ext cx="2468880" cy="365760"/>
+              <a:defRPr sz="1100" b="0">
+                <a:solidFill>
+                  <a:srgbClr val="F1F5F9"/>
+                </a:solidFill>
+                <a:latin typeface="Arial"/>
+              </a:defRPr>
+            </a:pPr>
+            <a:r>
+              <a:t>📊  ציון TSRS (0-100) לכל עיר</a:t>
+            </a:r>
+          </a:p>
+        </p:txBody>
+      </p:sp>
+      <p:sp>
+        <p:nvSpPr>
+          <p:cNvPr id="34" name="TextBox 33"/>
+          <p:cNvSpPr txBox="1"/>
+          <p:nvPr/>
+        </p:nvSpPr>
+        <p:spPr>
+          <a:xfrm>
+            <a:off x="8595360" y="4434840"/>
+            <a:ext cx="3108960" cy="274320"/>
           </a:xfrm>
           <a:prstGeom prst="rect">
             <a:avLst/>
@@ -8078,29 +9217,29 @@
           <a:lstStyle/>
           <a:p>
             <a:pPr algn="r">
-              <a:defRPr sz="1600" b="1">
-                <a:solidFill>
-                  <a:srgbClr val="FFFFFF"/>
-                </a:solidFill>
-                <a:latin typeface="Arial"/>
-              </a:defRPr>
-            </a:pPr>
-            <a:r>
-              <a:t>פילוח דמוגרפי</a:t>
-            </a:r>
-          </a:p>
-        </p:txBody>
-      </p:sp>
-      <p:sp>
-        <p:nvSpPr>
-          <p:cNvPr id="19" name="TextBox 18"/>
-          <p:cNvSpPr txBox="1"/>
-          <p:nvPr/>
-        </p:nvSpPr>
-        <p:spPr>
-          <a:xfrm>
-            <a:off x="731520" y="4572000"/>
-            <a:ext cx="2926080" cy="1280160"/>
+              <a:defRPr sz="1100" b="0">
+                <a:solidFill>
+                  <a:srgbClr val="F1F5F9"/>
+                </a:solidFill>
+                <a:latin typeface="Arial"/>
+              </a:defRPr>
+            </a:pPr>
+            <a:r>
+              <a:t>📊  פירוט 5 מדדים (H,V,O,R,I)</a:t>
+            </a:r>
+          </a:p>
+        </p:txBody>
+      </p:sp>
+      <p:sp>
+        <p:nvSpPr>
+          <p:cNvPr id="35" name="TextBox 34"/>
+          <p:cNvSpPr txBox="1"/>
+          <p:nvPr/>
+        </p:nvSpPr>
+        <p:spPr>
+          <a:xfrm>
+            <a:off x="8595360" y="4754879"/>
+            <a:ext cx="3108960" cy="274320"/>
           </a:xfrm>
           <a:prstGeom prst="rect">
             <a:avLst/>
@@ -8114,114 +9253,29 @@
           <a:lstStyle/>
           <a:p>
             <a:pPr algn="r">
-              <a:defRPr sz="1200" b="0">
-                <a:solidFill>
-                  <a:srgbClr val="94A3B8"/>
-                </a:solidFill>
-                <a:latin typeface="Arial"/>
-              </a:defRPr>
-            </a:pPr>
-            <a:r>
-              <a:t>התפלגות גילאים, אשכול ח"כ</a:t>
-            </a:r>
-            <a:br/>
-            <a:r>
-              <a:t>מנתוני למ"ס אמיתיים</a:t>
-            </a:r>
-          </a:p>
-        </p:txBody>
-      </p:sp>
-      <p:sp>
-        <p:nvSpPr>
-          <p:cNvPr id="20" name="Rounded Rectangle 19"/>
-          <p:cNvSpPr/>
-          <p:nvPr/>
-        </p:nvSpPr>
-        <p:spPr>
-          <a:xfrm>
-            <a:off x="4206240" y="3840480"/>
-            <a:ext cx="3474720" cy="2286000"/>
-          </a:xfrm>
-          <a:prstGeom prst="roundRect">
-            <a:avLst/>
-          </a:prstGeom>
-          <a:solidFill>
-            <a:srgbClr val="1E293B"/>
-          </a:solidFill>
-          <a:ln w="19050">
-            <a:solidFill>
-              <a:srgbClr val="334155"/>
-            </a:solidFill>
-          </a:ln>
-        </p:spPr>
-        <p:style>
-          <a:lnRef idx="1">
-            <a:schemeClr val="accent1"/>
-          </a:lnRef>
-          <a:fillRef idx="3">
-            <a:schemeClr val="accent1"/>
-          </a:fillRef>
-          <a:effectRef idx="2">
-            <a:schemeClr val="accent1"/>
-          </a:effectRef>
-          <a:fontRef idx="minor">
-            <a:schemeClr val="lt1"/>
-          </a:fontRef>
-        </p:style>
-        <p:txBody>
-          <a:bodyPr rtlCol="0" anchor="ctr"/>
-          <a:lstStyle/>
-          <a:p>
-            <a:pPr algn="ctr"/>
-          </a:p>
-        </p:txBody>
-      </p:sp>
-      <p:sp>
-        <p:nvSpPr>
-          <p:cNvPr id="21" name="TextBox 20"/>
-          <p:cNvSpPr txBox="1"/>
-          <p:nvPr/>
-        </p:nvSpPr>
-        <p:spPr>
-          <a:xfrm>
-            <a:off x="4389120" y="4023360"/>
-            <a:ext cx="548640" cy="548640"/>
-          </a:xfrm>
-          <a:prstGeom prst="rect">
-            <a:avLst/>
-          </a:prstGeom>
-          <a:noFill/>
-        </p:spPr>
-        <p:txBody>
-          <a:bodyPr wrap="square">
-            <a:spAutoFit/>
-          </a:bodyPr>
-          <a:lstStyle/>
-          <a:p>
-            <a:pPr algn="ctr">
-              <a:defRPr sz="2800" b="0">
-                <a:solidFill>
-                  <a:srgbClr val="FFFFFF"/>
-                </a:solidFill>
-                <a:latin typeface="Arial"/>
-              </a:defRPr>
-            </a:pPr>
-            <a:r>
-              <a:t>🛡️</a:t>
-            </a:r>
-          </a:p>
-        </p:txBody>
-      </p:sp>
-      <p:sp>
-        <p:nvSpPr>
-          <p:cNvPr id="22" name="TextBox 21"/>
-          <p:cNvSpPr txBox="1"/>
-          <p:nvPr/>
-        </p:nvSpPr>
-        <p:spPr>
-          <a:xfrm>
-            <a:off x="4937759" y="4023360"/>
-            <a:ext cx="2468880" cy="365760"/>
+              <a:defRPr sz="1100" b="0">
+                <a:solidFill>
+                  <a:srgbClr val="F1F5F9"/>
+                </a:solidFill>
+                <a:latin typeface="Arial"/>
+              </a:defRPr>
+            </a:pPr>
+            <a:r>
+              <a:t>📊  הנחיות מבצעיות בעברית</a:t>
+            </a:r>
+          </a:p>
+        </p:txBody>
+      </p:sp>
+      <p:sp>
+        <p:nvSpPr>
+          <p:cNvPr id="36" name="TextBox 35"/>
+          <p:cNvSpPr txBox="1"/>
+          <p:nvPr/>
+        </p:nvSpPr>
+        <p:spPr>
+          <a:xfrm>
+            <a:off x="8595360" y="5074919"/>
+            <a:ext cx="3108960" cy="274320"/>
           </a:xfrm>
           <a:prstGeom prst="rect">
             <a:avLst/>
@@ -8235,29 +9289,29 @@
           <a:lstStyle/>
           <a:p>
             <a:pPr algn="r">
-              <a:defRPr sz="1600" b="1">
-                <a:solidFill>
-                  <a:srgbClr val="FFFFFF"/>
-                </a:solidFill>
-                <a:latin typeface="Arial"/>
-              </a:defRPr>
-            </a:pPr>
-            <a:r>
-              <a:t>תחנות משטרה</a:t>
-            </a:r>
-          </a:p>
-        </p:txBody>
-      </p:sp>
-      <p:sp>
-        <p:nvSpPr>
-          <p:cNvPr id="23" name="TextBox 22"/>
-          <p:cNvSpPr txBox="1"/>
-          <p:nvPr/>
-        </p:nvSpPr>
-        <p:spPr>
-          <a:xfrm>
-            <a:off x="4480559" y="4572000"/>
-            <a:ext cx="2926080" cy="1280160"/>
+              <a:defRPr sz="1100" b="0">
+                <a:solidFill>
+                  <a:srgbClr val="F1F5F9"/>
+                </a:solidFill>
+                <a:latin typeface="Arial"/>
+              </a:defRPr>
+            </a:pPr>
+            <a:r>
+              <a:t>📊  פילוח דמוגרפי (גילאים, ח"כ)</a:t>
+            </a:r>
+          </a:p>
+        </p:txBody>
+      </p:sp>
+      <p:sp>
+        <p:nvSpPr>
+          <p:cNvPr id="37" name="TextBox 36"/>
+          <p:cNvSpPr txBox="1"/>
+          <p:nvPr/>
+        </p:nvSpPr>
+        <p:spPr>
+          <a:xfrm>
+            <a:off x="8595360" y="5394959"/>
+            <a:ext cx="3108960" cy="274320"/>
           </a:xfrm>
           <a:prstGeom prst="rect">
             <a:avLst/>
@@ -8271,176 +9325,15 @@
           <a:lstStyle/>
           <a:p>
             <a:pPr algn="r">
-              <a:defRPr sz="1200" b="0">
-                <a:solidFill>
-                  <a:srgbClr val="94A3B8"/>
-                </a:solidFill>
-                <a:latin typeface="Arial"/>
-              </a:defRPr>
-            </a:pPr>
-            <a:r>
-              <a:t>נתוני OSM אמיתיים עם אייקון</a:t>
-            </a:r>
-            <a:br/>
-            <a:r>
-              <a:t>משטרת ישראל על המפה</a:t>
-            </a:r>
-          </a:p>
-        </p:txBody>
-      </p:sp>
-      <p:sp>
-        <p:nvSpPr>
-          <p:cNvPr id="24" name="Rounded Rectangle 23"/>
-          <p:cNvSpPr/>
-          <p:nvPr/>
-        </p:nvSpPr>
-        <p:spPr>
-          <a:xfrm>
-            <a:off x="7955279" y="3840480"/>
-            <a:ext cx="3474720" cy="2286000"/>
-          </a:xfrm>
-          <a:prstGeom prst="roundRect">
-            <a:avLst/>
-          </a:prstGeom>
-          <a:solidFill>
-            <a:srgbClr val="1E293B"/>
-          </a:solidFill>
-          <a:ln w="19050">
-            <a:solidFill>
-              <a:srgbClr val="334155"/>
-            </a:solidFill>
-          </a:ln>
-        </p:spPr>
-        <p:style>
-          <a:lnRef idx="1">
-            <a:schemeClr val="accent1"/>
-          </a:lnRef>
-          <a:fillRef idx="3">
-            <a:schemeClr val="accent1"/>
-          </a:fillRef>
-          <a:effectRef idx="2">
-            <a:schemeClr val="accent1"/>
-          </a:effectRef>
-          <a:fontRef idx="minor">
-            <a:schemeClr val="lt1"/>
-          </a:fontRef>
-        </p:style>
-        <p:txBody>
-          <a:bodyPr rtlCol="0" anchor="ctr"/>
-          <a:lstStyle/>
-          <a:p>
-            <a:pPr algn="ctr"/>
-          </a:p>
-        </p:txBody>
-      </p:sp>
-      <p:sp>
-        <p:nvSpPr>
-          <p:cNvPr id="25" name="TextBox 24"/>
-          <p:cNvSpPr txBox="1"/>
-          <p:nvPr/>
-        </p:nvSpPr>
-        <p:spPr>
-          <a:xfrm>
-            <a:off x="8138159" y="4023360"/>
-            <a:ext cx="548640" cy="548640"/>
-          </a:xfrm>
-          <a:prstGeom prst="rect">
-            <a:avLst/>
-          </a:prstGeom>
-          <a:noFill/>
-        </p:spPr>
-        <p:txBody>
-          <a:bodyPr wrap="square">
-            <a:spAutoFit/>
-          </a:bodyPr>
-          <a:lstStyle/>
-          <a:p>
-            <a:pPr algn="ctr">
-              <a:defRPr sz="2800" b="0">
-                <a:solidFill>
-                  <a:srgbClr val="FFFFFF"/>
-                </a:solidFill>
-                <a:latin typeface="Arial"/>
-              </a:defRPr>
-            </a:pPr>
-            <a:r>
-              <a:t>📋</a:t>
-            </a:r>
-          </a:p>
-        </p:txBody>
-      </p:sp>
-      <p:sp>
-        <p:nvSpPr>
-          <p:cNvPr id="26" name="TextBox 25"/>
-          <p:cNvSpPr txBox="1"/>
-          <p:nvPr/>
-        </p:nvSpPr>
-        <p:spPr>
-          <a:xfrm>
-            <a:off x="8686800" y="4023360"/>
-            <a:ext cx="2468880" cy="365760"/>
-          </a:xfrm>
-          <a:prstGeom prst="rect">
-            <a:avLst/>
-          </a:prstGeom>
-          <a:noFill/>
-        </p:spPr>
-        <p:txBody>
-          <a:bodyPr wrap="square">
-            <a:spAutoFit/>
-          </a:bodyPr>
-          <a:lstStyle/>
-          <a:p>
-            <a:pPr algn="r">
-              <a:defRPr sz="1600" b="1">
-                <a:solidFill>
-                  <a:srgbClr val="FFFFFF"/>
-                </a:solidFill>
-                <a:latin typeface="Arial"/>
-              </a:defRPr>
-            </a:pPr>
-            <a:r>
-              <a:t>הנחיות מבצעיות</a:t>
-            </a:r>
-          </a:p>
-        </p:txBody>
-      </p:sp>
-      <p:sp>
-        <p:nvSpPr>
-          <p:cNvPr id="27" name="TextBox 26"/>
-          <p:cNvSpPr txBox="1"/>
-          <p:nvPr/>
-        </p:nvSpPr>
-        <p:spPr>
-          <a:xfrm>
-            <a:off x="8229600" y="4572000"/>
-            <a:ext cx="2926080" cy="1280160"/>
-          </a:xfrm>
-          <a:prstGeom prst="rect">
-            <a:avLst/>
-          </a:prstGeom>
-          <a:noFill/>
-        </p:spPr>
-        <p:txBody>
-          <a:bodyPr wrap="square">
-            <a:spAutoFit/>
-          </a:bodyPr>
-          <a:lstStyle/>
-          <a:p>
-            <a:pPr algn="r">
-              <a:defRPr sz="1200" b="0">
-                <a:solidFill>
-                  <a:srgbClr val="94A3B8"/>
-                </a:solidFill>
-                <a:latin typeface="Arial"/>
-              </a:defRPr>
-            </a:pPr>
-            <a:r>
-              <a:t>ניידות גיבוי, צירי פינוי,</a:t>
-            </a:r>
-            <a:br/>
-            <a:r>
-              <a:t>מקלטים אנכיים — לכל עיר</a:t>
+              <a:defRPr sz="1100" b="0">
+                <a:solidFill>
+                  <a:srgbClr val="F1F5F9"/>
+                </a:solidFill>
+                <a:latin typeface="Arial"/>
+              </a:defRPr>
+            </a:pPr>
+            <a:r>
+              <a:t>📊  ייצוא PDF לתחנה</a:t>
             </a:r>
           </a:p>
         </p:txBody>
@@ -8545,7 +9438,7 @@
               </a:defRPr>
             </a:pPr>
             <a:r>
-              <a:t>מקורות מידע וביבליוגרפיה</a:t>
+              <a:t>היישום: GIS אינטראקטיבי לתיעדוף בזמן אמת</a:t>
             </a:r>
           </a:p>
         </p:txBody>
@@ -8559,7 +9452,7 @@
         <p:spPr>
           <a:xfrm>
             <a:off x="457200" y="1188720"/>
-            <a:ext cx="5486400" cy="3200400"/>
+            <a:ext cx="3474720" cy="2286000"/>
           </a:xfrm>
           <a:prstGeom prst="roundRect">
             <a:avLst/>
@@ -8603,8 +9496,44 @@
         </p:nvSpPr>
         <p:spPr>
           <a:xfrm>
-            <a:off x="640080" y="1280160"/>
-            <a:ext cx="5120640" cy="365760"/>
+            <a:off x="640080" y="1371600"/>
+            <a:ext cx="548640" cy="548640"/>
+          </a:xfrm>
+          <a:prstGeom prst="rect">
+            <a:avLst/>
+          </a:prstGeom>
+          <a:noFill/>
+        </p:spPr>
+        <p:txBody>
+          <a:bodyPr wrap="square">
+            <a:spAutoFit/>
+          </a:bodyPr>
+          <a:lstStyle/>
+          <a:p>
+            <a:pPr algn="ctr">
+              <a:defRPr sz="2800" b="0">
+                <a:solidFill>
+                  <a:srgbClr val="FFFFFF"/>
+                </a:solidFill>
+                <a:latin typeface="Arial"/>
+              </a:defRPr>
+            </a:pPr>
+            <a:r>
+              <a:t>🗺️</a:t>
+            </a:r>
+          </a:p>
+        </p:txBody>
+      </p:sp>
+      <p:sp>
+        <p:nvSpPr>
+          <p:cNvPr id="6" name="TextBox 5"/>
+          <p:cNvSpPr txBox="1"/>
+          <p:nvPr/>
+        </p:nvSpPr>
+        <p:spPr>
+          <a:xfrm>
+            <a:off x="1188720" y="1371600"/>
+            <a:ext cx="2468880" cy="365760"/>
           </a:xfrm>
           <a:prstGeom prst="rect">
             <a:avLst/>
@@ -8626,21 +9555,21 @@
               </a:defRPr>
             </a:pPr>
             <a:r>
-              <a:t>📂  מקורות נתונים</a:t>
-            </a:r>
-          </a:p>
-        </p:txBody>
-      </p:sp>
-      <p:sp>
-        <p:nvSpPr>
-          <p:cNvPr id="6" name="TextBox 5"/>
-          <p:cNvSpPr txBox="1"/>
-          <p:nvPr/>
-        </p:nvSpPr>
-        <p:spPr>
-          <a:xfrm>
-            <a:off x="640080" y="1828800"/>
-            <a:ext cx="5120640" cy="320040"/>
+              <a:t>מפת GIS</a:t>
+            </a:r>
+          </a:p>
+        </p:txBody>
+      </p:sp>
+      <p:sp>
+        <p:nvSpPr>
+          <p:cNvPr id="7" name="TextBox 6"/>
+          <p:cNvSpPr txBox="1"/>
+          <p:nvPr/>
+        </p:nvSpPr>
+        <p:spPr>
+          <a:xfrm>
+            <a:off x="731520" y="1920240"/>
+            <a:ext cx="2926080" cy="1280160"/>
           </a:xfrm>
           <a:prstGeom prst="rect">
             <a:avLst/>
@@ -8656,568 +9585,31 @@
             <a:pPr algn="r">
               <a:defRPr sz="1200" b="0">
                 <a:solidFill>
-                  <a:srgbClr val="F1F5F9"/>
-                </a:solidFill>
-                <a:latin typeface="Arial"/>
-              </a:defRPr>
-            </a:pPr>
-            <a:r>
-              <a:t>▸  הלמ"ס — נתוני אוכלוסייה, גילאים, אשכול סוציו-אקונומי</a:t>
-            </a:r>
-          </a:p>
-        </p:txBody>
-      </p:sp>
-      <p:sp>
-        <p:nvSpPr>
-          <p:cNvPr id="7" name="TextBox 6"/>
-          <p:cNvSpPr txBox="1"/>
-          <p:nvPr/>
-        </p:nvSpPr>
-        <p:spPr>
-          <a:xfrm>
-            <a:off x="640080" y="2212848"/>
-            <a:ext cx="5120640" cy="320040"/>
-          </a:xfrm>
-          <a:prstGeom prst="rect">
-            <a:avLst/>
-          </a:prstGeom>
-          <a:noFill/>
-        </p:spPr>
-        <p:txBody>
-          <a:bodyPr wrap="square">
-            <a:spAutoFit/>
-          </a:bodyPr>
-          <a:lstStyle/>
-          <a:p>
-            <a:pPr algn="r">
-              <a:defRPr sz="1200" b="0">
-                <a:solidFill>
-                  <a:srgbClr val="F1F5F9"/>
-                </a:solidFill>
-                <a:latin typeface="Arial"/>
-              </a:defRPr>
-            </a:pPr>
-            <a:r>
-              <a:t>▸  מפ"י — מודל גובה דיגיטלי (DEM) 5 מטר</a:t>
-            </a:r>
-          </a:p>
-        </p:txBody>
-      </p:sp>
-      <p:sp>
-        <p:nvSpPr>
-          <p:cNvPr id="8" name="TextBox 7"/>
-          <p:cNvSpPr txBox="1"/>
-          <p:nvPr/>
-        </p:nvSpPr>
-        <p:spPr>
-          <a:xfrm>
-            <a:off x="640080" y="2596896"/>
-            <a:ext cx="5120640" cy="320040"/>
-          </a:xfrm>
-          <a:prstGeom prst="rect">
-            <a:avLst/>
-          </a:prstGeom>
-          <a:noFill/>
-        </p:spPr>
-        <p:txBody>
-          <a:bodyPr wrap="square">
-            <a:spAutoFit/>
-          </a:bodyPr>
-          <a:lstStyle/>
-          <a:p>
-            <a:pPr algn="r">
-              <a:defRPr sz="1200" b="0">
-                <a:solidFill>
-                  <a:srgbClr val="F1F5F9"/>
-                </a:solidFill>
-                <a:latin typeface="Arial"/>
-              </a:defRPr>
-            </a:pPr>
-            <a:r>
-              <a:t>▸  GSI (מכון גיאולוגי) — מודל הצפות צונאמי</a:t>
-            </a:r>
-          </a:p>
-        </p:txBody>
-      </p:sp>
-      <p:sp>
-        <p:nvSpPr>
-          <p:cNvPr id="9" name="TextBox 8"/>
-          <p:cNvSpPr txBox="1"/>
-          <p:nvPr/>
-        </p:nvSpPr>
-        <p:spPr>
-          <a:xfrm>
-            <a:off x="640080" y="2980944"/>
-            <a:ext cx="5120640" cy="320040"/>
-          </a:xfrm>
-          <a:prstGeom prst="rect">
-            <a:avLst/>
-          </a:prstGeom>
-          <a:noFill/>
-        </p:spPr>
-        <p:txBody>
-          <a:bodyPr wrap="square">
-            <a:spAutoFit/>
-          </a:bodyPr>
-          <a:lstStyle/>
-          <a:p>
-            <a:pPr algn="r">
-              <a:defRPr sz="1200" b="0">
-                <a:solidFill>
-                  <a:srgbClr val="F1F5F9"/>
-                </a:solidFill>
-                <a:latin typeface="Arial"/>
-              </a:defRPr>
-            </a:pPr>
-            <a:r>
-              <a:t>▸  OpenStreetMap — גבולות מוניציפליים, כבישים, מבנים, תחנות</a:t>
-            </a:r>
-          </a:p>
-        </p:txBody>
-      </p:sp>
-      <p:sp>
-        <p:nvSpPr>
-          <p:cNvPr id="10" name="TextBox 9"/>
-          <p:cNvSpPr txBox="1"/>
-          <p:nvPr/>
-        </p:nvSpPr>
-        <p:spPr>
-          <a:xfrm>
-            <a:off x="640080" y="3364991"/>
-            <a:ext cx="5120640" cy="320040"/>
-          </a:xfrm>
-          <a:prstGeom prst="rect">
-            <a:avLst/>
-          </a:prstGeom>
-          <a:noFill/>
-        </p:spPr>
-        <p:txBody>
-          <a:bodyPr wrap="square">
-            <a:spAutoFit/>
-          </a:bodyPr>
-          <a:lstStyle/>
-          <a:p>
-            <a:pPr algn="r">
-              <a:defRPr sz="1200" b="0">
-                <a:solidFill>
-                  <a:srgbClr val="F1F5F9"/>
-                </a:solidFill>
-                <a:latin typeface="Arial"/>
-              </a:defRPr>
-            </a:pPr>
-            <a:r>
-              <a:t>▸  ESRI — שכבת Hillshade (תבליט)</a:t>
-            </a:r>
-          </a:p>
-        </p:txBody>
-      </p:sp>
-      <p:sp>
-        <p:nvSpPr>
-          <p:cNvPr id="11" name="TextBox 10"/>
-          <p:cNvSpPr txBox="1"/>
-          <p:nvPr/>
-        </p:nvSpPr>
-        <p:spPr>
-          <a:xfrm>
-            <a:off x="640080" y="3749039"/>
-            <a:ext cx="5120640" cy="320040"/>
-          </a:xfrm>
-          <a:prstGeom prst="rect">
-            <a:avLst/>
-          </a:prstGeom>
-          <a:noFill/>
-        </p:spPr>
-        <p:txBody>
-          <a:bodyPr wrap="square">
-            <a:spAutoFit/>
-          </a:bodyPr>
-          <a:lstStyle/>
-          <a:p>
-            <a:pPr algn="r">
-              <a:defRPr sz="1200" b="0">
-                <a:solidFill>
-                  <a:srgbClr val="F1F5F9"/>
-                </a:solidFill>
-                <a:latin typeface="Arial"/>
-              </a:defRPr>
-            </a:pPr>
-            <a:r>
-              <a:t>▸  GOVMAP — שכבות WMS ממשלתיות</a:t>
-            </a:r>
-          </a:p>
-        </p:txBody>
-      </p:sp>
-      <p:sp>
-        <p:nvSpPr>
-          <p:cNvPr id="12" name="Rounded Rectangle 11"/>
+                  <a:srgbClr val="94A3B8"/>
+                </a:solidFill>
+                <a:latin typeface="Arial"/>
+              </a:defRPr>
+            </a:pPr>
+            <a:r>
+              <a:t>מפת Leaflet עם שכבות OSM, ESRI</a:t>
+            </a:r>
+            <a:br/>
+            <a:r>
+              <a:t>Hillshade, ומפת חום הצפות דינמית</a:t>
+            </a:r>
+          </a:p>
+        </p:txBody>
+      </p:sp>
+      <p:sp>
+        <p:nvSpPr>
+          <p:cNvPr id="8" name="Rounded Rectangle 7"/>
           <p:cNvSpPr/>
           <p:nvPr/>
         </p:nvSpPr>
         <p:spPr>
           <a:xfrm>
-            <a:off x="6217920" y="1188720"/>
-            <a:ext cx="5486400" cy="3200400"/>
-          </a:xfrm>
-          <a:prstGeom prst="roundRect">
-            <a:avLst/>
-          </a:prstGeom>
-          <a:solidFill>
-            <a:srgbClr val="1E293B"/>
-          </a:solidFill>
-          <a:ln w="19050">
-            <a:solidFill>
-              <a:srgbClr val="14B8A6"/>
-            </a:solidFill>
-          </a:ln>
-        </p:spPr>
-        <p:style>
-          <a:lnRef idx="1">
-            <a:schemeClr val="accent1"/>
-          </a:lnRef>
-          <a:fillRef idx="3">
-            <a:schemeClr val="accent1"/>
-          </a:fillRef>
-          <a:effectRef idx="2">
-            <a:schemeClr val="accent1"/>
-          </a:effectRef>
-          <a:fontRef idx="minor">
-            <a:schemeClr val="lt1"/>
-          </a:fontRef>
-        </p:style>
-        <p:txBody>
-          <a:bodyPr rtlCol="0" anchor="ctr"/>
-          <a:lstStyle/>
-          <a:p>
-            <a:pPr algn="ctr"/>
-          </a:p>
-        </p:txBody>
-      </p:sp>
-      <p:sp>
-        <p:nvSpPr>
-          <p:cNvPr id="13" name="TextBox 12"/>
-          <p:cNvSpPr txBox="1"/>
-          <p:nvPr/>
-        </p:nvSpPr>
-        <p:spPr>
-          <a:xfrm>
-            <a:off x="6400800" y="1280160"/>
-            <a:ext cx="5120640" cy="365760"/>
-          </a:xfrm>
-          <a:prstGeom prst="rect">
-            <a:avLst/>
-          </a:prstGeom>
-          <a:noFill/>
-        </p:spPr>
-        <p:txBody>
-          <a:bodyPr wrap="square">
-            <a:spAutoFit/>
-          </a:bodyPr>
-          <a:lstStyle/>
-          <a:p>
-            <a:pPr algn="r">
-              <a:defRPr sz="1600" b="1">
-                <a:solidFill>
-                  <a:srgbClr val="14B8A6"/>
-                </a:solidFill>
-                <a:latin typeface="Arial"/>
-              </a:defRPr>
-            </a:pPr>
-            <a:r>
-              <a:t>📚  מקורות ביבליוגרפיים</a:t>
-            </a:r>
-          </a:p>
-        </p:txBody>
-      </p:sp>
-      <p:sp>
-        <p:nvSpPr>
-          <p:cNvPr id="14" name="TextBox 13"/>
-          <p:cNvSpPr txBox="1"/>
-          <p:nvPr/>
-        </p:nvSpPr>
-        <p:spPr>
-          <a:xfrm>
-            <a:off x="6400800" y="1737360"/>
-            <a:ext cx="5120640" cy="457200"/>
-          </a:xfrm>
-          <a:prstGeom prst="rect">
-            <a:avLst/>
-          </a:prstGeom>
-          <a:noFill/>
-        </p:spPr>
-        <p:txBody>
-          <a:bodyPr wrap="square">
-            <a:spAutoFit/>
-          </a:bodyPr>
-          <a:lstStyle/>
-          <a:p>
-            <a:pPr algn="r">
-              <a:defRPr sz="1000" b="0">
-                <a:solidFill>
-                  <a:srgbClr val="F1F5F9"/>
-                </a:solidFill>
-                <a:latin typeface="Courier New"/>
-              </a:defRPr>
-            </a:pPr>
-            <a:r>
-              <a:t>1. Wood, N. &amp; Jones, J. (2015). "Tsunami Exposure</a:t>
-            </a:r>
-            <a:br/>
-            <a:r>
-              <a:t>   Assessment" — USGS Scientific Report.</a:t>
-            </a:r>
-          </a:p>
-        </p:txBody>
-      </p:sp>
-      <p:sp>
-        <p:nvSpPr>
-          <p:cNvPr id="15" name="TextBox 14"/>
-          <p:cNvSpPr txBox="1"/>
-          <p:nvPr/>
-        </p:nvSpPr>
-        <p:spPr>
-          <a:xfrm>
-            <a:off x="6400800" y="2121408"/>
-            <a:ext cx="5120640" cy="457200"/>
-          </a:xfrm>
-          <a:prstGeom prst="rect">
-            <a:avLst/>
-          </a:prstGeom>
-          <a:noFill/>
-        </p:spPr>
-        <p:txBody>
-          <a:bodyPr wrap="square">
-            <a:spAutoFit/>
-          </a:bodyPr>
-          <a:lstStyle/>
-          <a:p>
-            <a:pPr algn="r">
-              <a:defRPr sz="1000" b="0">
-                <a:solidFill>
-                  <a:srgbClr val="F1F5F9"/>
-                </a:solidFill>
-                <a:latin typeface="Courier New"/>
-              </a:defRPr>
-            </a:pPr>
-            <a:r>
-              <a:t>2. Tucson Police Dept. — Workload-Based Staffing</a:t>
-            </a:r>
-            <a:br/>
-            <a:r>
-              <a:t>   Model for Resource Allocation.</a:t>
-            </a:r>
-          </a:p>
-        </p:txBody>
-      </p:sp>
-      <p:sp>
-        <p:nvSpPr>
-          <p:cNvPr id="16" name="TextBox 15"/>
-          <p:cNvSpPr txBox="1"/>
-          <p:nvPr/>
-        </p:nvSpPr>
-        <p:spPr>
-          <a:xfrm>
-            <a:off x="6400800" y="2505456"/>
-            <a:ext cx="5120640" cy="457200"/>
-          </a:xfrm>
-          <a:prstGeom prst="rect">
-            <a:avLst/>
-          </a:prstGeom>
-          <a:noFill/>
-        </p:spPr>
-        <p:txBody>
-          <a:bodyPr wrap="square">
-            <a:spAutoFit/>
-          </a:bodyPr>
-          <a:lstStyle/>
-          <a:p>
-            <a:pPr algn="r">
-              <a:defRPr sz="1000" b="0">
-                <a:solidFill>
-                  <a:srgbClr val="F1F5F9"/>
-                </a:solidFill>
-                <a:latin typeface="Courier New"/>
-              </a:defRPr>
-            </a:pPr>
-            <a:r>
-              <a:t>3. Mas, E. et al. (2012). "Agent-Based Simulation</a:t>
-            </a:r>
-            <a:br/>
-            <a:r>
-              <a:t>   of Tsunami Evacuation" — Natural Hazards.</a:t>
-            </a:r>
-          </a:p>
-        </p:txBody>
-      </p:sp>
-      <p:sp>
-        <p:nvSpPr>
-          <p:cNvPr id="17" name="TextBox 16"/>
-          <p:cNvSpPr txBox="1"/>
-          <p:nvPr/>
-        </p:nvSpPr>
-        <p:spPr>
-          <a:xfrm>
-            <a:off x="6400800" y="2889503"/>
-            <a:ext cx="5120640" cy="457200"/>
-          </a:xfrm>
-          <a:prstGeom prst="rect">
-            <a:avLst/>
-          </a:prstGeom>
-          <a:noFill/>
-        </p:spPr>
-        <p:txBody>
-          <a:bodyPr wrap="square">
-            <a:spAutoFit/>
-          </a:bodyPr>
-          <a:lstStyle/>
-          <a:p>
-            <a:pPr algn="r">
-              <a:defRPr sz="1000" b="0">
-                <a:solidFill>
-                  <a:srgbClr val="F1F5F9"/>
-                </a:solidFill>
-                <a:latin typeface="Courier New"/>
-              </a:defRPr>
-            </a:pPr>
-            <a:r>
-              <a:t>4. Patel, D. (2019). "GIS-Based Multi-Criteria</a:t>
-            </a:r>
-            <a:br/>
-            <a:r>
-              <a:t>   Tsunami Risk Assessment" — Applied Geography.</a:t>
-            </a:r>
-          </a:p>
-        </p:txBody>
-      </p:sp>
-      <p:sp>
-        <p:nvSpPr>
-          <p:cNvPr id="18" name="TextBox 17"/>
-          <p:cNvSpPr txBox="1"/>
-          <p:nvPr/>
-        </p:nvSpPr>
-        <p:spPr>
-          <a:xfrm>
-            <a:off x="6400800" y="3273551"/>
-            <a:ext cx="5120640" cy="457200"/>
-          </a:xfrm>
-          <a:prstGeom prst="rect">
-            <a:avLst/>
-          </a:prstGeom>
-          <a:noFill/>
-        </p:spPr>
-        <p:txBody>
-          <a:bodyPr wrap="square">
-            <a:spAutoFit/>
-          </a:bodyPr>
-          <a:lstStyle/>
-          <a:p>
-            <a:pPr algn="r">
-              <a:defRPr sz="1000" b="0">
-                <a:solidFill>
-                  <a:srgbClr val="F1F5F9"/>
-                </a:solidFill>
-                <a:latin typeface="Courier New"/>
-              </a:defRPr>
-            </a:pPr>
-            <a:r>
-              <a:t>5. Israel CBS (2022). "Socio-Economic Profiles</a:t>
-            </a:r>
-            <a:br/>
-            <a:r>
-              <a:t>   of Local Authorities" — Statistical Abstract.</a:t>
-            </a:r>
-          </a:p>
-        </p:txBody>
-      </p:sp>
-      <p:sp>
-        <p:nvSpPr>
-          <p:cNvPr id="19" name="TextBox 18"/>
-          <p:cNvSpPr txBox="1"/>
-          <p:nvPr/>
-        </p:nvSpPr>
-        <p:spPr>
-          <a:xfrm>
-            <a:off x="6400800" y="3657599"/>
-            <a:ext cx="5120640" cy="457200"/>
-          </a:xfrm>
-          <a:prstGeom prst="rect">
-            <a:avLst/>
-          </a:prstGeom>
-          <a:noFill/>
-        </p:spPr>
-        <p:txBody>
-          <a:bodyPr wrap="square">
-            <a:spAutoFit/>
-          </a:bodyPr>
-          <a:lstStyle/>
-          <a:p>
-            <a:pPr algn="r">
-              <a:defRPr sz="1000" b="0">
-                <a:solidFill>
-                  <a:srgbClr val="F1F5F9"/>
-                </a:solidFill>
-                <a:latin typeface="Courier New"/>
-              </a:defRPr>
-            </a:pPr>
-            <a:r>
-              <a:t>6. Geist, E. &amp; Parsons, T. (2006). "Probabilistic</a:t>
-            </a:r>
-            <a:br/>
-            <a:r>
-              <a:t>   Analysis of Tsunami Hazards" — Natural Hazards.</a:t>
-            </a:r>
-          </a:p>
-        </p:txBody>
-      </p:sp>
-      <p:sp>
-        <p:nvSpPr>
-          <p:cNvPr id="20" name="TextBox 19"/>
-          <p:cNvSpPr txBox="1"/>
-          <p:nvPr/>
-        </p:nvSpPr>
-        <p:spPr>
-          <a:xfrm>
-            <a:off x="6400800" y="4041648"/>
-            <a:ext cx="5120640" cy="457200"/>
-          </a:xfrm>
-          <a:prstGeom prst="rect">
-            <a:avLst/>
-          </a:prstGeom>
-          <a:noFill/>
-        </p:spPr>
-        <p:txBody>
-          <a:bodyPr wrap="square">
-            <a:spAutoFit/>
-          </a:bodyPr>
-          <a:lstStyle/>
-          <a:p>
-            <a:pPr algn="r">
-              <a:defRPr sz="1000" b="0">
-                <a:solidFill>
-                  <a:srgbClr val="F1F5F9"/>
-                </a:solidFill>
-                <a:latin typeface="Courier New"/>
-              </a:defRPr>
-            </a:pPr>
-            <a:r>
-              <a:t>7. Leone, F. et al. (2011). "Evacuation Modeling</a:t>
-            </a:r>
-            <a:br/>
-            <a:r>
-              <a:t>   for Tsunami Risk" — Natural Hazards &amp; Earth.</a:t>
-            </a:r>
-          </a:p>
-        </p:txBody>
-      </p:sp>
-      <p:sp>
-        <p:nvSpPr>
-          <p:cNvPr id="21" name="Rounded Rectangle 20"/>
-          <p:cNvSpPr/>
-          <p:nvPr/>
-        </p:nvSpPr>
-        <p:spPr>
-          <a:xfrm>
-            <a:off x="457200" y="4663440"/>
-            <a:ext cx="11247120" cy="1645920"/>
+            <a:off x="4206240" y="1188720"/>
+            <a:ext cx="3474720" cy="2286000"/>
           </a:xfrm>
           <a:prstGeom prst="roundRect">
             <a:avLst/>
@@ -9255,14 +9647,50 @@
       </p:sp>
       <p:sp>
         <p:nvSpPr>
-          <p:cNvPr id="22" name="TextBox 21"/>
-          <p:cNvSpPr txBox="1"/>
-          <p:nvPr/>
-        </p:nvSpPr>
-        <p:spPr>
-          <a:xfrm>
-            <a:off x="640080" y="4754880"/>
-            <a:ext cx="10881360" cy="365760"/>
+          <p:cNvPr id="9" name="TextBox 8"/>
+          <p:cNvSpPr txBox="1"/>
+          <p:nvPr/>
+        </p:nvSpPr>
+        <p:spPr>
+          <a:xfrm>
+            <a:off x="4389120" y="1371600"/>
+            <a:ext cx="548640" cy="548640"/>
+          </a:xfrm>
+          <a:prstGeom prst="rect">
+            <a:avLst/>
+          </a:prstGeom>
+          <a:noFill/>
+        </p:spPr>
+        <p:txBody>
+          <a:bodyPr wrap="square">
+            <a:spAutoFit/>
+          </a:bodyPr>
+          <a:lstStyle/>
+          <a:p>
+            <a:pPr algn="ctr">
+              <a:defRPr sz="2800" b="0">
+                <a:solidFill>
+                  <a:srgbClr val="FFFFFF"/>
+                </a:solidFill>
+                <a:latin typeface="Arial"/>
+              </a:defRPr>
+            </a:pPr>
+            <a:r>
+              <a:t>🏙️</a:t>
+            </a:r>
+          </a:p>
+        </p:txBody>
+      </p:sp>
+      <p:sp>
+        <p:nvSpPr>
+          <p:cNvPr id="10" name="TextBox 9"/>
+          <p:cNvSpPr txBox="1"/>
+          <p:nvPr/>
+        </p:nvSpPr>
+        <p:spPr>
+          <a:xfrm>
+            <a:off x="4937759" y="1371600"/>
+            <a:ext cx="2468880" cy="365760"/>
           </a:xfrm>
           <a:prstGeom prst="rect">
             <a:avLst/>
@@ -9284,7 +9712,478 @@
               </a:defRPr>
             </a:pPr>
             <a:r>
-              <a:t>🔧  סטאק טכנולוגי</a:t>
+              <a:t>גבולות ערים</a:t>
+            </a:r>
+          </a:p>
+        </p:txBody>
+      </p:sp>
+      <p:sp>
+        <p:nvSpPr>
+          <p:cNvPr id="11" name="TextBox 10"/>
+          <p:cNvSpPr txBox="1"/>
+          <p:nvPr/>
+        </p:nvSpPr>
+        <p:spPr>
+          <a:xfrm>
+            <a:off x="4480559" y="1920240"/>
+            <a:ext cx="2926080" cy="1280160"/>
+          </a:xfrm>
+          <a:prstGeom prst="rect">
+            <a:avLst/>
+          </a:prstGeom>
+          <a:noFill/>
+        </p:spPr>
+        <p:txBody>
+          <a:bodyPr wrap="square">
+            <a:spAutoFit/>
+          </a:bodyPr>
+          <a:lstStyle/>
+          <a:p>
+            <a:pPr algn="r">
+              <a:defRPr sz="1200" b="0">
+                <a:solidFill>
+                  <a:srgbClr val="94A3B8"/>
+                </a:solidFill>
+                <a:latin typeface="Arial"/>
+              </a:defRPr>
+            </a:pPr>
+            <a:r>
+              <a:t>554 גבולות מוניציפליים אמיתיים מ-OSM</a:t>
+            </a:r>
+            <a:br/>
+            <a:r>
+              <a:t>צבועים לפי ציון TSRS</a:t>
+            </a:r>
+          </a:p>
+        </p:txBody>
+      </p:sp>
+      <p:sp>
+        <p:nvSpPr>
+          <p:cNvPr id="12" name="Rounded Rectangle 11"/>
+          <p:cNvSpPr/>
+          <p:nvPr/>
+        </p:nvSpPr>
+        <p:spPr>
+          <a:xfrm>
+            <a:off x="7955279" y="1188720"/>
+            <a:ext cx="3474720" cy="2286000"/>
+          </a:xfrm>
+          <a:prstGeom prst="roundRect">
+            <a:avLst/>
+          </a:prstGeom>
+          <a:solidFill>
+            <a:srgbClr val="1E293B"/>
+          </a:solidFill>
+          <a:ln w="19050">
+            <a:solidFill>
+              <a:srgbClr val="334155"/>
+            </a:solidFill>
+          </a:ln>
+        </p:spPr>
+        <p:style>
+          <a:lnRef idx="1">
+            <a:schemeClr val="accent1"/>
+          </a:lnRef>
+          <a:fillRef idx="3">
+            <a:schemeClr val="accent1"/>
+          </a:fillRef>
+          <a:effectRef idx="2">
+            <a:schemeClr val="accent1"/>
+          </a:effectRef>
+          <a:fontRef idx="minor">
+            <a:schemeClr val="lt1"/>
+          </a:fontRef>
+        </p:style>
+        <p:txBody>
+          <a:bodyPr rtlCol="0" anchor="ctr"/>
+          <a:lstStyle/>
+          <a:p>
+            <a:pPr algn="ctr"/>
+          </a:p>
+        </p:txBody>
+      </p:sp>
+      <p:sp>
+        <p:nvSpPr>
+          <p:cNvPr id="13" name="TextBox 12"/>
+          <p:cNvSpPr txBox="1"/>
+          <p:nvPr/>
+        </p:nvSpPr>
+        <p:spPr>
+          <a:xfrm>
+            <a:off x="8138159" y="1371600"/>
+            <a:ext cx="548640" cy="548640"/>
+          </a:xfrm>
+          <a:prstGeom prst="rect">
+            <a:avLst/>
+          </a:prstGeom>
+          <a:noFill/>
+        </p:spPr>
+        <p:txBody>
+          <a:bodyPr wrap="square">
+            <a:spAutoFit/>
+          </a:bodyPr>
+          <a:lstStyle/>
+          <a:p>
+            <a:pPr algn="ctr">
+              <a:defRPr sz="2800" b="0">
+                <a:solidFill>
+                  <a:srgbClr val="FFFFFF"/>
+                </a:solidFill>
+                <a:latin typeface="Arial"/>
+              </a:defRPr>
+            </a:pPr>
+            <a:r>
+              <a:t>🌊</a:t>
+            </a:r>
+          </a:p>
+        </p:txBody>
+      </p:sp>
+      <p:sp>
+        <p:nvSpPr>
+          <p:cNvPr id="14" name="TextBox 13"/>
+          <p:cNvSpPr txBox="1"/>
+          <p:nvPr/>
+        </p:nvSpPr>
+        <p:spPr>
+          <a:xfrm>
+            <a:off x="8686800" y="1371600"/>
+            <a:ext cx="2468880" cy="365760"/>
+          </a:xfrm>
+          <a:prstGeom prst="rect">
+            <a:avLst/>
+          </a:prstGeom>
+          <a:noFill/>
+        </p:spPr>
+        <p:txBody>
+          <a:bodyPr wrap="square">
+            <a:spAutoFit/>
+          </a:bodyPr>
+          <a:lstStyle/>
+          <a:p>
+            <a:pPr algn="r">
+              <a:defRPr sz="1600" b="1">
+                <a:solidFill>
+                  <a:srgbClr val="FFFFFF"/>
+                </a:solidFill>
+                <a:latin typeface="Arial"/>
+              </a:defRPr>
+            </a:pPr>
+            <a:r>
+              <a:t>סליידר גובה גל</a:t>
+            </a:r>
+          </a:p>
+        </p:txBody>
+      </p:sp>
+      <p:sp>
+        <p:nvSpPr>
+          <p:cNvPr id="15" name="TextBox 14"/>
+          <p:cNvSpPr txBox="1"/>
+          <p:nvPr/>
+        </p:nvSpPr>
+        <p:spPr>
+          <a:xfrm>
+            <a:off x="8229600" y="1920240"/>
+            <a:ext cx="2926080" cy="1280160"/>
+          </a:xfrm>
+          <a:prstGeom prst="rect">
+            <a:avLst/>
+          </a:prstGeom>
+          <a:noFill/>
+        </p:spPr>
+        <p:txBody>
+          <a:bodyPr wrap="square">
+            <a:spAutoFit/>
+          </a:bodyPr>
+          <a:lstStyle/>
+          <a:p>
+            <a:pPr algn="r">
+              <a:defRPr sz="1200" b="0">
+                <a:solidFill>
+                  <a:srgbClr val="94A3B8"/>
+                </a:solidFill>
+                <a:latin typeface="Arial"/>
+              </a:defRPr>
+            </a:pPr>
+            <a:r>
+              <a:t>בחירת גובה גל 0.5-10 מ' עם</a:t>
+            </a:r>
+            <a:br/>
+            <a:r>
+              <a:t>עדכון מיידי של מפת החום</a:t>
+            </a:r>
+          </a:p>
+        </p:txBody>
+      </p:sp>
+      <p:sp>
+        <p:nvSpPr>
+          <p:cNvPr id="16" name="Rounded Rectangle 15"/>
+          <p:cNvSpPr/>
+          <p:nvPr/>
+        </p:nvSpPr>
+        <p:spPr>
+          <a:xfrm>
+            <a:off x="457200" y="3840480"/>
+            <a:ext cx="3474720" cy="2286000"/>
+          </a:xfrm>
+          <a:prstGeom prst="roundRect">
+            <a:avLst/>
+          </a:prstGeom>
+          <a:solidFill>
+            <a:srgbClr val="1E293B"/>
+          </a:solidFill>
+          <a:ln w="19050">
+            <a:solidFill>
+              <a:srgbClr val="334155"/>
+            </a:solidFill>
+          </a:ln>
+        </p:spPr>
+        <p:style>
+          <a:lnRef idx="1">
+            <a:schemeClr val="accent1"/>
+          </a:lnRef>
+          <a:fillRef idx="3">
+            <a:schemeClr val="accent1"/>
+          </a:fillRef>
+          <a:effectRef idx="2">
+            <a:schemeClr val="accent1"/>
+          </a:effectRef>
+          <a:fontRef idx="minor">
+            <a:schemeClr val="lt1"/>
+          </a:fontRef>
+        </p:style>
+        <p:txBody>
+          <a:bodyPr rtlCol="0" anchor="ctr"/>
+          <a:lstStyle/>
+          <a:p>
+            <a:pPr algn="ctr"/>
+          </a:p>
+        </p:txBody>
+      </p:sp>
+      <p:sp>
+        <p:nvSpPr>
+          <p:cNvPr id="17" name="TextBox 16"/>
+          <p:cNvSpPr txBox="1"/>
+          <p:nvPr/>
+        </p:nvSpPr>
+        <p:spPr>
+          <a:xfrm>
+            <a:off x="640080" y="4023360"/>
+            <a:ext cx="548640" cy="548640"/>
+          </a:xfrm>
+          <a:prstGeom prst="rect">
+            <a:avLst/>
+          </a:prstGeom>
+          <a:noFill/>
+        </p:spPr>
+        <p:txBody>
+          <a:bodyPr wrap="square">
+            <a:spAutoFit/>
+          </a:bodyPr>
+          <a:lstStyle/>
+          <a:p>
+            <a:pPr algn="ctr">
+              <a:defRPr sz="2800" b="0">
+                <a:solidFill>
+                  <a:srgbClr val="FFFFFF"/>
+                </a:solidFill>
+                <a:latin typeface="Arial"/>
+              </a:defRPr>
+            </a:pPr>
+            <a:r>
+              <a:t>📊</a:t>
+            </a:r>
+          </a:p>
+        </p:txBody>
+      </p:sp>
+      <p:sp>
+        <p:nvSpPr>
+          <p:cNvPr id="18" name="TextBox 17"/>
+          <p:cNvSpPr txBox="1"/>
+          <p:nvPr/>
+        </p:nvSpPr>
+        <p:spPr>
+          <a:xfrm>
+            <a:off x="1188720" y="4023360"/>
+            <a:ext cx="2468880" cy="365760"/>
+          </a:xfrm>
+          <a:prstGeom prst="rect">
+            <a:avLst/>
+          </a:prstGeom>
+          <a:noFill/>
+        </p:spPr>
+        <p:txBody>
+          <a:bodyPr wrap="square">
+            <a:spAutoFit/>
+          </a:bodyPr>
+          <a:lstStyle/>
+          <a:p>
+            <a:pPr algn="r">
+              <a:defRPr sz="1600" b="1">
+                <a:solidFill>
+                  <a:srgbClr val="FFFFFF"/>
+                </a:solidFill>
+                <a:latin typeface="Arial"/>
+              </a:defRPr>
+            </a:pPr>
+            <a:r>
+              <a:t>פילוח דמוגרפי</a:t>
+            </a:r>
+          </a:p>
+        </p:txBody>
+      </p:sp>
+      <p:sp>
+        <p:nvSpPr>
+          <p:cNvPr id="19" name="TextBox 18"/>
+          <p:cNvSpPr txBox="1"/>
+          <p:nvPr/>
+        </p:nvSpPr>
+        <p:spPr>
+          <a:xfrm>
+            <a:off x="731520" y="4572000"/>
+            <a:ext cx="2926080" cy="1280160"/>
+          </a:xfrm>
+          <a:prstGeom prst="rect">
+            <a:avLst/>
+          </a:prstGeom>
+          <a:noFill/>
+        </p:spPr>
+        <p:txBody>
+          <a:bodyPr wrap="square">
+            <a:spAutoFit/>
+          </a:bodyPr>
+          <a:lstStyle/>
+          <a:p>
+            <a:pPr algn="r">
+              <a:defRPr sz="1200" b="0">
+                <a:solidFill>
+                  <a:srgbClr val="94A3B8"/>
+                </a:solidFill>
+                <a:latin typeface="Arial"/>
+              </a:defRPr>
+            </a:pPr>
+            <a:r>
+              <a:t>התפלגות גילאים, אשכול ח"כ</a:t>
+            </a:r>
+            <a:br/>
+            <a:r>
+              <a:t>מנתוני למ"ס אמיתיים</a:t>
+            </a:r>
+          </a:p>
+        </p:txBody>
+      </p:sp>
+      <p:sp>
+        <p:nvSpPr>
+          <p:cNvPr id="20" name="Rounded Rectangle 19"/>
+          <p:cNvSpPr/>
+          <p:nvPr/>
+        </p:nvSpPr>
+        <p:spPr>
+          <a:xfrm>
+            <a:off x="4206240" y="3840480"/>
+            <a:ext cx="3474720" cy="2286000"/>
+          </a:xfrm>
+          <a:prstGeom prst="roundRect">
+            <a:avLst/>
+          </a:prstGeom>
+          <a:solidFill>
+            <a:srgbClr val="1E293B"/>
+          </a:solidFill>
+          <a:ln w="19050">
+            <a:solidFill>
+              <a:srgbClr val="334155"/>
+            </a:solidFill>
+          </a:ln>
+        </p:spPr>
+        <p:style>
+          <a:lnRef idx="1">
+            <a:schemeClr val="accent1"/>
+          </a:lnRef>
+          <a:fillRef idx="3">
+            <a:schemeClr val="accent1"/>
+          </a:fillRef>
+          <a:effectRef idx="2">
+            <a:schemeClr val="accent1"/>
+          </a:effectRef>
+          <a:fontRef idx="minor">
+            <a:schemeClr val="lt1"/>
+          </a:fontRef>
+        </p:style>
+        <p:txBody>
+          <a:bodyPr rtlCol="0" anchor="ctr"/>
+          <a:lstStyle/>
+          <a:p>
+            <a:pPr algn="ctr"/>
+          </a:p>
+        </p:txBody>
+      </p:sp>
+      <p:sp>
+        <p:nvSpPr>
+          <p:cNvPr id="21" name="TextBox 20"/>
+          <p:cNvSpPr txBox="1"/>
+          <p:nvPr/>
+        </p:nvSpPr>
+        <p:spPr>
+          <a:xfrm>
+            <a:off x="4389120" y="4023360"/>
+            <a:ext cx="548640" cy="548640"/>
+          </a:xfrm>
+          <a:prstGeom prst="rect">
+            <a:avLst/>
+          </a:prstGeom>
+          <a:noFill/>
+        </p:spPr>
+        <p:txBody>
+          <a:bodyPr wrap="square">
+            <a:spAutoFit/>
+          </a:bodyPr>
+          <a:lstStyle/>
+          <a:p>
+            <a:pPr algn="ctr">
+              <a:defRPr sz="2800" b="0">
+                <a:solidFill>
+                  <a:srgbClr val="FFFFFF"/>
+                </a:solidFill>
+                <a:latin typeface="Arial"/>
+              </a:defRPr>
+            </a:pPr>
+            <a:r>
+              <a:t>🛡️</a:t>
+            </a:r>
+          </a:p>
+        </p:txBody>
+      </p:sp>
+      <p:sp>
+        <p:nvSpPr>
+          <p:cNvPr id="22" name="TextBox 21"/>
+          <p:cNvSpPr txBox="1"/>
+          <p:nvPr/>
+        </p:nvSpPr>
+        <p:spPr>
+          <a:xfrm>
+            <a:off x="4937759" y="4023360"/>
+            <a:ext cx="2468880" cy="365760"/>
+          </a:xfrm>
+          <a:prstGeom prst="rect">
+            <a:avLst/>
+          </a:prstGeom>
+          <a:noFill/>
+        </p:spPr>
+        <p:txBody>
+          <a:bodyPr wrap="square">
+            <a:spAutoFit/>
+          </a:bodyPr>
+          <a:lstStyle/>
+          <a:p>
+            <a:pPr algn="r">
+              <a:defRPr sz="1600" b="1">
+                <a:solidFill>
+                  <a:srgbClr val="FFFFFF"/>
+                </a:solidFill>
+                <a:latin typeface="Arial"/>
+              </a:defRPr>
+            </a:pPr>
+            <a:r>
+              <a:t>תחנות משטרה</a:t>
             </a:r>
           </a:p>
         </p:txBody>
@@ -9297,8 +10196,8 @@
         </p:nvSpPr>
         <p:spPr>
           <a:xfrm>
-            <a:off x="640080" y="5212080"/>
-            <a:ext cx="2560320" cy="274320"/>
+            <a:off x="4480559" y="4572000"/>
+            <a:ext cx="2926080" cy="1280160"/>
           </a:xfrm>
           <a:prstGeom prst="rect">
             <a:avLst/>
@@ -9312,29 +10211,114 @@
           <a:lstStyle/>
           <a:p>
             <a:pPr algn="r">
-              <a:defRPr sz="1200" b="1">
-                <a:solidFill>
-                  <a:srgbClr val="14B8A6"/>
-                </a:solidFill>
-                <a:latin typeface="Arial"/>
-              </a:defRPr>
-            </a:pPr>
-            <a:r>
-              <a:t>Frontend</a:t>
-            </a:r>
-          </a:p>
-        </p:txBody>
-      </p:sp>
-      <p:sp>
-        <p:nvSpPr>
-          <p:cNvPr id="24" name="TextBox 23"/>
-          <p:cNvSpPr txBox="1"/>
-          <p:nvPr/>
-        </p:nvSpPr>
-        <p:spPr>
-          <a:xfrm>
-            <a:off x="640080" y="5486400"/>
-            <a:ext cx="2560320" cy="274320"/>
+              <a:defRPr sz="1200" b="0">
+                <a:solidFill>
+                  <a:srgbClr val="94A3B8"/>
+                </a:solidFill>
+                <a:latin typeface="Arial"/>
+              </a:defRPr>
+            </a:pPr>
+            <a:r>
+              <a:t>נתוני OSM אמיתיים עם אייקון</a:t>
+            </a:r>
+            <a:br/>
+            <a:r>
+              <a:t>משטרת ישראל על המפה</a:t>
+            </a:r>
+          </a:p>
+        </p:txBody>
+      </p:sp>
+      <p:sp>
+        <p:nvSpPr>
+          <p:cNvPr id="24" name="Rounded Rectangle 23"/>
+          <p:cNvSpPr/>
+          <p:nvPr/>
+        </p:nvSpPr>
+        <p:spPr>
+          <a:xfrm>
+            <a:off x="7955279" y="3840480"/>
+            <a:ext cx="3474720" cy="2286000"/>
+          </a:xfrm>
+          <a:prstGeom prst="roundRect">
+            <a:avLst/>
+          </a:prstGeom>
+          <a:solidFill>
+            <a:srgbClr val="1E293B"/>
+          </a:solidFill>
+          <a:ln w="19050">
+            <a:solidFill>
+              <a:srgbClr val="334155"/>
+            </a:solidFill>
+          </a:ln>
+        </p:spPr>
+        <p:style>
+          <a:lnRef idx="1">
+            <a:schemeClr val="accent1"/>
+          </a:lnRef>
+          <a:fillRef idx="3">
+            <a:schemeClr val="accent1"/>
+          </a:fillRef>
+          <a:effectRef idx="2">
+            <a:schemeClr val="accent1"/>
+          </a:effectRef>
+          <a:fontRef idx="minor">
+            <a:schemeClr val="lt1"/>
+          </a:fontRef>
+        </p:style>
+        <p:txBody>
+          <a:bodyPr rtlCol="0" anchor="ctr"/>
+          <a:lstStyle/>
+          <a:p>
+            <a:pPr algn="ctr"/>
+          </a:p>
+        </p:txBody>
+      </p:sp>
+      <p:sp>
+        <p:nvSpPr>
+          <p:cNvPr id="25" name="TextBox 24"/>
+          <p:cNvSpPr txBox="1"/>
+          <p:nvPr/>
+        </p:nvSpPr>
+        <p:spPr>
+          <a:xfrm>
+            <a:off x="8138159" y="4023360"/>
+            <a:ext cx="548640" cy="548640"/>
+          </a:xfrm>
+          <a:prstGeom prst="rect">
+            <a:avLst/>
+          </a:prstGeom>
+          <a:noFill/>
+        </p:spPr>
+        <p:txBody>
+          <a:bodyPr wrap="square">
+            <a:spAutoFit/>
+          </a:bodyPr>
+          <a:lstStyle/>
+          <a:p>
+            <a:pPr algn="ctr">
+              <a:defRPr sz="2800" b="0">
+                <a:solidFill>
+                  <a:srgbClr val="FFFFFF"/>
+                </a:solidFill>
+                <a:latin typeface="Arial"/>
+              </a:defRPr>
+            </a:pPr>
+            <a:r>
+              <a:t>📋</a:t>
+            </a:r>
+          </a:p>
+        </p:txBody>
+      </p:sp>
+      <p:sp>
+        <p:nvSpPr>
+          <p:cNvPr id="26" name="TextBox 25"/>
+          <p:cNvSpPr txBox="1"/>
+          <p:nvPr/>
+        </p:nvSpPr>
+        <p:spPr>
+          <a:xfrm>
+            <a:off x="8686800" y="4023360"/>
+            <a:ext cx="2468880" cy="365760"/>
           </a:xfrm>
           <a:prstGeom prst="rect">
             <a:avLst/>
@@ -9348,7 +10332,43 @@
           <a:lstStyle/>
           <a:p>
             <a:pPr algn="r">
-              <a:defRPr sz="1100" b="0">
+              <a:defRPr sz="1600" b="1">
+                <a:solidFill>
+                  <a:srgbClr val="FFFFFF"/>
+                </a:solidFill>
+                <a:latin typeface="Arial"/>
+              </a:defRPr>
+            </a:pPr>
+            <a:r>
+              <a:t>הנחיות מבצעיות</a:t>
+            </a:r>
+          </a:p>
+        </p:txBody>
+      </p:sp>
+      <p:sp>
+        <p:nvSpPr>
+          <p:cNvPr id="27" name="TextBox 26"/>
+          <p:cNvSpPr txBox="1"/>
+          <p:nvPr/>
+        </p:nvSpPr>
+        <p:spPr>
+          <a:xfrm>
+            <a:off x="8229600" y="4572000"/>
+            <a:ext cx="2926080" cy="1280160"/>
+          </a:xfrm>
+          <a:prstGeom prst="rect">
+            <a:avLst/>
+          </a:prstGeom>
+          <a:noFill/>
+        </p:spPr>
+        <p:txBody>
+          <a:bodyPr wrap="square">
+            <a:spAutoFit/>
+          </a:bodyPr>
+          <a:lstStyle/>
+          <a:p>
+            <a:pPr algn="r">
+              <a:defRPr sz="1200" b="0">
                 <a:solidFill>
                   <a:srgbClr val="94A3B8"/>
                 </a:solidFill>
@@ -9356,223 +10376,11 @@
               </a:defRPr>
             </a:pPr>
             <a:r>
-              <a:t>Leaflet.js + HTML/CSS/JS + Firebase</a:t>
-            </a:r>
-          </a:p>
-        </p:txBody>
-      </p:sp>
-      <p:sp>
-        <p:nvSpPr>
-          <p:cNvPr id="25" name="TextBox 24"/>
-          <p:cNvSpPr txBox="1"/>
-          <p:nvPr/>
-        </p:nvSpPr>
-        <p:spPr>
-          <a:xfrm>
-            <a:off x="3383280" y="5212080"/>
-            <a:ext cx="2560320" cy="274320"/>
-          </a:xfrm>
-          <a:prstGeom prst="rect">
-            <a:avLst/>
-          </a:prstGeom>
-          <a:noFill/>
-        </p:spPr>
-        <p:txBody>
-          <a:bodyPr wrap="square">
-            <a:spAutoFit/>
-          </a:bodyPr>
-          <a:lstStyle/>
-          <a:p>
-            <a:pPr algn="r">
-              <a:defRPr sz="1200" b="1">
-                <a:solidFill>
-                  <a:srgbClr val="14B8A6"/>
-                </a:solidFill>
-                <a:latin typeface="Arial"/>
-              </a:defRPr>
-            </a:pPr>
-            <a:r>
-              <a:t>Backend</a:t>
-            </a:r>
-          </a:p>
-        </p:txBody>
-      </p:sp>
-      <p:sp>
-        <p:nvSpPr>
-          <p:cNvPr id="26" name="TextBox 25"/>
-          <p:cNvSpPr txBox="1"/>
-          <p:nvPr/>
-        </p:nvSpPr>
-        <p:spPr>
-          <a:xfrm>
-            <a:off x="3383280" y="5486400"/>
-            <a:ext cx="2560320" cy="274320"/>
-          </a:xfrm>
-          <a:prstGeom prst="rect">
-            <a:avLst/>
-          </a:prstGeom>
-          <a:noFill/>
-        </p:spPr>
-        <p:txBody>
-          <a:bodyPr wrap="square">
-            <a:spAutoFit/>
-          </a:bodyPr>
-          <a:lstStyle/>
-          <a:p>
-            <a:pPr algn="r">
-              <a:defRPr sz="1100" b="0">
-                <a:solidFill>
-                  <a:srgbClr val="94A3B8"/>
-                </a:solidFill>
-                <a:latin typeface="Arial"/>
-              </a:defRPr>
-            </a:pPr>
-            <a:r>
-              <a:t>Python FastAPI + GeoJSON</a:t>
-            </a:r>
-          </a:p>
-        </p:txBody>
-      </p:sp>
-      <p:sp>
-        <p:nvSpPr>
-          <p:cNvPr id="27" name="TextBox 26"/>
-          <p:cNvSpPr txBox="1"/>
-          <p:nvPr/>
-        </p:nvSpPr>
-        <p:spPr>
-          <a:xfrm>
-            <a:off x="6126480" y="5212080"/>
-            <a:ext cx="2560320" cy="274320"/>
-          </a:xfrm>
-          <a:prstGeom prst="rect">
-            <a:avLst/>
-          </a:prstGeom>
-          <a:noFill/>
-        </p:spPr>
-        <p:txBody>
-          <a:bodyPr wrap="square">
-            <a:spAutoFit/>
-          </a:bodyPr>
-          <a:lstStyle/>
-          <a:p>
-            <a:pPr algn="r">
-              <a:defRPr sz="1200" b="1">
-                <a:solidFill>
-                  <a:srgbClr val="14B8A6"/>
-                </a:solidFill>
-                <a:latin typeface="Arial"/>
-              </a:defRPr>
-            </a:pPr>
-            <a:r>
-              <a:t>Map Services</a:t>
-            </a:r>
-          </a:p>
-        </p:txBody>
-      </p:sp>
-      <p:sp>
-        <p:nvSpPr>
-          <p:cNvPr id="28" name="TextBox 27"/>
-          <p:cNvSpPr txBox="1"/>
-          <p:nvPr/>
-        </p:nvSpPr>
-        <p:spPr>
-          <a:xfrm>
-            <a:off x="6126480" y="5486400"/>
-            <a:ext cx="2560320" cy="274320"/>
-          </a:xfrm>
-          <a:prstGeom prst="rect">
-            <a:avLst/>
-          </a:prstGeom>
-          <a:noFill/>
-        </p:spPr>
-        <p:txBody>
-          <a:bodyPr wrap="square">
-            <a:spAutoFit/>
-          </a:bodyPr>
-          <a:lstStyle/>
-          <a:p>
-            <a:pPr algn="r">
-              <a:defRPr sz="1100" b="0">
-                <a:solidFill>
-                  <a:srgbClr val="94A3B8"/>
-                </a:solidFill>
-                <a:latin typeface="Arial"/>
-              </a:defRPr>
-            </a:pPr>
-            <a:r>
-              <a:t>OSM + ESRI Hillshade + GOVMAP WMS</a:t>
-            </a:r>
-          </a:p>
-        </p:txBody>
-      </p:sp>
-      <p:sp>
-        <p:nvSpPr>
-          <p:cNvPr id="29" name="TextBox 28"/>
-          <p:cNvSpPr txBox="1"/>
-          <p:nvPr/>
-        </p:nvSpPr>
-        <p:spPr>
-          <a:xfrm>
-            <a:off x="8869680" y="5212080"/>
-            <a:ext cx="2560320" cy="274320"/>
-          </a:xfrm>
-          <a:prstGeom prst="rect">
-            <a:avLst/>
-          </a:prstGeom>
-          <a:noFill/>
-        </p:spPr>
-        <p:txBody>
-          <a:bodyPr wrap="square">
-            <a:spAutoFit/>
-          </a:bodyPr>
-          <a:lstStyle/>
-          <a:p>
-            <a:pPr algn="r">
-              <a:defRPr sz="1200" b="1">
-                <a:solidFill>
-                  <a:srgbClr val="14B8A6"/>
-                </a:solidFill>
-                <a:latin typeface="Arial"/>
-              </a:defRPr>
-            </a:pPr>
-            <a:r>
-              <a:t>Data</a:t>
-            </a:r>
-          </a:p>
-        </p:txBody>
-      </p:sp>
-      <p:sp>
-        <p:nvSpPr>
-          <p:cNvPr id="30" name="TextBox 29"/>
-          <p:cNvSpPr txBox="1"/>
-          <p:nvPr/>
-        </p:nvSpPr>
-        <p:spPr>
-          <a:xfrm>
-            <a:off x="8869680" y="5486400"/>
-            <a:ext cx="2560320" cy="274320"/>
-          </a:xfrm>
-          <a:prstGeom prst="rect">
-            <a:avLst/>
-          </a:prstGeom>
-          <a:noFill/>
-        </p:spPr>
-        <p:txBody>
-          <a:bodyPr wrap="square">
-            <a:spAutoFit/>
-          </a:bodyPr>
-          <a:lstStyle/>
-          <a:p>
-            <a:pPr algn="r">
-              <a:defRPr sz="1100" b="0">
-                <a:solidFill>
-                  <a:srgbClr val="94A3B8"/>
-                </a:solidFill>
-                <a:latin typeface="Arial"/>
-              </a:defRPr>
-            </a:pPr>
-            <a:r>
-              <a:t>CBS CSV + Overpass API + Leaflet.heat</a:t>
+              <a:t>ניידות גיבוי, צירי פינוי,</a:t>
+            </a:r>
+            <a:br/>
+            <a:r>
+              <a:t>מקלטים אנכיים — לכל עיר</a:t>
             </a:r>
           </a:p>
         </p:txBody>
@@ -9586,6 +10394,1138 @@
 </file>
 
 <file path=ppt/slides/slide7.xml><?xml version="1.0" encoding="utf-8"?>
+<p:sld xmlns:a="http://schemas.openxmlformats.org/drawingml/2006/main" xmlns:p="http://schemas.openxmlformats.org/presentationml/2006/main" xmlns:r="http://schemas.openxmlformats.org/officeDocument/2006/relationships">
+  <p:cSld>
+    <p:bg>
+      <p:bgPr>
+        <a:solidFill>
+          <a:srgbClr val="0F172A"/>
+        </a:solidFill>
+        <a:effectLst/>
+      </p:bgPr>
+    </p:bg>
+    <p:spTree>
+      <p:nvGrpSpPr>
+        <p:cNvPr id="1" name=""/>
+        <p:cNvGrpSpPr/>
+        <p:nvPr/>
+      </p:nvGrpSpPr>
+      <p:grpSpPr/>
+      <p:sp>
+        <p:nvSpPr>
+          <p:cNvPr id="2" name="Rectangle 1"/>
+          <p:cNvSpPr/>
+          <p:nvPr/>
+        </p:nvSpPr>
+        <p:spPr>
+          <a:xfrm>
+            <a:off x="0" y="0"/>
+            <a:ext cx="12191695" cy="54864"/>
+          </a:xfrm>
+          <a:prstGeom prst="rect">
+            <a:avLst/>
+          </a:prstGeom>
+          <a:solidFill>
+            <a:srgbClr val="14B8A6"/>
+          </a:solidFill>
+          <a:ln>
+            <a:noFill/>
+          </a:ln>
+        </p:spPr>
+        <p:style>
+          <a:lnRef idx="1">
+            <a:schemeClr val="accent1"/>
+          </a:lnRef>
+          <a:fillRef idx="3">
+            <a:schemeClr val="accent1"/>
+          </a:fillRef>
+          <a:effectRef idx="2">
+            <a:schemeClr val="accent1"/>
+          </a:effectRef>
+          <a:fontRef idx="minor">
+            <a:schemeClr val="lt1"/>
+          </a:fontRef>
+        </p:style>
+        <p:txBody>
+          <a:bodyPr rtlCol="0" anchor="ctr"/>
+          <a:lstStyle/>
+          <a:p>
+            <a:pPr algn="ctr"/>
+          </a:p>
+        </p:txBody>
+      </p:sp>
+      <p:sp>
+        <p:nvSpPr>
+          <p:cNvPr id="3" name="TextBox 2"/>
+          <p:cNvSpPr txBox="1"/>
+          <p:nvPr/>
+        </p:nvSpPr>
+        <p:spPr>
+          <a:xfrm>
+            <a:off x="731520" y="274320"/>
+            <a:ext cx="10698480" cy="640080"/>
+          </a:xfrm>
+          <a:prstGeom prst="rect">
+            <a:avLst/>
+          </a:prstGeom>
+          <a:noFill/>
+        </p:spPr>
+        <p:txBody>
+          <a:bodyPr wrap="square">
+            <a:spAutoFit/>
+          </a:bodyPr>
+          <a:lstStyle/>
+          <a:p>
+            <a:pPr algn="r">
+              <a:defRPr sz="3000" b="1">
+                <a:solidFill>
+                  <a:srgbClr val="14B8A6"/>
+                </a:solidFill>
+                <a:latin typeface="Arial"/>
+              </a:defRPr>
+            </a:pPr>
+            <a:r>
+              <a:t>מקורות מידע וביבליוגרפיה</a:t>
+            </a:r>
+          </a:p>
+        </p:txBody>
+      </p:sp>
+      <p:sp>
+        <p:nvSpPr>
+          <p:cNvPr id="4" name="Rounded Rectangle 3"/>
+          <p:cNvSpPr/>
+          <p:nvPr/>
+        </p:nvSpPr>
+        <p:spPr>
+          <a:xfrm>
+            <a:off x="457200" y="1188720"/>
+            <a:ext cx="5486400" cy="3200400"/>
+          </a:xfrm>
+          <a:prstGeom prst="roundRect">
+            <a:avLst/>
+          </a:prstGeom>
+          <a:solidFill>
+            <a:srgbClr val="1E293B"/>
+          </a:solidFill>
+          <a:ln w="19050">
+            <a:solidFill>
+              <a:srgbClr val="334155"/>
+            </a:solidFill>
+          </a:ln>
+        </p:spPr>
+        <p:style>
+          <a:lnRef idx="1">
+            <a:schemeClr val="accent1"/>
+          </a:lnRef>
+          <a:fillRef idx="3">
+            <a:schemeClr val="accent1"/>
+          </a:fillRef>
+          <a:effectRef idx="2">
+            <a:schemeClr val="accent1"/>
+          </a:effectRef>
+          <a:fontRef idx="minor">
+            <a:schemeClr val="lt1"/>
+          </a:fontRef>
+        </p:style>
+        <p:txBody>
+          <a:bodyPr rtlCol="0" anchor="ctr"/>
+          <a:lstStyle/>
+          <a:p>
+            <a:pPr algn="ctr"/>
+          </a:p>
+        </p:txBody>
+      </p:sp>
+      <p:sp>
+        <p:nvSpPr>
+          <p:cNvPr id="5" name="TextBox 4"/>
+          <p:cNvSpPr txBox="1"/>
+          <p:nvPr/>
+        </p:nvSpPr>
+        <p:spPr>
+          <a:xfrm>
+            <a:off x="640080" y="1280160"/>
+            <a:ext cx="5120640" cy="365760"/>
+          </a:xfrm>
+          <a:prstGeom prst="rect">
+            <a:avLst/>
+          </a:prstGeom>
+          <a:noFill/>
+        </p:spPr>
+        <p:txBody>
+          <a:bodyPr wrap="square">
+            <a:spAutoFit/>
+          </a:bodyPr>
+          <a:lstStyle/>
+          <a:p>
+            <a:pPr algn="r">
+              <a:defRPr sz="1600" b="1">
+                <a:solidFill>
+                  <a:srgbClr val="FFFFFF"/>
+                </a:solidFill>
+                <a:latin typeface="Arial"/>
+              </a:defRPr>
+            </a:pPr>
+            <a:r>
+              <a:t>📂  מקורות נתונים</a:t>
+            </a:r>
+          </a:p>
+        </p:txBody>
+      </p:sp>
+      <p:sp>
+        <p:nvSpPr>
+          <p:cNvPr id="6" name="TextBox 5"/>
+          <p:cNvSpPr txBox="1"/>
+          <p:nvPr/>
+        </p:nvSpPr>
+        <p:spPr>
+          <a:xfrm>
+            <a:off x="640080" y="1828800"/>
+            <a:ext cx="5120640" cy="320040"/>
+          </a:xfrm>
+          <a:prstGeom prst="rect">
+            <a:avLst/>
+          </a:prstGeom>
+          <a:noFill/>
+        </p:spPr>
+        <p:txBody>
+          <a:bodyPr wrap="square">
+            <a:spAutoFit/>
+          </a:bodyPr>
+          <a:lstStyle/>
+          <a:p>
+            <a:pPr algn="r">
+              <a:defRPr sz="1200" b="0">
+                <a:solidFill>
+                  <a:srgbClr val="F1F5F9"/>
+                </a:solidFill>
+                <a:latin typeface="Arial"/>
+              </a:defRPr>
+            </a:pPr>
+            <a:r>
+              <a:t>▸  הלמ"ס — נתוני אוכלוסייה, גילאים, אשכול סוציו-אקונומי</a:t>
+            </a:r>
+          </a:p>
+        </p:txBody>
+      </p:sp>
+      <p:sp>
+        <p:nvSpPr>
+          <p:cNvPr id="7" name="TextBox 6"/>
+          <p:cNvSpPr txBox="1"/>
+          <p:nvPr/>
+        </p:nvSpPr>
+        <p:spPr>
+          <a:xfrm>
+            <a:off x="640080" y="2212848"/>
+            <a:ext cx="5120640" cy="320040"/>
+          </a:xfrm>
+          <a:prstGeom prst="rect">
+            <a:avLst/>
+          </a:prstGeom>
+          <a:noFill/>
+        </p:spPr>
+        <p:txBody>
+          <a:bodyPr wrap="square">
+            <a:spAutoFit/>
+          </a:bodyPr>
+          <a:lstStyle/>
+          <a:p>
+            <a:pPr algn="r">
+              <a:defRPr sz="1200" b="0">
+                <a:solidFill>
+                  <a:srgbClr val="F1F5F9"/>
+                </a:solidFill>
+                <a:latin typeface="Arial"/>
+              </a:defRPr>
+            </a:pPr>
+            <a:r>
+              <a:t>▸  מפ"י — מודל גובה דיגיטלי (DEM) 5 מטר</a:t>
+            </a:r>
+          </a:p>
+        </p:txBody>
+      </p:sp>
+      <p:sp>
+        <p:nvSpPr>
+          <p:cNvPr id="8" name="TextBox 7"/>
+          <p:cNvSpPr txBox="1"/>
+          <p:nvPr/>
+        </p:nvSpPr>
+        <p:spPr>
+          <a:xfrm>
+            <a:off x="640080" y="2596896"/>
+            <a:ext cx="5120640" cy="320040"/>
+          </a:xfrm>
+          <a:prstGeom prst="rect">
+            <a:avLst/>
+          </a:prstGeom>
+          <a:noFill/>
+        </p:spPr>
+        <p:txBody>
+          <a:bodyPr wrap="square">
+            <a:spAutoFit/>
+          </a:bodyPr>
+          <a:lstStyle/>
+          <a:p>
+            <a:pPr algn="r">
+              <a:defRPr sz="1200" b="0">
+                <a:solidFill>
+                  <a:srgbClr val="F1F5F9"/>
+                </a:solidFill>
+                <a:latin typeface="Arial"/>
+              </a:defRPr>
+            </a:pPr>
+            <a:r>
+              <a:t>▸  GSI (מכון גיאולוגי) — מודל הצפות צונאמי</a:t>
+            </a:r>
+          </a:p>
+        </p:txBody>
+      </p:sp>
+      <p:sp>
+        <p:nvSpPr>
+          <p:cNvPr id="9" name="TextBox 8"/>
+          <p:cNvSpPr txBox="1"/>
+          <p:nvPr/>
+        </p:nvSpPr>
+        <p:spPr>
+          <a:xfrm>
+            <a:off x="640080" y="2980944"/>
+            <a:ext cx="5120640" cy="320040"/>
+          </a:xfrm>
+          <a:prstGeom prst="rect">
+            <a:avLst/>
+          </a:prstGeom>
+          <a:noFill/>
+        </p:spPr>
+        <p:txBody>
+          <a:bodyPr wrap="square">
+            <a:spAutoFit/>
+          </a:bodyPr>
+          <a:lstStyle/>
+          <a:p>
+            <a:pPr algn="r">
+              <a:defRPr sz="1200" b="0">
+                <a:solidFill>
+                  <a:srgbClr val="F1F5F9"/>
+                </a:solidFill>
+                <a:latin typeface="Arial"/>
+              </a:defRPr>
+            </a:pPr>
+            <a:r>
+              <a:t>▸  OpenStreetMap — גבולות מוניציפליים, כבישים, מבנים, תחנות</a:t>
+            </a:r>
+          </a:p>
+        </p:txBody>
+      </p:sp>
+      <p:sp>
+        <p:nvSpPr>
+          <p:cNvPr id="10" name="TextBox 9"/>
+          <p:cNvSpPr txBox="1"/>
+          <p:nvPr/>
+        </p:nvSpPr>
+        <p:spPr>
+          <a:xfrm>
+            <a:off x="640080" y="3364991"/>
+            <a:ext cx="5120640" cy="320040"/>
+          </a:xfrm>
+          <a:prstGeom prst="rect">
+            <a:avLst/>
+          </a:prstGeom>
+          <a:noFill/>
+        </p:spPr>
+        <p:txBody>
+          <a:bodyPr wrap="square">
+            <a:spAutoFit/>
+          </a:bodyPr>
+          <a:lstStyle/>
+          <a:p>
+            <a:pPr algn="r">
+              <a:defRPr sz="1200" b="0">
+                <a:solidFill>
+                  <a:srgbClr val="F1F5F9"/>
+                </a:solidFill>
+                <a:latin typeface="Arial"/>
+              </a:defRPr>
+            </a:pPr>
+            <a:r>
+              <a:t>▸  ESRI — שכבת Hillshade (תבליט)</a:t>
+            </a:r>
+          </a:p>
+        </p:txBody>
+      </p:sp>
+      <p:sp>
+        <p:nvSpPr>
+          <p:cNvPr id="11" name="TextBox 10"/>
+          <p:cNvSpPr txBox="1"/>
+          <p:nvPr/>
+        </p:nvSpPr>
+        <p:spPr>
+          <a:xfrm>
+            <a:off x="640080" y="3749039"/>
+            <a:ext cx="5120640" cy="320040"/>
+          </a:xfrm>
+          <a:prstGeom prst="rect">
+            <a:avLst/>
+          </a:prstGeom>
+          <a:noFill/>
+        </p:spPr>
+        <p:txBody>
+          <a:bodyPr wrap="square">
+            <a:spAutoFit/>
+          </a:bodyPr>
+          <a:lstStyle/>
+          <a:p>
+            <a:pPr algn="r">
+              <a:defRPr sz="1200" b="0">
+                <a:solidFill>
+                  <a:srgbClr val="F1F5F9"/>
+                </a:solidFill>
+                <a:latin typeface="Arial"/>
+              </a:defRPr>
+            </a:pPr>
+            <a:r>
+              <a:t>▸  GOVMAP — שכבות WMS ממשלתיות</a:t>
+            </a:r>
+          </a:p>
+        </p:txBody>
+      </p:sp>
+      <p:sp>
+        <p:nvSpPr>
+          <p:cNvPr id="12" name="Rounded Rectangle 11"/>
+          <p:cNvSpPr/>
+          <p:nvPr/>
+        </p:nvSpPr>
+        <p:spPr>
+          <a:xfrm>
+            <a:off x="6217920" y="1188720"/>
+            <a:ext cx="5486400" cy="3200400"/>
+          </a:xfrm>
+          <a:prstGeom prst="roundRect">
+            <a:avLst/>
+          </a:prstGeom>
+          <a:solidFill>
+            <a:srgbClr val="1E293B"/>
+          </a:solidFill>
+          <a:ln w="19050">
+            <a:solidFill>
+              <a:srgbClr val="14B8A6"/>
+            </a:solidFill>
+          </a:ln>
+        </p:spPr>
+        <p:style>
+          <a:lnRef idx="1">
+            <a:schemeClr val="accent1"/>
+          </a:lnRef>
+          <a:fillRef idx="3">
+            <a:schemeClr val="accent1"/>
+          </a:fillRef>
+          <a:effectRef idx="2">
+            <a:schemeClr val="accent1"/>
+          </a:effectRef>
+          <a:fontRef idx="minor">
+            <a:schemeClr val="lt1"/>
+          </a:fontRef>
+        </p:style>
+        <p:txBody>
+          <a:bodyPr rtlCol="0" anchor="ctr"/>
+          <a:lstStyle/>
+          <a:p>
+            <a:pPr algn="ctr"/>
+          </a:p>
+        </p:txBody>
+      </p:sp>
+      <p:sp>
+        <p:nvSpPr>
+          <p:cNvPr id="13" name="TextBox 12"/>
+          <p:cNvSpPr txBox="1"/>
+          <p:nvPr/>
+        </p:nvSpPr>
+        <p:spPr>
+          <a:xfrm>
+            <a:off x="6400800" y="1280160"/>
+            <a:ext cx="5120640" cy="365760"/>
+          </a:xfrm>
+          <a:prstGeom prst="rect">
+            <a:avLst/>
+          </a:prstGeom>
+          <a:noFill/>
+        </p:spPr>
+        <p:txBody>
+          <a:bodyPr wrap="square">
+            <a:spAutoFit/>
+          </a:bodyPr>
+          <a:lstStyle/>
+          <a:p>
+            <a:pPr algn="r">
+              <a:defRPr sz="1600" b="1">
+                <a:solidFill>
+                  <a:srgbClr val="14B8A6"/>
+                </a:solidFill>
+                <a:latin typeface="Arial"/>
+              </a:defRPr>
+            </a:pPr>
+            <a:r>
+              <a:t>📚  מקורות ביבליוגרפיים</a:t>
+            </a:r>
+          </a:p>
+        </p:txBody>
+      </p:sp>
+      <p:sp>
+        <p:nvSpPr>
+          <p:cNvPr id="14" name="TextBox 13"/>
+          <p:cNvSpPr txBox="1"/>
+          <p:nvPr/>
+        </p:nvSpPr>
+        <p:spPr>
+          <a:xfrm>
+            <a:off x="6400800" y="1737360"/>
+            <a:ext cx="5120640" cy="457200"/>
+          </a:xfrm>
+          <a:prstGeom prst="rect">
+            <a:avLst/>
+          </a:prstGeom>
+          <a:noFill/>
+        </p:spPr>
+        <p:txBody>
+          <a:bodyPr wrap="square">
+            <a:spAutoFit/>
+          </a:bodyPr>
+          <a:lstStyle/>
+          <a:p>
+            <a:pPr algn="r">
+              <a:defRPr sz="1000" b="0">
+                <a:solidFill>
+                  <a:srgbClr val="F1F5F9"/>
+                </a:solidFill>
+                <a:latin typeface="Courier New"/>
+              </a:defRPr>
+            </a:pPr>
+            <a:r>
+              <a:t>1. Wood, N. &amp; Jones, J. (2015). "Tsunami Exposure</a:t>
+            </a:r>
+            <a:br/>
+            <a:r>
+              <a:t>   Assessment" — USGS Scientific Report.</a:t>
+            </a:r>
+          </a:p>
+        </p:txBody>
+      </p:sp>
+      <p:sp>
+        <p:nvSpPr>
+          <p:cNvPr id="15" name="TextBox 14"/>
+          <p:cNvSpPr txBox="1"/>
+          <p:nvPr/>
+        </p:nvSpPr>
+        <p:spPr>
+          <a:xfrm>
+            <a:off x="6400800" y="2121408"/>
+            <a:ext cx="5120640" cy="457200"/>
+          </a:xfrm>
+          <a:prstGeom prst="rect">
+            <a:avLst/>
+          </a:prstGeom>
+          <a:noFill/>
+        </p:spPr>
+        <p:txBody>
+          <a:bodyPr wrap="square">
+            <a:spAutoFit/>
+          </a:bodyPr>
+          <a:lstStyle/>
+          <a:p>
+            <a:pPr algn="r">
+              <a:defRPr sz="1000" b="0">
+                <a:solidFill>
+                  <a:srgbClr val="F1F5F9"/>
+                </a:solidFill>
+                <a:latin typeface="Courier New"/>
+              </a:defRPr>
+            </a:pPr>
+            <a:r>
+              <a:t>2. Tucson Police Dept. — Workload-Based Staffing</a:t>
+            </a:r>
+            <a:br/>
+            <a:r>
+              <a:t>   Model for Resource Allocation.</a:t>
+            </a:r>
+          </a:p>
+        </p:txBody>
+      </p:sp>
+      <p:sp>
+        <p:nvSpPr>
+          <p:cNvPr id="16" name="TextBox 15"/>
+          <p:cNvSpPr txBox="1"/>
+          <p:nvPr/>
+        </p:nvSpPr>
+        <p:spPr>
+          <a:xfrm>
+            <a:off x="6400800" y="2505456"/>
+            <a:ext cx="5120640" cy="457200"/>
+          </a:xfrm>
+          <a:prstGeom prst="rect">
+            <a:avLst/>
+          </a:prstGeom>
+          <a:noFill/>
+        </p:spPr>
+        <p:txBody>
+          <a:bodyPr wrap="square">
+            <a:spAutoFit/>
+          </a:bodyPr>
+          <a:lstStyle/>
+          <a:p>
+            <a:pPr algn="r">
+              <a:defRPr sz="1000" b="0">
+                <a:solidFill>
+                  <a:srgbClr val="F1F5F9"/>
+                </a:solidFill>
+                <a:latin typeface="Courier New"/>
+              </a:defRPr>
+            </a:pPr>
+            <a:r>
+              <a:t>3. Mas, E. et al. (2012). "Agent-Based Simulation</a:t>
+            </a:r>
+            <a:br/>
+            <a:r>
+              <a:t>   of Tsunami Evacuation" — Natural Hazards.</a:t>
+            </a:r>
+          </a:p>
+        </p:txBody>
+      </p:sp>
+      <p:sp>
+        <p:nvSpPr>
+          <p:cNvPr id="17" name="TextBox 16"/>
+          <p:cNvSpPr txBox="1"/>
+          <p:nvPr/>
+        </p:nvSpPr>
+        <p:spPr>
+          <a:xfrm>
+            <a:off x="6400800" y="2889503"/>
+            <a:ext cx="5120640" cy="457200"/>
+          </a:xfrm>
+          <a:prstGeom prst="rect">
+            <a:avLst/>
+          </a:prstGeom>
+          <a:noFill/>
+        </p:spPr>
+        <p:txBody>
+          <a:bodyPr wrap="square">
+            <a:spAutoFit/>
+          </a:bodyPr>
+          <a:lstStyle/>
+          <a:p>
+            <a:pPr algn="r">
+              <a:defRPr sz="1000" b="0">
+                <a:solidFill>
+                  <a:srgbClr val="F1F5F9"/>
+                </a:solidFill>
+                <a:latin typeface="Courier New"/>
+              </a:defRPr>
+            </a:pPr>
+            <a:r>
+              <a:t>4. Patel, D. (2019). "GIS-Based Multi-Criteria</a:t>
+            </a:r>
+            <a:br/>
+            <a:r>
+              <a:t>   Tsunami Risk Assessment" — Applied Geography.</a:t>
+            </a:r>
+          </a:p>
+        </p:txBody>
+      </p:sp>
+      <p:sp>
+        <p:nvSpPr>
+          <p:cNvPr id="18" name="TextBox 17"/>
+          <p:cNvSpPr txBox="1"/>
+          <p:nvPr/>
+        </p:nvSpPr>
+        <p:spPr>
+          <a:xfrm>
+            <a:off x="6400800" y="3273551"/>
+            <a:ext cx="5120640" cy="457200"/>
+          </a:xfrm>
+          <a:prstGeom prst="rect">
+            <a:avLst/>
+          </a:prstGeom>
+          <a:noFill/>
+        </p:spPr>
+        <p:txBody>
+          <a:bodyPr wrap="square">
+            <a:spAutoFit/>
+          </a:bodyPr>
+          <a:lstStyle/>
+          <a:p>
+            <a:pPr algn="r">
+              <a:defRPr sz="1000" b="0">
+                <a:solidFill>
+                  <a:srgbClr val="F1F5F9"/>
+                </a:solidFill>
+                <a:latin typeface="Courier New"/>
+              </a:defRPr>
+            </a:pPr>
+            <a:r>
+              <a:t>5. Israel CBS (2022). "Socio-Economic Profiles</a:t>
+            </a:r>
+            <a:br/>
+            <a:r>
+              <a:t>   of Local Authorities" — Statistical Abstract.</a:t>
+            </a:r>
+          </a:p>
+        </p:txBody>
+      </p:sp>
+      <p:sp>
+        <p:nvSpPr>
+          <p:cNvPr id="19" name="TextBox 18"/>
+          <p:cNvSpPr txBox="1"/>
+          <p:nvPr/>
+        </p:nvSpPr>
+        <p:spPr>
+          <a:xfrm>
+            <a:off x="6400800" y="3657599"/>
+            <a:ext cx="5120640" cy="457200"/>
+          </a:xfrm>
+          <a:prstGeom prst="rect">
+            <a:avLst/>
+          </a:prstGeom>
+          <a:noFill/>
+        </p:spPr>
+        <p:txBody>
+          <a:bodyPr wrap="square">
+            <a:spAutoFit/>
+          </a:bodyPr>
+          <a:lstStyle/>
+          <a:p>
+            <a:pPr algn="r">
+              <a:defRPr sz="1000" b="0">
+                <a:solidFill>
+                  <a:srgbClr val="F1F5F9"/>
+                </a:solidFill>
+                <a:latin typeface="Courier New"/>
+              </a:defRPr>
+            </a:pPr>
+            <a:r>
+              <a:t>6. Geist, E. &amp; Parsons, T. (2006). "Probabilistic</a:t>
+            </a:r>
+            <a:br/>
+            <a:r>
+              <a:t>   Analysis of Tsunami Hazards" — Natural Hazards.</a:t>
+            </a:r>
+          </a:p>
+        </p:txBody>
+      </p:sp>
+      <p:sp>
+        <p:nvSpPr>
+          <p:cNvPr id="20" name="TextBox 19"/>
+          <p:cNvSpPr txBox="1"/>
+          <p:nvPr/>
+        </p:nvSpPr>
+        <p:spPr>
+          <a:xfrm>
+            <a:off x="6400800" y="4041648"/>
+            <a:ext cx="5120640" cy="457200"/>
+          </a:xfrm>
+          <a:prstGeom prst="rect">
+            <a:avLst/>
+          </a:prstGeom>
+          <a:noFill/>
+        </p:spPr>
+        <p:txBody>
+          <a:bodyPr wrap="square">
+            <a:spAutoFit/>
+          </a:bodyPr>
+          <a:lstStyle/>
+          <a:p>
+            <a:pPr algn="r">
+              <a:defRPr sz="1000" b="0">
+                <a:solidFill>
+                  <a:srgbClr val="F1F5F9"/>
+                </a:solidFill>
+                <a:latin typeface="Courier New"/>
+              </a:defRPr>
+            </a:pPr>
+            <a:r>
+              <a:t>7. Leone, F. et al. (2011). "Evacuation Modeling</a:t>
+            </a:r>
+            <a:br/>
+            <a:r>
+              <a:t>   for Tsunami Risk" — Natural Hazards &amp; Earth.</a:t>
+            </a:r>
+          </a:p>
+        </p:txBody>
+      </p:sp>
+      <p:sp>
+        <p:nvSpPr>
+          <p:cNvPr id="21" name="Rounded Rectangle 20"/>
+          <p:cNvSpPr/>
+          <p:nvPr/>
+        </p:nvSpPr>
+        <p:spPr>
+          <a:xfrm>
+            <a:off x="457200" y="4663440"/>
+            <a:ext cx="11247120" cy="1645920"/>
+          </a:xfrm>
+          <a:prstGeom prst="roundRect">
+            <a:avLst/>
+          </a:prstGeom>
+          <a:solidFill>
+            <a:srgbClr val="1E293B"/>
+          </a:solidFill>
+          <a:ln w="19050">
+            <a:solidFill>
+              <a:srgbClr val="334155"/>
+            </a:solidFill>
+          </a:ln>
+        </p:spPr>
+        <p:style>
+          <a:lnRef idx="1">
+            <a:schemeClr val="accent1"/>
+          </a:lnRef>
+          <a:fillRef idx="3">
+            <a:schemeClr val="accent1"/>
+          </a:fillRef>
+          <a:effectRef idx="2">
+            <a:schemeClr val="accent1"/>
+          </a:effectRef>
+          <a:fontRef idx="minor">
+            <a:schemeClr val="lt1"/>
+          </a:fontRef>
+        </p:style>
+        <p:txBody>
+          <a:bodyPr rtlCol="0" anchor="ctr"/>
+          <a:lstStyle/>
+          <a:p>
+            <a:pPr algn="ctr"/>
+          </a:p>
+        </p:txBody>
+      </p:sp>
+      <p:sp>
+        <p:nvSpPr>
+          <p:cNvPr id="22" name="TextBox 21"/>
+          <p:cNvSpPr txBox="1"/>
+          <p:nvPr/>
+        </p:nvSpPr>
+        <p:spPr>
+          <a:xfrm>
+            <a:off x="640080" y="4754880"/>
+            <a:ext cx="10881360" cy="365760"/>
+          </a:xfrm>
+          <a:prstGeom prst="rect">
+            <a:avLst/>
+          </a:prstGeom>
+          <a:noFill/>
+        </p:spPr>
+        <p:txBody>
+          <a:bodyPr wrap="square">
+            <a:spAutoFit/>
+          </a:bodyPr>
+          <a:lstStyle/>
+          <a:p>
+            <a:pPr algn="r">
+              <a:defRPr sz="1600" b="1">
+                <a:solidFill>
+                  <a:srgbClr val="FFFFFF"/>
+                </a:solidFill>
+                <a:latin typeface="Arial"/>
+              </a:defRPr>
+            </a:pPr>
+            <a:r>
+              <a:t>🔧  סטאק טכנולוגי</a:t>
+            </a:r>
+          </a:p>
+        </p:txBody>
+      </p:sp>
+      <p:sp>
+        <p:nvSpPr>
+          <p:cNvPr id="23" name="TextBox 22"/>
+          <p:cNvSpPr txBox="1"/>
+          <p:nvPr/>
+        </p:nvSpPr>
+        <p:spPr>
+          <a:xfrm>
+            <a:off x="640080" y="5212080"/>
+            <a:ext cx="2560320" cy="274320"/>
+          </a:xfrm>
+          <a:prstGeom prst="rect">
+            <a:avLst/>
+          </a:prstGeom>
+          <a:noFill/>
+        </p:spPr>
+        <p:txBody>
+          <a:bodyPr wrap="square">
+            <a:spAutoFit/>
+          </a:bodyPr>
+          <a:lstStyle/>
+          <a:p>
+            <a:pPr algn="r">
+              <a:defRPr sz="1200" b="1">
+                <a:solidFill>
+                  <a:srgbClr val="14B8A6"/>
+                </a:solidFill>
+                <a:latin typeface="Arial"/>
+              </a:defRPr>
+            </a:pPr>
+            <a:r>
+              <a:t>Frontend</a:t>
+            </a:r>
+          </a:p>
+        </p:txBody>
+      </p:sp>
+      <p:sp>
+        <p:nvSpPr>
+          <p:cNvPr id="24" name="TextBox 23"/>
+          <p:cNvSpPr txBox="1"/>
+          <p:nvPr/>
+        </p:nvSpPr>
+        <p:spPr>
+          <a:xfrm>
+            <a:off x="640080" y="5486400"/>
+            <a:ext cx="2560320" cy="274320"/>
+          </a:xfrm>
+          <a:prstGeom prst="rect">
+            <a:avLst/>
+          </a:prstGeom>
+          <a:noFill/>
+        </p:spPr>
+        <p:txBody>
+          <a:bodyPr wrap="square">
+            <a:spAutoFit/>
+          </a:bodyPr>
+          <a:lstStyle/>
+          <a:p>
+            <a:pPr algn="r">
+              <a:defRPr sz="1100" b="0">
+                <a:solidFill>
+                  <a:srgbClr val="94A3B8"/>
+                </a:solidFill>
+                <a:latin typeface="Arial"/>
+              </a:defRPr>
+            </a:pPr>
+            <a:r>
+              <a:t>Leaflet.js + HTML/CSS/JS + Firebase</a:t>
+            </a:r>
+          </a:p>
+        </p:txBody>
+      </p:sp>
+      <p:sp>
+        <p:nvSpPr>
+          <p:cNvPr id="25" name="TextBox 24"/>
+          <p:cNvSpPr txBox="1"/>
+          <p:nvPr/>
+        </p:nvSpPr>
+        <p:spPr>
+          <a:xfrm>
+            <a:off x="3383280" y="5212080"/>
+            <a:ext cx="2560320" cy="274320"/>
+          </a:xfrm>
+          <a:prstGeom prst="rect">
+            <a:avLst/>
+          </a:prstGeom>
+          <a:noFill/>
+        </p:spPr>
+        <p:txBody>
+          <a:bodyPr wrap="square">
+            <a:spAutoFit/>
+          </a:bodyPr>
+          <a:lstStyle/>
+          <a:p>
+            <a:pPr algn="r">
+              <a:defRPr sz="1200" b="1">
+                <a:solidFill>
+                  <a:srgbClr val="14B8A6"/>
+                </a:solidFill>
+                <a:latin typeface="Arial"/>
+              </a:defRPr>
+            </a:pPr>
+            <a:r>
+              <a:t>Backend</a:t>
+            </a:r>
+          </a:p>
+        </p:txBody>
+      </p:sp>
+      <p:sp>
+        <p:nvSpPr>
+          <p:cNvPr id="26" name="TextBox 25"/>
+          <p:cNvSpPr txBox="1"/>
+          <p:nvPr/>
+        </p:nvSpPr>
+        <p:spPr>
+          <a:xfrm>
+            <a:off x="3383280" y="5486400"/>
+            <a:ext cx="2560320" cy="274320"/>
+          </a:xfrm>
+          <a:prstGeom prst="rect">
+            <a:avLst/>
+          </a:prstGeom>
+          <a:noFill/>
+        </p:spPr>
+        <p:txBody>
+          <a:bodyPr wrap="square">
+            <a:spAutoFit/>
+          </a:bodyPr>
+          <a:lstStyle/>
+          <a:p>
+            <a:pPr algn="r">
+              <a:defRPr sz="1100" b="0">
+                <a:solidFill>
+                  <a:srgbClr val="94A3B8"/>
+                </a:solidFill>
+                <a:latin typeface="Arial"/>
+              </a:defRPr>
+            </a:pPr>
+            <a:r>
+              <a:t>Python FastAPI + GeoJSON</a:t>
+            </a:r>
+          </a:p>
+        </p:txBody>
+      </p:sp>
+      <p:sp>
+        <p:nvSpPr>
+          <p:cNvPr id="27" name="TextBox 26"/>
+          <p:cNvSpPr txBox="1"/>
+          <p:nvPr/>
+        </p:nvSpPr>
+        <p:spPr>
+          <a:xfrm>
+            <a:off x="6126480" y="5212080"/>
+            <a:ext cx="2560320" cy="274320"/>
+          </a:xfrm>
+          <a:prstGeom prst="rect">
+            <a:avLst/>
+          </a:prstGeom>
+          <a:noFill/>
+        </p:spPr>
+        <p:txBody>
+          <a:bodyPr wrap="square">
+            <a:spAutoFit/>
+          </a:bodyPr>
+          <a:lstStyle/>
+          <a:p>
+            <a:pPr algn="r">
+              <a:defRPr sz="1200" b="1">
+                <a:solidFill>
+                  <a:srgbClr val="14B8A6"/>
+                </a:solidFill>
+                <a:latin typeface="Arial"/>
+              </a:defRPr>
+            </a:pPr>
+            <a:r>
+              <a:t>Map Services</a:t>
+            </a:r>
+          </a:p>
+        </p:txBody>
+      </p:sp>
+      <p:sp>
+        <p:nvSpPr>
+          <p:cNvPr id="28" name="TextBox 27"/>
+          <p:cNvSpPr txBox="1"/>
+          <p:nvPr/>
+        </p:nvSpPr>
+        <p:spPr>
+          <a:xfrm>
+            <a:off x="6126480" y="5486400"/>
+            <a:ext cx="2560320" cy="274320"/>
+          </a:xfrm>
+          <a:prstGeom prst="rect">
+            <a:avLst/>
+          </a:prstGeom>
+          <a:noFill/>
+        </p:spPr>
+        <p:txBody>
+          <a:bodyPr wrap="square">
+            <a:spAutoFit/>
+          </a:bodyPr>
+          <a:lstStyle/>
+          <a:p>
+            <a:pPr algn="r">
+              <a:defRPr sz="1100" b="0">
+                <a:solidFill>
+                  <a:srgbClr val="94A3B8"/>
+                </a:solidFill>
+                <a:latin typeface="Arial"/>
+              </a:defRPr>
+            </a:pPr>
+            <a:r>
+              <a:t>OSM + ESRI Hillshade + GOVMAP WMS</a:t>
+            </a:r>
+          </a:p>
+        </p:txBody>
+      </p:sp>
+      <p:sp>
+        <p:nvSpPr>
+          <p:cNvPr id="29" name="TextBox 28"/>
+          <p:cNvSpPr txBox="1"/>
+          <p:nvPr/>
+        </p:nvSpPr>
+        <p:spPr>
+          <a:xfrm>
+            <a:off x="8869680" y="5212080"/>
+            <a:ext cx="2560320" cy="274320"/>
+          </a:xfrm>
+          <a:prstGeom prst="rect">
+            <a:avLst/>
+          </a:prstGeom>
+          <a:noFill/>
+        </p:spPr>
+        <p:txBody>
+          <a:bodyPr wrap="square">
+            <a:spAutoFit/>
+          </a:bodyPr>
+          <a:lstStyle/>
+          <a:p>
+            <a:pPr algn="r">
+              <a:defRPr sz="1200" b="1">
+                <a:solidFill>
+                  <a:srgbClr val="14B8A6"/>
+                </a:solidFill>
+                <a:latin typeface="Arial"/>
+              </a:defRPr>
+            </a:pPr>
+            <a:r>
+              <a:t>Data</a:t>
+            </a:r>
+          </a:p>
+        </p:txBody>
+      </p:sp>
+      <p:sp>
+        <p:nvSpPr>
+          <p:cNvPr id="30" name="TextBox 29"/>
+          <p:cNvSpPr txBox="1"/>
+          <p:nvPr/>
+        </p:nvSpPr>
+        <p:spPr>
+          <a:xfrm>
+            <a:off x="8869680" y="5486400"/>
+            <a:ext cx="2560320" cy="274320"/>
+          </a:xfrm>
+          <a:prstGeom prst="rect">
+            <a:avLst/>
+          </a:prstGeom>
+          <a:noFill/>
+        </p:spPr>
+        <p:txBody>
+          <a:bodyPr wrap="square">
+            <a:spAutoFit/>
+          </a:bodyPr>
+          <a:lstStyle/>
+          <a:p>
+            <a:pPr algn="r">
+              <a:defRPr sz="1100" b="0">
+                <a:solidFill>
+                  <a:srgbClr val="94A3B8"/>
+                </a:solidFill>
+                <a:latin typeface="Arial"/>
+              </a:defRPr>
+            </a:pPr>
+            <a:r>
+              <a:t>CBS CSV + Overpass API + Leaflet.heat</a:t>
+            </a:r>
+          </a:p>
+        </p:txBody>
+      </p:sp>
+    </p:spTree>
+  </p:cSld>
+  <p:clrMapOvr>
+    <a:masterClrMapping/>
+  </p:clrMapOvr>
+</p:sld>
+</file>
+
+<file path=ppt/slides/slide8.xml><?xml version="1.0" encoding="utf-8"?>
 <p:sld xmlns:a="http://schemas.openxmlformats.org/drawingml/2006/main" xmlns:p="http://schemas.openxmlformats.org/presentationml/2006/main" xmlns:r="http://schemas.openxmlformats.org/officeDocument/2006/relationships">
   <p:cSld>
     <p:bg>
